--- a/docs/slides.pptx
+++ b/docs/slides.pptx
@@ -3140,14 +3140,126 @@
       </p:sp>
       <p:sp>
         <p:nvSpPr>
-          <p:cNvPr id="3" name="TextBox 2"/>
+          <p:cNvPr id="3" name="Oval 2"/>
+          <p:cNvSpPr/>
+          <p:nvPr/>
+        </p:nvSpPr>
+        <p:spPr>
+          <a:xfrm>
+            <a:off x="-2743200" y="-2743200"/>
+            <a:ext cx="8229600" cy="8229600"/>
+          </a:xfrm>
+          <a:prstGeom prst="ellipse">
+            <a:avLst/>
+          </a:prstGeom>
+          <a:solidFill>
+            <a:srgbClr val="142B42"/>
+          </a:solidFill>
+          <a:ln>
+            <a:noFill/>
+          </a:ln>
+          <a:effectLst/>
+        </p:spPr>
+        <p:style>
+          <a:lnRef idx="1">
+            <a:schemeClr val="accent1"/>
+          </a:lnRef>
+          <a:fillRef idx="3">
+            <a:schemeClr val="accent1"/>
+          </a:fillRef>
+          <a:effectRef idx="2">
+            <a:schemeClr val="accent1"/>
+          </a:effectRef>
+          <a:fontRef idx="minor">
+            <a:schemeClr val="lt1"/>
+          </a:fontRef>
+        </p:style>
+        <p:txBody>
+          <a:bodyPr rtlCol="0" anchor="ctr"/>
+          <a:lstStyle/>
+          <a:p>
+            <a:pPr algn="ctr"/>
+          </a:p>
+        </p:txBody>
+      </p:sp>
+      <p:sp>
+        <p:nvSpPr>
+          <p:cNvPr id="4" name="Oval 3"/>
+          <p:cNvSpPr/>
+          <p:nvPr/>
+        </p:nvSpPr>
+        <p:spPr>
+          <a:xfrm>
+            <a:off x="9601200" y="4114800"/>
+            <a:ext cx="5486400" cy="5486400"/>
+          </a:xfrm>
+          <a:prstGeom prst="ellipse">
+            <a:avLst/>
+          </a:prstGeom>
+          <a:solidFill>
+            <a:srgbClr val="142B42"/>
+          </a:solidFill>
+          <a:ln>
+            <a:noFill/>
+          </a:ln>
+          <a:effectLst/>
+        </p:spPr>
+        <p:style>
+          <a:lnRef idx="1">
+            <a:schemeClr val="accent1"/>
+          </a:lnRef>
+          <a:fillRef idx="3">
+            <a:schemeClr val="accent1"/>
+          </a:fillRef>
+          <a:effectRef idx="2">
+            <a:schemeClr val="accent1"/>
+          </a:effectRef>
+          <a:fontRef idx="minor">
+            <a:schemeClr val="lt1"/>
+          </a:fontRef>
+        </p:style>
+        <p:txBody>
+          <a:bodyPr rtlCol="0" anchor="ctr"/>
+          <a:lstStyle/>
+          <a:p>
+            <a:pPr algn="ctr"/>
+          </a:p>
+        </p:txBody>
+      </p:sp>
+      <p:pic>
+        <p:nvPicPr>
+          <p:cNvPr id="5" name="Picture 4" descr="logo-icon.png"/>
+          <p:cNvPicPr>
+            <a:picLocks noChangeAspect="1"/>
+          </p:cNvPicPr>
+          <p:nvPr/>
+        </p:nvPicPr>
+        <p:blipFill>
+          <a:blip r:embed="rId2"/>
+          <a:stretch>
+            <a:fillRect/>
+          </a:stretch>
+        </p:blipFill>
+        <p:spPr>
+          <a:xfrm>
+            <a:off x="777240" y="822960"/>
+            <a:ext cx="1276945" cy="914400"/>
+          </a:xfrm>
+          <a:prstGeom prst="rect">
+            <a:avLst/>
+          </a:prstGeom>
+        </p:spPr>
+      </p:pic>
+      <p:sp>
+        <p:nvSpPr>
+          <p:cNvPr id="6" name="TextBox 5"/>
           <p:cNvSpPr txBox="1"/>
           <p:nvPr/>
         </p:nvSpPr>
         <p:spPr>
           <a:xfrm>
-            <a:off x="731520" y="2103120"/>
-            <a:ext cx="5486400" cy="457200"/>
+            <a:off x="731520" y="2148840"/>
+            <a:ext cx="7315200" cy="457200"/>
           </a:xfrm>
           <a:prstGeom prst="rect">
             <a:avLst/>
@@ -3162,7 +3274,7 @@
           <a:p>
             <a:pPr algn="l"/>
             <a:r>
-              <a:rPr sz="1400" b="1">
+              <a:rPr sz="1400" b="1" i="0">
                 <a:solidFill>
                   <a:srgbClr val="F5A623"/>
                 </a:solidFill>
@@ -3175,14 +3287,14 @@
       </p:sp>
       <p:sp>
         <p:nvSpPr>
-          <p:cNvPr id="4" name="TextBox 3"/>
+          <p:cNvPr id="7" name="TextBox 6"/>
           <p:cNvSpPr txBox="1"/>
           <p:nvPr/>
         </p:nvSpPr>
         <p:spPr>
           <a:xfrm>
-            <a:off x="685800" y="2468880"/>
-            <a:ext cx="8229600" cy="2011680"/>
+            <a:off x="685800" y="2542032"/>
+            <a:ext cx="9144000" cy="2011680"/>
           </a:xfrm>
           <a:prstGeom prst="rect">
             <a:avLst/>
@@ -3220,14 +3332,14 @@
       </p:sp>
       <p:sp>
         <p:nvSpPr>
-          <p:cNvPr id="5" name="TextBox 4"/>
+          <p:cNvPr id="8" name="TextBox 7"/>
           <p:cNvSpPr txBox="1"/>
           <p:nvPr/>
         </p:nvSpPr>
         <p:spPr>
           <a:xfrm>
-            <a:off x="731520" y="4480560"/>
-            <a:ext cx="7315200" cy="914400"/>
+            <a:off x="731520" y="4572000"/>
+            <a:ext cx="8229600" cy="914400"/>
           </a:xfrm>
           <a:prstGeom prst="rect">
             <a:avLst/>
@@ -3242,13 +3354,92 @@
           <a:p>
             <a:pPr algn="l"/>
             <a:r>
-              <a:rPr sz="2000" b="0">
+              <a:rPr sz="2000" b="0" i="0">
                 <a:solidFill>
                   <a:srgbClr val="9FB0AE"/>
                 </a:solidFill>
                 <a:latin typeface="Calibri"/>
               </a:rPr>
               <a:t>Convierte los reportes de una comunidad tras un sismo en recuperación verificable — de principio a fin.</a:t>
+            </a:r>
+          </a:p>
+        </p:txBody>
+      </p:sp>
+      <p:sp>
+        <p:nvSpPr>
+          <p:cNvPr id="9" name="Rectangle 8"/>
+          <p:cNvSpPr/>
+          <p:nvPr/>
+        </p:nvSpPr>
+        <p:spPr>
+          <a:xfrm>
+            <a:off x="731520" y="4343400"/>
+            <a:ext cx="1280160" cy="38100"/>
+          </a:xfrm>
+          <a:prstGeom prst="rect">
+            <a:avLst/>
+          </a:prstGeom>
+          <a:solidFill>
+            <a:srgbClr val="14B8A8"/>
+          </a:solidFill>
+          <a:ln>
+            <a:noFill/>
+          </a:ln>
+          <a:effectLst/>
+        </p:spPr>
+        <p:style>
+          <a:lnRef idx="1">
+            <a:schemeClr val="accent1"/>
+          </a:lnRef>
+          <a:fillRef idx="3">
+            <a:schemeClr val="accent1"/>
+          </a:fillRef>
+          <a:effectRef idx="2">
+            <a:schemeClr val="accent1"/>
+          </a:effectRef>
+          <a:fontRef idx="minor">
+            <a:schemeClr val="lt1"/>
+          </a:fontRef>
+        </p:style>
+        <p:txBody>
+          <a:bodyPr rtlCol="0" anchor="ctr"/>
+          <a:lstStyle/>
+          <a:p>
+            <a:pPr algn="ctr"/>
+          </a:p>
+        </p:txBody>
+      </p:sp>
+      <p:sp>
+        <p:nvSpPr>
+          <p:cNvPr id="10" name="TextBox 9"/>
+          <p:cNvSpPr txBox="1"/>
+          <p:nvPr/>
+        </p:nvSpPr>
+        <p:spPr>
+          <a:xfrm>
+            <a:off x="11247120" y="6446520"/>
+            <a:ext cx="731520" cy="320040"/>
+          </a:xfrm>
+          <a:prstGeom prst="rect">
+            <a:avLst/>
+          </a:prstGeom>
+          <a:noFill/>
+        </p:spPr>
+        <p:txBody>
+          <a:bodyPr wrap="square">
+            <a:spAutoFit/>
+          </a:bodyPr>
+          <a:lstStyle/>
+          <a:p>
+            <a:pPr algn="r"/>
+            <a:r>
+              <a:rPr sz="1100" b="0" i="0">
+                <a:solidFill>
+                  <a:srgbClr val="9FB0AE"/>
+                </a:solidFill>
+                <a:latin typeface="Calibri"/>
+              </a:rPr>
+              <a:t>1/7</a:t>
             </a:r>
           </a:p>
         </p:txBody>
@@ -3323,7 +3514,199 @@
         </p:nvSpPr>
         <p:spPr>
           <a:xfrm>
-            <a:off x="548640" y="457200"/>
+            <a:off x="-2743200" y="-2743200"/>
+            <a:ext cx="8229600" cy="8229600"/>
+          </a:xfrm>
+          <a:prstGeom prst="ellipse">
+            <a:avLst/>
+          </a:prstGeom>
+          <a:solidFill>
+            <a:srgbClr val="142B42"/>
+          </a:solidFill>
+          <a:ln>
+            <a:noFill/>
+          </a:ln>
+          <a:effectLst/>
+        </p:spPr>
+        <p:style>
+          <a:lnRef idx="1">
+            <a:schemeClr val="accent1"/>
+          </a:lnRef>
+          <a:fillRef idx="3">
+            <a:schemeClr val="accent1"/>
+          </a:fillRef>
+          <a:effectRef idx="2">
+            <a:schemeClr val="accent1"/>
+          </a:effectRef>
+          <a:fontRef idx="minor">
+            <a:schemeClr val="lt1"/>
+          </a:fontRef>
+        </p:style>
+        <p:txBody>
+          <a:bodyPr rtlCol="0" anchor="ctr"/>
+          <a:lstStyle/>
+          <a:p>
+            <a:pPr algn="ctr"/>
+          </a:p>
+        </p:txBody>
+      </p:sp>
+      <p:sp>
+        <p:nvSpPr>
+          <p:cNvPr id="4" name="Oval 3"/>
+          <p:cNvSpPr/>
+          <p:nvPr/>
+        </p:nvSpPr>
+        <p:spPr>
+          <a:xfrm>
+            <a:off x="9601200" y="4114800"/>
+            <a:ext cx="5486400" cy="5486400"/>
+          </a:xfrm>
+          <a:prstGeom prst="ellipse">
+            <a:avLst/>
+          </a:prstGeom>
+          <a:solidFill>
+            <a:srgbClr val="142B42"/>
+          </a:solidFill>
+          <a:ln>
+            <a:noFill/>
+          </a:ln>
+          <a:effectLst/>
+        </p:spPr>
+        <p:style>
+          <a:lnRef idx="1">
+            <a:schemeClr val="accent1"/>
+          </a:lnRef>
+          <a:fillRef idx="3">
+            <a:schemeClr val="accent1"/>
+          </a:fillRef>
+          <a:effectRef idx="2">
+            <a:schemeClr val="accent1"/>
+          </a:effectRef>
+          <a:fontRef idx="minor">
+            <a:schemeClr val="lt1"/>
+          </a:fontRef>
+        </p:style>
+        <p:txBody>
+          <a:bodyPr rtlCol="0" anchor="ctr"/>
+          <a:lstStyle/>
+          <a:p>
+            <a:pPr algn="ctr"/>
+          </a:p>
+        </p:txBody>
+      </p:sp>
+      <p:sp>
+        <p:nvSpPr>
+          <p:cNvPr id="5" name="Rounded Rectangle 4"/>
+          <p:cNvSpPr/>
+          <p:nvPr/>
+        </p:nvSpPr>
+        <p:spPr>
+          <a:xfrm>
+            <a:off x="502920" y="365760"/>
+            <a:ext cx="384048" cy="384048"/>
+          </a:xfrm>
+          <a:prstGeom prst="roundRect">
+            <a:avLst>
+              <a:gd name="adj" fmla="val 28000"/>
+            </a:avLst>
+          </a:prstGeom>
+          <a:solidFill>
+            <a:srgbClr val="FFFFFF"/>
+          </a:solidFill>
+          <a:ln>
+            <a:noFill/>
+          </a:ln>
+          <a:effectLst/>
+        </p:spPr>
+        <p:style>
+          <a:lnRef idx="1">
+            <a:schemeClr val="accent1"/>
+          </a:lnRef>
+          <a:fillRef idx="3">
+            <a:schemeClr val="accent1"/>
+          </a:fillRef>
+          <a:effectRef idx="2">
+            <a:schemeClr val="accent1"/>
+          </a:effectRef>
+          <a:fontRef idx="minor">
+            <a:schemeClr val="lt1"/>
+          </a:fontRef>
+        </p:style>
+        <p:txBody>
+          <a:bodyPr rtlCol="0" anchor="ctr"/>
+          <a:lstStyle/>
+          <a:p>
+            <a:pPr algn="ctr"/>
+          </a:p>
+        </p:txBody>
+      </p:sp>
+      <p:pic>
+        <p:nvPicPr>
+          <p:cNvPr id="6" name="Picture 5" descr="logo-icon.png"/>
+          <p:cNvPicPr>
+            <a:picLocks noChangeAspect="1"/>
+          </p:cNvPicPr>
+          <p:nvPr/>
+        </p:nvPicPr>
+        <p:blipFill>
+          <a:blip r:embed="rId2"/>
+          <a:stretch>
+            <a:fillRect/>
+          </a:stretch>
+        </p:blipFill>
+        <p:spPr>
+          <a:xfrm>
+            <a:off x="557784" y="420624"/>
+            <a:ext cx="383084" cy="274320"/>
+          </a:xfrm>
+          <a:prstGeom prst="rect">
+            <a:avLst/>
+          </a:prstGeom>
+        </p:spPr>
+      </p:pic>
+      <p:sp>
+        <p:nvSpPr>
+          <p:cNvPr id="7" name="TextBox 6"/>
+          <p:cNvSpPr txBox="1"/>
+          <p:nvPr/>
+        </p:nvSpPr>
+        <p:spPr>
+          <a:xfrm>
+            <a:off x="987552" y="384048"/>
+            <a:ext cx="3657600" cy="365760"/>
+          </a:xfrm>
+          <a:prstGeom prst="rect">
+            <a:avLst/>
+          </a:prstGeom>
+          <a:noFill/>
+        </p:spPr>
+        <p:txBody>
+          <a:bodyPr wrap="none">
+            <a:spAutoFit/>
+          </a:bodyPr>
+          <a:lstStyle/>
+          <a:p>
+            <a:r>
+              <a:rPr sz="1100" b="1">
+                <a:solidFill>
+                  <a:srgbClr val="9FB0AE"/>
+                </a:solidFill>
+                <a:latin typeface="Calibri"/>
+              </a:rPr>
+              <a:t>REACTIVA TERRITORIO</a:t>
+            </a:r>
+          </a:p>
+        </p:txBody>
+      </p:sp>
+      <p:sp>
+        <p:nvSpPr>
+          <p:cNvPr id="8" name="Oval 7"/>
+          <p:cNvSpPr/>
+          <p:nvPr/>
+        </p:nvSpPr>
+        <p:spPr>
+          <a:xfrm>
+            <a:off x="548640" y="1143000"/>
             <a:ext cx="365760" cy="365760"/>
           </a:xfrm>
           <a:prstGeom prst="ellipse">
@@ -3335,6 +3718,7 @@
           <a:ln>
             <a:noFill/>
           </a:ln>
+          <a:effectLst/>
         </p:spPr>
         <p:style>
           <a:lnRef idx="1">
@@ -3368,13 +3752,13 @@
       </p:sp>
       <p:sp>
         <p:nvSpPr>
-          <p:cNvPr id="4" name="TextBox 3"/>
+          <p:cNvPr id="9" name="TextBox 8"/>
           <p:cNvSpPr txBox="1"/>
           <p:nvPr/>
         </p:nvSpPr>
         <p:spPr>
           <a:xfrm>
-            <a:off x="1051560" y="475488"/>
+            <a:off x="1051560" y="1161288"/>
             <a:ext cx="5486400" cy="365760"/>
           </a:xfrm>
           <a:prstGeom prst="rect">
@@ -3390,7 +3774,7 @@
           <a:p>
             <a:pPr algn="l"/>
             <a:r>
-              <a:rPr sz="1300" b="1">
+              <a:rPr sz="1300" b="1" i="0">
                 <a:solidFill>
                   <a:srgbClr val="14B8A8"/>
                 </a:solidFill>
@@ -3403,14 +3787,14 @@
       </p:sp>
       <p:sp>
         <p:nvSpPr>
-          <p:cNvPr id="5" name="TextBox 4"/>
+          <p:cNvPr id="10" name="TextBox 9"/>
           <p:cNvSpPr txBox="1"/>
           <p:nvPr/>
         </p:nvSpPr>
         <p:spPr>
           <a:xfrm>
-            <a:off x="548640" y="1005840"/>
-            <a:ext cx="10515600" cy="1463040"/>
+            <a:off x="548640" y="1691640"/>
+            <a:ext cx="10698480" cy="1463040"/>
           </a:xfrm>
           <a:prstGeom prst="rect">
             <a:avLst/>
@@ -3425,7 +3809,7 @@
           <a:p>
             <a:pPr algn="l"/>
             <a:r>
-              <a:rPr sz="3400" b="1">
+              <a:rPr sz="3300" b="1" i="0">
                 <a:solidFill>
                   <a:srgbClr val="FFFFFF"/>
                 </a:solidFill>
@@ -3438,14 +3822,14 @@
       </p:sp>
       <p:sp>
         <p:nvSpPr>
-          <p:cNvPr id="6" name="TextBox 5"/>
+          <p:cNvPr id="11" name="TextBox 10"/>
           <p:cNvSpPr txBox="1"/>
           <p:nvPr/>
         </p:nvSpPr>
         <p:spPr>
           <a:xfrm>
-            <a:off x="548640" y="1828800"/>
-            <a:ext cx="9601200" cy="731520"/>
+            <a:off x="548640" y="2514600"/>
+            <a:ext cx="9875520" cy="731520"/>
           </a:xfrm>
           <a:prstGeom prst="rect">
             <a:avLst/>
@@ -3460,7 +3844,7 @@
           <a:p>
             <a:pPr algn="l"/>
             <a:r>
-              <a:rPr sz="1700" b="0">
+              <a:rPr sz="1600" b="0" i="0">
                 <a:solidFill>
                   <a:srgbClr val="9FB0AE"/>
                 </a:solidFill>
@@ -3473,14 +3857,14 @@
       </p:sp>
       <p:sp>
         <p:nvSpPr>
-          <p:cNvPr id="7" name="TextBox 6"/>
+          <p:cNvPr id="12" name="TextBox 11"/>
           <p:cNvSpPr txBox="1"/>
           <p:nvPr/>
         </p:nvSpPr>
         <p:spPr>
           <a:xfrm>
-            <a:off x="548640" y="2834640"/>
-            <a:ext cx="10058400" cy="4114800"/>
+            <a:off x="548640" y="3429000"/>
+            <a:ext cx="10332720" cy="4114800"/>
           </a:xfrm>
           <a:prstGeom prst="rect">
             <a:avLst/>
@@ -3495,17 +3879,26 @@
           <a:p>
             <a:pPr>
               <a:spcAft>
-                <a:spcPts val="1400"/>
+                <a:spcPts val="1600"/>
               </a:spcAft>
             </a:pPr>
             <a:r>
               <a:rPr sz="1600" b="1">
                 <a:solidFill>
+                  <a:srgbClr val="14B8A8"/>
+                </a:solidFill>
+                <a:latin typeface="Calibri"/>
+              </a:rPr>
+              <a:t>→  </a:t>
+            </a:r>
+            <a:r>
+              <a:rPr sz="1600" b="1">
+                <a:solidFill>
                   <a:srgbClr val="FFFFFF"/>
                 </a:solidFill>
                 <a:latin typeface="Calibri"/>
               </a:rPr>
-              <a:t>→  Reportes perdidos</a:t>
+              <a:t>Reportes perdidos</a:t>
             </a:r>
             <a:r>
               <a:rPr sz="1400">
@@ -3520,17 +3913,26 @@
           <a:p>
             <a:pPr>
               <a:spcAft>
-                <a:spcPts val="1400"/>
+                <a:spcPts val="1600"/>
               </a:spcAft>
             </a:pPr>
             <a:r>
               <a:rPr sz="1600" b="1">
                 <a:solidFill>
+                  <a:srgbClr val="14B8A8"/>
+                </a:solidFill>
+                <a:latin typeface="Calibri"/>
+              </a:rPr>
+              <a:t>→  </a:t>
+            </a:r>
+            <a:r>
+              <a:rPr sz="1600" b="1">
+                <a:solidFill>
                   <a:srgbClr val="FFFFFF"/>
                 </a:solidFill>
                 <a:latin typeface="Calibri"/>
               </a:rPr>
-              <a:t>→  Ayuda mal dirigida</a:t>
+              <a:t>Ayuda mal dirigida</a:t>
             </a:r>
             <a:r>
               <a:rPr sz="1400">
@@ -3545,17 +3947,26 @@
           <a:p>
             <a:pPr>
               <a:spcAft>
-                <a:spcPts val="1400"/>
+                <a:spcPts val="1600"/>
               </a:spcAft>
             </a:pPr>
             <a:r>
               <a:rPr sz="1600" b="1">
                 <a:solidFill>
+                  <a:srgbClr val="14B8A8"/>
+                </a:solidFill>
+                <a:latin typeface="Calibri"/>
+              </a:rPr>
+              <a:t>→  </a:t>
+            </a:r>
+            <a:r>
+              <a:rPr sz="1600" b="1">
+                <a:solidFill>
                   <a:srgbClr val="FFFFFF"/>
                 </a:solidFill>
                 <a:latin typeface="Calibri"/>
               </a:rPr>
-              <a:t>→  Nadie mide el resultado</a:t>
+              <a:t>Nadie mide el resultado</a:t>
             </a:r>
             <a:r>
               <a:rPr sz="1400">
@@ -3565,6 +3976,41 @@
                 <a:latin typeface="Calibri"/>
               </a:rPr>
               <a:t>  — no hay forma de confirmar si un caso quedó atendido.</a:t>
+            </a:r>
+          </a:p>
+        </p:txBody>
+      </p:sp>
+      <p:sp>
+        <p:nvSpPr>
+          <p:cNvPr id="13" name="TextBox 12"/>
+          <p:cNvSpPr txBox="1"/>
+          <p:nvPr/>
+        </p:nvSpPr>
+        <p:spPr>
+          <a:xfrm>
+            <a:off x="11247120" y="6446520"/>
+            <a:ext cx="731520" cy="320040"/>
+          </a:xfrm>
+          <a:prstGeom prst="rect">
+            <a:avLst/>
+          </a:prstGeom>
+          <a:noFill/>
+        </p:spPr>
+        <p:txBody>
+          <a:bodyPr wrap="square">
+            <a:spAutoFit/>
+          </a:bodyPr>
+          <a:lstStyle/>
+          <a:p>
+            <a:pPr algn="r"/>
+            <a:r>
+              <a:rPr sz="1100" b="0" i="0">
+                <a:solidFill>
+                  <a:srgbClr val="9FB0AE"/>
+                </a:solidFill>
+                <a:latin typeface="Calibri"/>
+              </a:rPr>
+              <a:t>2/7</a:t>
             </a:r>
           </a:p>
         </p:txBody>
@@ -3639,7 +4085,199 @@
         </p:nvSpPr>
         <p:spPr>
           <a:xfrm>
-            <a:off x="548640" y="457200"/>
+            <a:off x="-2743200" y="-2743200"/>
+            <a:ext cx="8229600" cy="8229600"/>
+          </a:xfrm>
+          <a:prstGeom prst="ellipse">
+            <a:avLst/>
+          </a:prstGeom>
+          <a:solidFill>
+            <a:srgbClr val="142B42"/>
+          </a:solidFill>
+          <a:ln>
+            <a:noFill/>
+          </a:ln>
+          <a:effectLst/>
+        </p:spPr>
+        <p:style>
+          <a:lnRef idx="1">
+            <a:schemeClr val="accent1"/>
+          </a:lnRef>
+          <a:fillRef idx="3">
+            <a:schemeClr val="accent1"/>
+          </a:fillRef>
+          <a:effectRef idx="2">
+            <a:schemeClr val="accent1"/>
+          </a:effectRef>
+          <a:fontRef idx="minor">
+            <a:schemeClr val="lt1"/>
+          </a:fontRef>
+        </p:style>
+        <p:txBody>
+          <a:bodyPr rtlCol="0" anchor="ctr"/>
+          <a:lstStyle/>
+          <a:p>
+            <a:pPr algn="ctr"/>
+          </a:p>
+        </p:txBody>
+      </p:sp>
+      <p:sp>
+        <p:nvSpPr>
+          <p:cNvPr id="4" name="Oval 3"/>
+          <p:cNvSpPr/>
+          <p:nvPr/>
+        </p:nvSpPr>
+        <p:spPr>
+          <a:xfrm>
+            <a:off x="9601200" y="4114800"/>
+            <a:ext cx="5486400" cy="5486400"/>
+          </a:xfrm>
+          <a:prstGeom prst="ellipse">
+            <a:avLst/>
+          </a:prstGeom>
+          <a:solidFill>
+            <a:srgbClr val="142B42"/>
+          </a:solidFill>
+          <a:ln>
+            <a:noFill/>
+          </a:ln>
+          <a:effectLst/>
+        </p:spPr>
+        <p:style>
+          <a:lnRef idx="1">
+            <a:schemeClr val="accent1"/>
+          </a:lnRef>
+          <a:fillRef idx="3">
+            <a:schemeClr val="accent1"/>
+          </a:fillRef>
+          <a:effectRef idx="2">
+            <a:schemeClr val="accent1"/>
+          </a:effectRef>
+          <a:fontRef idx="minor">
+            <a:schemeClr val="lt1"/>
+          </a:fontRef>
+        </p:style>
+        <p:txBody>
+          <a:bodyPr rtlCol="0" anchor="ctr"/>
+          <a:lstStyle/>
+          <a:p>
+            <a:pPr algn="ctr"/>
+          </a:p>
+        </p:txBody>
+      </p:sp>
+      <p:sp>
+        <p:nvSpPr>
+          <p:cNvPr id="5" name="Rounded Rectangle 4"/>
+          <p:cNvSpPr/>
+          <p:nvPr/>
+        </p:nvSpPr>
+        <p:spPr>
+          <a:xfrm>
+            <a:off x="502920" y="365760"/>
+            <a:ext cx="384048" cy="384048"/>
+          </a:xfrm>
+          <a:prstGeom prst="roundRect">
+            <a:avLst>
+              <a:gd name="adj" fmla="val 28000"/>
+            </a:avLst>
+          </a:prstGeom>
+          <a:solidFill>
+            <a:srgbClr val="FFFFFF"/>
+          </a:solidFill>
+          <a:ln>
+            <a:noFill/>
+          </a:ln>
+          <a:effectLst/>
+        </p:spPr>
+        <p:style>
+          <a:lnRef idx="1">
+            <a:schemeClr val="accent1"/>
+          </a:lnRef>
+          <a:fillRef idx="3">
+            <a:schemeClr val="accent1"/>
+          </a:fillRef>
+          <a:effectRef idx="2">
+            <a:schemeClr val="accent1"/>
+          </a:effectRef>
+          <a:fontRef idx="minor">
+            <a:schemeClr val="lt1"/>
+          </a:fontRef>
+        </p:style>
+        <p:txBody>
+          <a:bodyPr rtlCol="0" anchor="ctr"/>
+          <a:lstStyle/>
+          <a:p>
+            <a:pPr algn="ctr"/>
+          </a:p>
+        </p:txBody>
+      </p:sp>
+      <p:pic>
+        <p:nvPicPr>
+          <p:cNvPr id="6" name="Picture 5" descr="logo-icon.png"/>
+          <p:cNvPicPr>
+            <a:picLocks noChangeAspect="1"/>
+          </p:cNvPicPr>
+          <p:nvPr/>
+        </p:nvPicPr>
+        <p:blipFill>
+          <a:blip r:embed="rId2"/>
+          <a:stretch>
+            <a:fillRect/>
+          </a:stretch>
+        </p:blipFill>
+        <p:spPr>
+          <a:xfrm>
+            <a:off x="557784" y="420624"/>
+            <a:ext cx="383084" cy="274320"/>
+          </a:xfrm>
+          <a:prstGeom prst="rect">
+            <a:avLst/>
+          </a:prstGeom>
+        </p:spPr>
+      </p:pic>
+      <p:sp>
+        <p:nvSpPr>
+          <p:cNvPr id="7" name="TextBox 6"/>
+          <p:cNvSpPr txBox="1"/>
+          <p:nvPr/>
+        </p:nvSpPr>
+        <p:spPr>
+          <a:xfrm>
+            <a:off x="987552" y="384048"/>
+            <a:ext cx="3657600" cy="365760"/>
+          </a:xfrm>
+          <a:prstGeom prst="rect">
+            <a:avLst/>
+          </a:prstGeom>
+          <a:noFill/>
+        </p:spPr>
+        <p:txBody>
+          <a:bodyPr wrap="none">
+            <a:spAutoFit/>
+          </a:bodyPr>
+          <a:lstStyle/>
+          <a:p>
+            <a:r>
+              <a:rPr sz="1100" b="1">
+                <a:solidFill>
+                  <a:srgbClr val="9FB0AE"/>
+                </a:solidFill>
+                <a:latin typeface="Calibri"/>
+              </a:rPr>
+              <a:t>REACTIVA TERRITORIO</a:t>
+            </a:r>
+          </a:p>
+        </p:txBody>
+      </p:sp>
+      <p:sp>
+        <p:nvSpPr>
+          <p:cNvPr id="8" name="Oval 7"/>
+          <p:cNvSpPr/>
+          <p:nvPr/>
+        </p:nvSpPr>
+        <p:spPr>
+          <a:xfrm>
+            <a:off x="548640" y="1143000"/>
             <a:ext cx="365760" cy="365760"/>
           </a:xfrm>
           <a:prstGeom prst="ellipse">
@@ -3651,6 +4289,7 @@
           <a:ln>
             <a:noFill/>
           </a:ln>
+          <a:effectLst/>
         </p:spPr>
         <p:style>
           <a:lnRef idx="1">
@@ -3684,13 +4323,13 @@
       </p:sp>
       <p:sp>
         <p:nvSpPr>
-          <p:cNvPr id="4" name="TextBox 3"/>
+          <p:cNvPr id="9" name="TextBox 8"/>
           <p:cNvSpPr txBox="1"/>
           <p:nvPr/>
         </p:nvSpPr>
         <p:spPr>
           <a:xfrm>
-            <a:off x="1051560" y="475488"/>
+            <a:off x="1051560" y="1161288"/>
             <a:ext cx="5486400" cy="365760"/>
           </a:xfrm>
           <a:prstGeom prst="rect">
@@ -3706,7 +4345,7 @@
           <a:p>
             <a:pPr algn="l"/>
             <a:r>
-              <a:rPr sz="1300" b="1">
+              <a:rPr sz="1300" b="1" i="0">
                 <a:solidFill>
                   <a:srgbClr val="14B8A8"/>
                 </a:solidFill>
@@ -3719,13 +4358,13 @@
       </p:sp>
       <p:sp>
         <p:nvSpPr>
-          <p:cNvPr id="5" name="TextBox 4"/>
+          <p:cNvPr id="10" name="TextBox 9"/>
           <p:cNvSpPr txBox="1"/>
           <p:nvPr/>
         </p:nvSpPr>
         <p:spPr>
           <a:xfrm>
-            <a:off x="548640" y="1005840"/>
+            <a:off x="548640" y="1691640"/>
             <a:ext cx="10515600" cy="1097280"/>
           </a:xfrm>
           <a:prstGeom prst="rect">
@@ -3741,7 +4380,7 @@
           <a:p>
             <a:pPr algn="l"/>
             <a:r>
-              <a:rPr sz="3200" b="1">
+              <a:rPr sz="3100" b="1" i="0">
                 <a:solidFill>
                   <a:srgbClr val="FFFFFF"/>
                 </a:solidFill>
@@ -3754,13 +4393,13 @@
       </p:sp>
       <p:sp>
         <p:nvSpPr>
-          <p:cNvPr id="6" name="TextBox 5"/>
+          <p:cNvPr id="11" name="TextBox 10"/>
           <p:cNvSpPr txBox="1"/>
           <p:nvPr/>
         </p:nvSpPr>
         <p:spPr>
           <a:xfrm>
-            <a:off x="548640" y="2286000"/>
+            <a:off x="548640" y="2788920"/>
             <a:ext cx="10515600" cy="4114800"/>
           </a:xfrm>
           <a:prstGeom prst="rect">
@@ -3776,20 +4415,29 @@
           <a:p>
             <a:pPr>
               <a:spcAft>
-                <a:spcPts val="1400"/>
+                <a:spcPts val="1600"/>
               </a:spcAft>
             </a:pPr>
             <a:r>
-              <a:rPr sz="1600" b="1">
+              <a:rPr sz="1700" b="1">
+                <a:solidFill>
+                  <a:srgbClr val="14B8A8"/>
+                </a:solidFill>
+                <a:latin typeface="Calibri"/>
+              </a:rPr>
+              <a:t>→  </a:t>
+            </a:r>
+            <a:r>
+              <a:rPr sz="1700" b="1">
                 <a:solidFill>
                   <a:srgbClr val="FFFFFF"/>
                 </a:solidFill>
                 <a:latin typeface="Calibri"/>
               </a:rPr>
-              <a:t>→  Reportar</a:t>
-            </a:r>
-            <a:r>
-              <a:rPr sz="1400">
+              <a:t>Reportar</a:t>
+            </a:r>
+            <a:r>
+              <a:rPr sz="1500">
                 <a:solidFill>
                   <a:srgbClr val="9FB0AE"/>
                 </a:solidFill>
@@ -3801,20 +4449,29 @@
           <a:p>
             <a:pPr>
               <a:spcAft>
-                <a:spcPts val="1400"/>
+                <a:spcPts val="1600"/>
               </a:spcAft>
             </a:pPr>
             <a:r>
-              <a:rPr sz="1600" b="1">
+              <a:rPr sz="1700" b="1">
+                <a:solidFill>
+                  <a:srgbClr val="14B8A8"/>
+                </a:solidFill>
+                <a:latin typeface="Calibri"/>
+              </a:rPr>
+              <a:t>→  </a:t>
+            </a:r>
+            <a:r>
+              <a:rPr sz="1700" b="1">
                 <a:solidFill>
                   <a:srgbClr val="FFFFFF"/>
                 </a:solidFill>
                 <a:latin typeface="Calibri"/>
               </a:rPr>
-              <a:t>→  Verificar</a:t>
-            </a:r>
-            <a:r>
-              <a:rPr sz="1400">
+              <a:t>Verificar</a:t>
+            </a:r>
+            <a:r>
+              <a:rPr sz="1500">
                 <a:solidFill>
                   <a:srgbClr val="9FB0AE"/>
                 </a:solidFill>
@@ -3826,20 +4483,29 @@
           <a:p>
             <a:pPr>
               <a:spcAft>
-                <a:spcPts val="1400"/>
+                <a:spcPts val="1600"/>
               </a:spcAft>
             </a:pPr>
             <a:r>
-              <a:rPr sz="1600" b="1">
+              <a:rPr sz="1700" b="1">
+                <a:solidFill>
+                  <a:srgbClr val="14B8A8"/>
+                </a:solidFill>
+                <a:latin typeface="Calibri"/>
+              </a:rPr>
+              <a:t>→  </a:t>
+            </a:r>
+            <a:r>
+              <a:rPr sz="1700" b="1">
                 <a:solidFill>
                   <a:srgbClr val="FFFFFF"/>
                 </a:solidFill>
                 <a:latin typeface="Calibri"/>
               </a:rPr>
-              <a:t>→  Conectar</a:t>
-            </a:r>
-            <a:r>
-              <a:rPr sz="1400">
+              <a:t>Conectar</a:t>
+            </a:r>
+            <a:r>
+              <a:rPr sz="1500">
                 <a:solidFill>
                   <a:srgbClr val="9FB0AE"/>
                 </a:solidFill>
@@ -3851,26 +4517,70 @@
           <a:p>
             <a:pPr>
               <a:spcAft>
-                <a:spcPts val="1400"/>
+                <a:spcPts val="1600"/>
               </a:spcAft>
             </a:pPr>
             <a:r>
-              <a:rPr sz="1600" b="1">
+              <a:rPr sz="1700" b="1">
+                <a:solidFill>
+                  <a:srgbClr val="14B8A8"/>
+                </a:solidFill>
+                <a:latin typeface="Calibri"/>
+              </a:rPr>
+              <a:t>→  </a:t>
+            </a:r>
+            <a:r>
+              <a:rPr sz="1700" b="1">
                 <a:solidFill>
                   <a:srgbClr val="FFFFFF"/>
                 </a:solidFill>
                 <a:latin typeface="Calibri"/>
               </a:rPr>
-              <a:t>→  Confirmar</a:t>
-            </a:r>
-            <a:r>
-              <a:rPr sz="1400">
+              <a:t>Confirmar</a:t>
+            </a:r>
+            <a:r>
+              <a:rPr sz="1500">
                 <a:solidFill>
                   <a:srgbClr val="9FB0AE"/>
                 </a:solidFill>
                 <a:latin typeface="Calibri"/>
               </a:rPr>
               <a:t>  — seguimiento con evidencia hasta que la comunidad cierra el caso.</a:t>
+            </a:r>
+          </a:p>
+        </p:txBody>
+      </p:sp>
+      <p:sp>
+        <p:nvSpPr>
+          <p:cNvPr id="12" name="TextBox 11"/>
+          <p:cNvSpPr txBox="1"/>
+          <p:nvPr/>
+        </p:nvSpPr>
+        <p:spPr>
+          <a:xfrm>
+            <a:off x="11247120" y="6446520"/>
+            <a:ext cx="731520" cy="320040"/>
+          </a:xfrm>
+          <a:prstGeom prst="rect">
+            <a:avLst/>
+          </a:prstGeom>
+          <a:noFill/>
+        </p:spPr>
+        <p:txBody>
+          <a:bodyPr wrap="square">
+            <a:spAutoFit/>
+          </a:bodyPr>
+          <a:lstStyle/>
+          <a:p>
+            <a:pPr algn="r"/>
+            <a:r>
+              <a:rPr sz="1100" b="0" i="0">
+                <a:solidFill>
+                  <a:srgbClr val="9FB0AE"/>
+                </a:solidFill>
+                <a:latin typeface="Calibri"/>
+              </a:rPr>
+              <a:t>3/7</a:t>
             </a:r>
           </a:p>
         </p:txBody>
@@ -3945,7 +4655,199 @@
         </p:nvSpPr>
         <p:spPr>
           <a:xfrm>
-            <a:off x="548640" y="457200"/>
+            <a:off x="-2743200" y="-2743200"/>
+            <a:ext cx="8229600" cy="8229600"/>
+          </a:xfrm>
+          <a:prstGeom prst="ellipse">
+            <a:avLst/>
+          </a:prstGeom>
+          <a:solidFill>
+            <a:srgbClr val="142B42"/>
+          </a:solidFill>
+          <a:ln>
+            <a:noFill/>
+          </a:ln>
+          <a:effectLst/>
+        </p:spPr>
+        <p:style>
+          <a:lnRef idx="1">
+            <a:schemeClr val="accent1"/>
+          </a:lnRef>
+          <a:fillRef idx="3">
+            <a:schemeClr val="accent1"/>
+          </a:fillRef>
+          <a:effectRef idx="2">
+            <a:schemeClr val="accent1"/>
+          </a:effectRef>
+          <a:fontRef idx="minor">
+            <a:schemeClr val="lt1"/>
+          </a:fontRef>
+        </p:style>
+        <p:txBody>
+          <a:bodyPr rtlCol="0" anchor="ctr"/>
+          <a:lstStyle/>
+          <a:p>
+            <a:pPr algn="ctr"/>
+          </a:p>
+        </p:txBody>
+      </p:sp>
+      <p:sp>
+        <p:nvSpPr>
+          <p:cNvPr id="4" name="Oval 3"/>
+          <p:cNvSpPr/>
+          <p:nvPr/>
+        </p:nvSpPr>
+        <p:spPr>
+          <a:xfrm>
+            <a:off x="9601200" y="4114800"/>
+            <a:ext cx="5486400" cy="5486400"/>
+          </a:xfrm>
+          <a:prstGeom prst="ellipse">
+            <a:avLst/>
+          </a:prstGeom>
+          <a:solidFill>
+            <a:srgbClr val="142B42"/>
+          </a:solidFill>
+          <a:ln>
+            <a:noFill/>
+          </a:ln>
+          <a:effectLst/>
+        </p:spPr>
+        <p:style>
+          <a:lnRef idx="1">
+            <a:schemeClr val="accent1"/>
+          </a:lnRef>
+          <a:fillRef idx="3">
+            <a:schemeClr val="accent1"/>
+          </a:fillRef>
+          <a:effectRef idx="2">
+            <a:schemeClr val="accent1"/>
+          </a:effectRef>
+          <a:fontRef idx="minor">
+            <a:schemeClr val="lt1"/>
+          </a:fontRef>
+        </p:style>
+        <p:txBody>
+          <a:bodyPr rtlCol="0" anchor="ctr"/>
+          <a:lstStyle/>
+          <a:p>
+            <a:pPr algn="ctr"/>
+          </a:p>
+        </p:txBody>
+      </p:sp>
+      <p:sp>
+        <p:nvSpPr>
+          <p:cNvPr id="5" name="Rounded Rectangle 4"/>
+          <p:cNvSpPr/>
+          <p:nvPr/>
+        </p:nvSpPr>
+        <p:spPr>
+          <a:xfrm>
+            <a:off x="502920" y="365760"/>
+            <a:ext cx="384048" cy="384048"/>
+          </a:xfrm>
+          <a:prstGeom prst="roundRect">
+            <a:avLst>
+              <a:gd name="adj" fmla="val 28000"/>
+            </a:avLst>
+          </a:prstGeom>
+          <a:solidFill>
+            <a:srgbClr val="FFFFFF"/>
+          </a:solidFill>
+          <a:ln>
+            <a:noFill/>
+          </a:ln>
+          <a:effectLst/>
+        </p:spPr>
+        <p:style>
+          <a:lnRef idx="1">
+            <a:schemeClr val="accent1"/>
+          </a:lnRef>
+          <a:fillRef idx="3">
+            <a:schemeClr val="accent1"/>
+          </a:fillRef>
+          <a:effectRef idx="2">
+            <a:schemeClr val="accent1"/>
+          </a:effectRef>
+          <a:fontRef idx="minor">
+            <a:schemeClr val="lt1"/>
+          </a:fontRef>
+        </p:style>
+        <p:txBody>
+          <a:bodyPr rtlCol="0" anchor="ctr"/>
+          <a:lstStyle/>
+          <a:p>
+            <a:pPr algn="ctr"/>
+          </a:p>
+        </p:txBody>
+      </p:sp>
+      <p:pic>
+        <p:nvPicPr>
+          <p:cNvPr id="6" name="Picture 5" descr="logo-icon.png"/>
+          <p:cNvPicPr>
+            <a:picLocks noChangeAspect="1"/>
+          </p:cNvPicPr>
+          <p:nvPr/>
+        </p:nvPicPr>
+        <p:blipFill>
+          <a:blip r:embed="rId2"/>
+          <a:stretch>
+            <a:fillRect/>
+          </a:stretch>
+        </p:blipFill>
+        <p:spPr>
+          <a:xfrm>
+            <a:off x="557784" y="420624"/>
+            <a:ext cx="383084" cy="274320"/>
+          </a:xfrm>
+          <a:prstGeom prst="rect">
+            <a:avLst/>
+          </a:prstGeom>
+        </p:spPr>
+      </p:pic>
+      <p:sp>
+        <p:nvSpPr>
+          <p:cNvPr id="7" name="TextBox 6"/>
+          <p:cNvSpPr txBox="1"/>
+          <p:nvPr/>
+        </p:nvSpPr>
+        <p:spPr>
+          <a:xfrm>
+            <a:off x="987552" y="384048"/>
+            <a:ext cx="3657600" cy="365760"/>
+          </a:xfrm>
+          <a:prstGeom prst="rect">
+            <a:avLst/>
+          </a:prstGeom>
+          <a:noFill/>
+        </p:spPr>
+        <p:txBody>
+          <a:bodyPr wrap="none">
+            <a:spAutoFit/>
+          </a:bodyPr>
+          <a:lstStyle/>
+          <a:p>
+            <a:r>
+              <a:rPr sz="1100" b="1">
+                <a:solidFill>
+                  <a:srgbClr val="9FB0AE"/>
+                </a:solidFill>
+                <a:latin typeface="Calibri"/>
+              </a:rPr>
+              <a:t>REACTIVA TERRITORIO</a:t>
+            </a:r>
+          </a:p>
+        </p:txBody>
+      </p:sp>
+      <p:sp>
+        <p:nvSpPr>
+          <p:cNvPr id="8" name="Oval 7"/>
+          <p:cNvSpPr/>
+          <p:nvPr/>
+        </p:nvSpPr>
+        <p:spPr>
+          <a:xfrm>
+            <a:off x="548640" y="1143000"/>
             <a:ext cx="365760" cy="365760"/>
           </a:xfrm>
           <a:prstGeom prst="ellipse">
@@ -3957,6 +4859,7 @@
           <a:ln>
             <a:noFill/>
           </a:ln>
+          <a:effectLst/>
         </p:spPr>
         <p:style>
           <a:lnRef idx="1">
@@ -3990,13 +4893,13 @@
       </p:sp>
       <p:sp>
         <p:nvSpPr>
-          <p:cNvPr id="4" name="TextBox 3"/>
+          <p:cNvPr id="9" name="TextBox 8"/>
           <p:cNvSpPr txBox="1"/>
           <p:nvPr/>
         </p:nvSpPr>
         <p:spPr>
           <a:xfrm>
-            <a:off x="1051560" y="475488"/>
+            <a:off x="1051560" y="1161288"/>
             <a:ext cx="5486400" cy="365760"/>
           </a:xfrm>
           <a:prstGeom prst="rect">
@@ -4012,7 +4915,7 @@
           <a:p>
             <a:pPr algn="l"/>
             <a:r>
-              <a:rPr sz="1300" b="1">
+              <a:rPr sz="1300" b="1" i="0">
                 <a:solidFill>
                   <a:srgbClr val="14B8A8"/>
                 </a:solidFill>
@@ -4025,13 +4928,13 @@
       </p:sp>
       <p:sp>
         <p:nvSpPr>
-          <p:cNvPr id="5" name="TextBox 4"/>
+          <p:cNvPr id="10" name="TextBox 9"/>
           <p:cNvSpPr txBox="1"/>
           <p:nvPr/>
         </p:nvSpPr>
         <p:spPr>
           <a:xfrm>
-            <a:off x="548640" y="1005840"/>
+            <a:off x="548640" y="1691640"/>
             <a:ext cx="10515600" cy="1097280"/>
           </a:xfrm>
           <a:prstGeom prst="rect">
@@ -4047,7 +4950,7 @@
           <a:p>
             <a:pPr algn="l"/>
             <a:r>
-              <a:rPr sz="3000" b="1">
+              <a:rPr sz="2900" b="1" i="0">
                 <a:solidFill>
                   <a:srgbClr val="FFFFFF"/>
                 </a:solidFill>
@@ -4060,14 +4963,14 @@
       </p:sp>
       <p:sp>
         <p:nvSpPr>
-          <p:cNvPr id="6" name="Oval 5"/>
+          <p:cNvPr id="11" name="Oval 10"/>
           <p:cNvSpPr/>
           <p:nvPr/>
         </p:nvSpPr>
         <p:spPr>
           <a:xfrm>
-            <a:off x="548640" y="2359152"/>
-            <a:ext cx="128016" cy="128016"/>
+            <a:off x="548640" y="2962656"/>
+            <a:ext cx="118872" cy="118872"/>
           </a:xfrm>
           <a:prstGeom prst="ellipse">
             <a:avLst/>
@@ -4078,6 +4981,7 @@
           <a:ln>
             <a:noFill/>
           </a:ln>
+          <a:effectLst/>
         </p:spPr>
         <p:style>
           <a:lnRef idx="1">
@@ -4103,13 +5007,13 @@
       </p:sp>
       <p:sp>
         <p:nvSpPr>
-          <p:cNvPr id="7" name="TextBox 6"/>
+          <p:cNvPr id="12" name="TextBox 11"/>
           <p:cNvSpPr txBox="1"/>
           <p:nvPr/>
         </p:nvSpPr>
         <p:spPr>
           <a:xfrm>
-            <a:off x="868680" y="2212848"/>
+            <a:off x="841248" y="2825496"/>
             <a:ext cx="4937760" cy="365760"/>
           </a:xfrm>
           <a:prstGeom prst="rect">
@@ -4125,7 +5029,7 @@
           <a:p>
             <a:pPr algn="l"/>
             <a:r>
-              <a:rPr sz="1600" b="1">
+              <a:rPr sz="1550" b="1" i="0">
                 <a:solidFill>
                   <a:srgbClr val="FFFFFF"/>
                 </a:solidFill>
@@ -4138,13 +5042,13 @@
       </p:sp>
       <p:sp>
         <p:nvSpPr>
-          <p:cNvPr id="8" name="TextBox 7"/>
+          <p:cNvPr id="13" name="TextBox 12"/>
           <p:cNvSpPr txBox="1"/>
           <p:nvPr/>
         </p:nvSpPr>
         <p:spPr>
           <a:xfrm>
-            <a:off x="868680" y="2560320"/>
+            <a:off x="841248" y="3172968"/>
             <a:ext cx="4937760" cy="457200"/>
           </a:xfrm>
           <a:prstGeom prst="rect">
@@ -4160,7 +5064,7 @@
           <a:p>
             <a:pPr algn="l"/>
             <a:r>
-              <a:rPr sz="1250" b="0">
+              <a:rPr sz="1200" b="0" i="0">
                 <a:solidFill>
                   <a:srgbClr val="9FB0AE"/>
                 </a:solidFill>
@@ -4173,14 +5077,14 @@
       </p:sp>
       <p:sp>
         <p:nvSpPr>
-          <p:cNvPr id="9" name="Oval 8"/>
+          <p:cNvPr id="14" name="Oval 13"/>
           <p:cNvSpPr/>
           <p:nvPr/>
         </p:nvSpPr>
         <p:spPr>
           <a:xfrm>
-            <a:off x="6035040" y="2359152"/>
-            <a:ext cx="128016" cy="128016"/>
+            <a:off x="6035040" y="2962656"/>
+            <a:ext cx="118872" cy="118872"/>
           </a:xfrm>
           <a:prstGeom prst="ellipse">
             <a:avLst/>
@@ -4191,6 +5095,7 @@
           <a:ln>
             <a:noFill/>
           </a:ln>
+          <a:effectLst/>
         </p:spPr>
         <p:style>
           <a:lnRef idx="1">
@@ -4216,13 +5121,13 @@
       </p:sp>
       <p:sp>
         <p:nvSpPr>
-          <p:cNvPr id="10" name="TextBox 9"/>
+          <p:cNvPr id="15" name="TextBox 14"/>
           <p:cNvSpPr txBox="1"/>
           <p:nvPr/>
         </p:nvSpPr>
         <p:spPr>
           <a:xfrm>
-            <a:off x="6355080" y="2212848"/>
+            <a:off x="6327648" y="2825496"/>
             <a:ext cx="4937760" cy="365760"/>
           </a:xfrm>
           <a:prstGeom prst="rect">
@@ -4238,7 +5143,7 @@
           <a:p>
             <a:pPr algn="l"/>
             <a:r>
-              <a:rPr sz="1600" b="1">
+              <a:rPr sz="1550" b="1" i="0">
                 <a:solidFill>
                   <a:srgbClr val="FFFFFF"/>
                 </a:solidFill>
@@ -4251,13 +5156,13 @@
       </p:sp>
       <p:sp>
         <p:nvSpPr>
-          <p:cNvPr id="11" name="TextBox 10"/>
+          <p:cNvPr id="16" name="TextBox 15"/>
           <p:cNvSpPr txBox="1"/>
           <p:nvPr/>
         </p:nvSpPr>
         <p:spPr>
           <a:xfrm>
-            <a:off x="6355080" y="2560320"/>
+            <a:off x="6327648" y="3172968"/>
             <a:ext cx="4937760" cy="457200"/>
           </a:xfrm>
           <a:prstGeom prst="rect">
@@ -4273,7 +5178,7 @@
           <a:p>
             <a:pPr algn="l"/>
             <a:r>
-              <a:rPr sz="1250" b="0">
+              <a:rPr sz="1200" b="0" i="0">
                 <a:solidFill>
                   <a:srgbClr val="9FB0AE"/>
                 </a:solidFill>
@@ -4286,14 +5191,14 @@
       </p:sp>
       <p:sp>
         <p:nvSpPr>
-          <p:cNvPr id="12" name="Oval 11"/>
+          <p:cNvPr id="17" name="Oval 16"/>
           <p:cNvSpPr/>
           <p:nvPr/>
         </p:nvSpPr>
         <p:spPr>
           <a:xfrm>
-            <a:off x="548640" y="3547872"/>
-            <a:ext cx="128016" cy="128016"/>
+            <a:off x="548640" y="4133087"/>
+            <a:ext cx="118872" cy="118872"/>
           </a:xfrm>
           <a:prstGeom prst="ellipse">
             <a:avLst/>
@@ -4304,6 +5209,7 @@
           <a:ln>
             <a:noFill/>
           </a:ln>
+          <a:effectLst/>
         </p:spPr>
         <p:style>
           <a:lnRef idx="1">
@@ -4329,13 +5235,13 @@
       </p:sp>
       <p:sp>
         <p:nvSpPr>
-          <p:cNvPr id="13" name="TextBox 12"/>
+          <p:cNvPr id="18" name="TextBox 17"/>
           <p:cNvSpPr txBox="1"/>
           <p:nvPr/>
         </p:nvSpPr>
         <p:spPr>
           <a:xfrm>
-            <a:off x="868680" y="3401568"/>
+            <a:off x="841248" y="3995927"/>
             <a:ext cx="4937760" cy="365760"/>
           </a:xfrm>
           <a:prstGeom prst="rect">
@@ -4351,7 +5257,7 @@
           <a:p>
             <a:pPr algn="l"/>
             <a:r>
-              <a:rPr sz="1600" b="1">
+              <a:rPr sz="1550" b="1" i="0">
                 <a:solidFill>
                   <a:srgbClr val="FFFFFF"/>
                 </a:solidFill>
@@ -4364,13 +5270,13 @@
       </p:sp>
       <p:sp>
         <p:nvSpPr>
-          <p:cNvPr id="14" name="TextBox 13"/>
+          <p:cNvPr id="19" name="TextBox 18"/>
           <p:cNvSpPr txBox="1"/>
           <p:nvPr/>
         </p:nvSpPr>
         <p:spPr>
           <a:xfrm>
-            <a:off x="868680" y="3749040"/>
+            <a:off x="841248" y="4343399"/>
             <a:ext cx="4937760" cy="457200"/>
           </a:xfrm>
           <a:prstGeom prst="rect">
@@ -4386,7 +5292,7 @@
           <a:p>
             <a:pPr algn="l"/>
             <a:r>
-              <a:rPr sz="1250" b="0">
+              <a:rPr sz="1200" b="0" i="0">
                 <a:solidFill>
                   <a:srgbClr val="9FB0AE"/>
                 </a:solidFill>
@@ -4399,14 +5305,14 @@
       </p:sp>
       <p:sp>
         <p:nvSpPr>
-          <p:cNvPr id="15" name="Oval 14"/>
+          <p:cNvPr id="20" name="Oval 19"/>
           <p:cNvSpPr/>
           <p:nvPr/>
         </p:nvSpPr>
         <p:spPr>
           <a:xfrm>
-            <a:off x="6035040" y="3547872"/>
-            <a:ext cx="128016" cy="128016"/>
+            <a:off x="6035040" y="4133087"/>
+            <a:ext cx="118872" cy="118872"/>
           </a:xfrm>
           <a:prstGeom prst="ellipse">
             <a:avLst/>
@@ -4417,6 +5323,7 @@
           <a:ln>
             <a:noFill/>
           </a:ln>
+          <a:effectLst/>
         </p:spPr>
         <p:style>
           <a:lnRef idx="1">
@@ -4442,13 +5349,13 @@
       </p:sp>
       <p:sp>
         <p:nvSpPr>
-          <p:cNvPr id="16" name="TextBox 15"/>
+          <p:cNvPr id="21" name="TextBox 20"/>
           <p:cNvSpPr txBox="1"/>
           <p:nvPr/>
         </p:nvSpPr>
         <p:spPr>
           <a:xfrm>
-            <a:off x="6355080" y="3401568"/>
+            <a:off x="6327648" y="3995927"/>
             <a:ext cx="4937760" cy="365760"/>
           </a:xfrm>
           <a:prstGeom prst="rect">
@@ -4464,7 +5371,7 @@
           <a:p>
             <a:pPr algn="l"/>
             <a:r>
-              <a:rPr sz="1600" b="1">
+              <a:rPr sz="1550" b="1" i="0">
                 <a:solidFill>
                   <a:srgbClr val="FFFFFF"/>
                 </a:solidFill>
@@ -4477,13 +5384,13 @@
       </p:sp>
       <p:sp>
         <p:nvSpPr>
-          <p:cNvPr id="17" name="TextBox 16"/>
+          <p:cNvPr id="22" name="TextBox 21"/>
           <p:cNvSpPr txBox="1"/>
           <p:nvPr/>
         </p:nvSpPr>
         <p:spPr>
           <a:xfrm>
-            <a:off x="6355080" y="3749040"/>
+            <a:off x="6327648" y="4343399"/>
             <a:ext cx="4937760" cy="457200"/>
           </a:xfrm>
           <a:prstGeom prst="rect">
@@ -4499,7 +5406,7 @@
           <a:p>
             <a:pPr algn="l"/>
             <a:r>
-              <a:rPr sz="1250" b="0">
+              <a:rPr sz="1200" b="0" i="0">
                 <a:solidFill>
                   <a:srgbClr val="9FB0AE"/>
                 </a:solidFill>
@@ -4512,14 +5419,14 @@
       </p:sp>
       <p:sp>
         <p:nvSpPr>
-          <p:cNvPr id="18" name="Oval 17"/>
+          <p:cNvPr id="23" name="Oval 22"/>
           <p:cNvSpPr/>
           <p:nvPr/>
         </p:nvSpPr>
         <p:spPr>
           <a:xfrm>
-            <a:off x="548640" y="4736592"/>
-            <a:ext cx="128016" cy="128016"/>
+            <a:off x="548640" y="5303520"/>
+            <a:ext cx="118872" cy="118872"/>
           </a:xfrm>
           <a:prstGeom prst="ellipse">
             <a:avLst/>
@@ -4530,6 +5437,7 @@
           <a:ln>
             <a:noFill/>
           </a:ln>
+          <a:effectLst/>
         </p:spPr>
         <p:style>
           <a:lnRef idx="1">
@@ -4555,13 +5463,13 @@
       </p:sp>
       <p:sp>
         <p:nvSpPr>
-          <p:cNvPr id="19" name="TextBox 18"/>
+          <p:cNvPr id="24" name="TextBox 23"/>
           <p:cNvSpPr txBox="1"/>
           <p:nvPr/>
         </p:nvSpPr>
         <p:spPr>
           <a:xfrm>
-            <a:off x="868680" y="4590288"/>
+            <a:off x="841248" y="5166360"/>
             <a:ext cx="4937760" cy="365760"/>
           </a:xfrm>
           <a:prstGeom prst="rect">
@@ -4577,7 +5485,7 @@
           <a:p>
             <a:pPr algn="l"/>
             <a:r>
-              <a:rPr sz="1600" b="1">
+              <a:rPr sz="1550" b="1" i="0">
                 <a:solidFill>
                   <a:srgbClr val="FFFFFF"/>
                 </a:solidFill>
@@ -4590,13 +5498,13 @@
       </p:sp>
       <p:sp>
         <p:nvSpPr>
-          <p:cNvPr id="20" name="TextBox 19"/>
+          <p:cNvPr id="25" name="TextBox 24"/>
           <p:cNvSpPr txBox="1"/>
           <p:nvPr/>
         </p:nvSpPr>
         <p:spPr>
           <a:xfrm>
-            <a:off x="868680" y="4937760"/>
+            <a:off x="841248" y="5513832"/>
             <a:ext cx="4937760" cy="457200"/>
           </a:xfrm>
           <a:prstGeom prst="rect">
@@ -4612,7 +5520,7 @@
           <a:p>
             <a:pPr algn="l"/>
             <a:r>
-              <a:rPr sz="1250" b="0">
+              <a:rPr sz="1200" b="0" i="0">
                 <a:solidFill>
                   <a:srgbClr val="9FB0AE"/>
                 </a:solidFill>
@@ -4625,14 +5533,14 @@
       </p:sp>
       <p:sp>
         <p:nvSpPr>
-          <p:cNvPr id="21" name="Oval 20"/>
+          <p:cNvPr id="26" name="Oval 25"/>
           <p:cNvSpPr/>
           <p:nvPr/>
         </p:nvSpPr>
         <p:spPr>
           <a:xfrm>
-            <a:off x="6035040" y="4736592"/>
-            <a:ext cx="128016" cy="128016"/>
+            <a:off x="6035040" y="5303520"/>
+            <a:ext cx="118872" cy="118872"/>
           </a:xfrm>
           <a:prstGeom prst="ellipse">
             <a:avLst/>
@@ -4643,6 +5551,7 @@
           <a:ln>
             <a:noFill/>
           </a:ln>
+          <a:effectLst/>
         </p:spPr>
         <p:style>
           <a:lnRef idx="1">
@@ -4668,13 +5577,13 @@
       </p:sp>
       <p:sp>
         <p:nvSpPr>
-          <p:cNvPr id="22" name="TextBox 21"/>
+          <p:cNvPr id="27" name="TextBox 26"/>
           <p:cNvSpPr txBox="1"/>
           <p:nvPr/>
         </p:nvSpPr>
         <p:spPr>
           <a:xfrm>
-            <a:off x="6355080" y="4590288"/>
+            <a:off x="6327648" y="5166360"/>
             <a:ext cx="4937760" cy="365760"/>
           </a:xfrm>
           <a:prstGeom prst="rect">
@@ -4690,7 +5599,7 @@
           <a:p>
             <a:pPr algn="l"/>
             <a:r>
-              <a:rPr sz="1600" b="1">
+              <a:rPr sz="1550" b="1" i="0">
                 <a:solidFill>
                   <a:srgbClr val="FFFFFF"/>
                 </a:solidFill>
@@ -4703,13 +5612,13 @@
       </p:sp>
       <p:sp>
         <p:nvSpPr>
-          <p:cNvPr id="23" name="TextBox 22"/>
+          <p:cNvPr id="28" name="TextBox 27"/>
           <p:cNvSpPr txBox="1"/>
           <p:nvPr/>
         </p:nvSpPr>
         <p:spPr>
           <a:xfrm>
-            <a:off x="6355080" y="4937760"/>
+            <a:off x="6327648" y="5513832"/>
             <a:ext cx="4937760" cy="457200"/>
           </a:xfrm>
           <a:prstGeom prst="rect">
@@ -4725,13 +5634,48 @@
           <a:p>
             <a:pPr algn="l"/>
             <a:r>
-              <a:rPr sz="1250" b="0">
+              <a:rPr sz="1200" b="0" i="0">
                 <a:solidFill>
                   <a:srgbClr val="9FB0AE"/>
                 </a:solidFill>
                 <a:latin typeface="Calibri"/>
               </a:rPr>
-              <a:t>Narración de video generada con texto a voz</a:t>
+              <a:t>Narración de este video generada con texto a voz</a:t>
+            </a:r>
+          </a:p>
+        </p:txBody>
+      </p:sp>
+      <p:sp>
+        <p:nvSpPr>
+          <p:cNvPr id="29" name="TextBox 28"/>
+          <p:cNvSpPr txBox="1"/>
+          <p:nvPr/>
+        </p:nvSpPr>
+        <p:spPr>
+          <a:xfrm>
+            <a:off x="11247120" y="6446520"/>
+            <a:ext cx="731520" cy="320040"/>
+          </a:xfrm>
+          <a:prstGeom prst="rect">
+            <a:avLst/>
+          </a:prstGeom>
+          <a:noFill/>
+        </p:spPr>
+        <p:txBody>
+          <a:bodyPr wrap="square">
+            <a:spAutoFit/>
+          </a:bodyPr>
+          <a:lstStyle/>
+          <a:p>
+            <a:pPr algn="r"/>
+            <a:r>
+              <a:rPr sz="1100" b="0" i="0">
+                <a:solidFill>
+                  <a:srgbClr val="9FB0AE"/>
+                </a:solidFill>
+                <a:latin typeface="Calibri"/>
+              </a:rPr>
+              <a:t>4/7</a:t>
             </a:r>
           </a:p>
         </p:txBody>
@@ -4806,7 +5750,199 @@
         </p:nvSpPr>
         <p:spPr>
           <a:xfrm>
-            <a:off x="548640" y="457200"/>
+            <a:off x="-2743200" y="-2743200"/>
+            <a:ext cx="8229600" cy="8229600"/>
+          </a:xfrm>
+          <a:prstGeom prst="ellipse">
+            <a:avLst/>
+          </a:prstGeom>
+          <a:solidFill>
+            <a:srgbClr val="142B42"/>
+          </a:solidFill>
+          <a:ln>
+            <a:noFill/>
+          </a:ln>
+          <a:effectLst/>
+        </p:spPr>
+        <p:style>
+          <a:lnRef idx="1">
+            <a:schemeClr val="accent1"/>
+          </a:lnRef>
+          <a:fillRef idx="3">
+            <a:schemeClr val="accent1"/>
+          </a:fillRef>
+          <a:effectRef idx="2">
+            <a:schemeClr val="accent1"/>
+          </a:effectRef>
+          <a:fontRef idx="minor">
+            <a:schemeClr val="lt1"/>
+          </a:fontRef>
+        </p:style>
+        <p:txBody>
+          <a:bodyPr rtlCol="0" anchor="ctr"/>
+          <a:lstStyle/>
+          <a:p>
+            <a:pPr algn="ctr"/>
+          </a:p>
+        </p:txBody>
+      </p:sp>
+      <p:sp>
+        <p:nvSpPr>
+          <p:cNvPr id="4" name="Oval 3"/>
+          <p:cNvSpPr/>
+          <p:nvPr/>
+        </p:nvSpPr>
+        <p:spPr>
+          <a:xfrm>
+            <a:off x="9601200" y="4114800"/>
+            <a:ext cx="5486400" cy="5486400"/>
+          </a:xfrm>
+          <a:prstGeom prst="ellipse">
+            <a:avLst/>
+          </a:prstGeom>
+          <a:solidFill>
+            <a:srgbClr val="142B42"/>
+          </a:solidFill>
+          <a:ln>
+            <a:noFill/>
+          </a:ln>
+          <a:effectLst/>
+        </p:spPr>
+        <p:style>
+          <a:lnRef idx="1">
+            <a:schemeClr val="accent1"/>
+          </a:lnRef>
+          <a:fillRef idx="3">
+            <a:schemeClr val="accent1"/>
+          </a:fillRef>
+          <a:effectRef idx="2">
+            <a:schemeClr val="accent1"/>
+          </a:effectRef>
+          <a:fontRef idx="minor">
+            <a:schemeClr val="lt1"/>
+          </a:fontRef>
+        </p:style>
+        <p:txBody>
+          <a:bodyPr rtlCol="0" anchor="ctr"/>
+          <a:lstStyle/>
+          <a:p>
+            <a:pPr algn="ctr"/>
+          </a:p>
+        </p:txBody>
+      </p:sp>
+      <p:sp>
+        <p:nvSpPr>
+          <p:cNvPr id="5" name="Rounded Rectangle 4"/>
+          <p:cNvSpPr/>
+          <p:nvPr/>
+        </p:nvSpPr>
+        <p:spPr>
+          <a:xfrm>
+            <a:off x="502920" y="365760"/>
+            <a:ext cx="384048" cy="384048"/>
+          </a:xfrm>
+          <a:prstGeom prst="roundRect">
+            <a:avLst>
+              <a:gd name="adj" fmla="val 28000"/>
+            </a:avLst>
+          </a:prstGeom>
+          <a:solidFill>
+            <a:srgbClr val="FFFFFF"/>
+          </a:solidFill>
+          <a:ln>
+            <a:noFill/>
+          </a:ln>
+          <a:effectLst/>
+        </p:spPr>
+        <p:style>
+          <a:lnRef idx="1">
+            <a:schemeClr val="accent1"/>
+          </a:lnRef>
+          <a:fillRef idx="3">
+            <a:schemeClr val="accent1"/>
+          </a:fillRef>
+          <a:effectRef idx="2">
+            <a:schemeClr val="accent1"/>
+          </a:effectRef>
+          <a:fontRef idx="minor">
+            <a:schemeClr val="lt1"/>
+          </a:fontRef>
+        </p:style>
+        <p:txBody>
+          <a:bodyPr rtlCol="0" anchor="ctr"/>
+          <a:lstStyle/>
+          <a:p>
+            <a:pPr algn="ctr"/>
+          </a:p>
+        </p:txBody>
+      </p:sp>
+      <p:pic>
+        <p:nvPicPr>
+          <p:cNvPr id="6" name="Picture 5" descr="logo-icon.png"/>
+          <p:cNvPicPr>
+            <a:picLocks noChangeAspect="1"/>
+          </p:cNvPicPr>
+          <p:nvPr/>
+        </p:nvPicPr>
+        <p:blipFill>
+          <a:blip r:embed="rId2"/>
+          <a:stretch>
+            <a:fillRect/>
+          </a:stretch>
+        </p:blipFill>
+        <p:spPr>
+          <a:xfrm>
+            <a:off x="557784" y="420624"/>
+            <a:ext cx="383084" cy="274320"/>
+          </a:xfrm>
+          <a:prstGeom prst="rect">
+            <a:avLst/>
+          </a:prstGeom>
+        </p:spPr>
+      </p:pic>
+      <p:sp>
+        <p:nvSpPr>
+          <p:cNvPr id="7" name="TextBox 6"/>
+          <p:cNvSpPr txBox="1"/>
+          <p:nvPr/>
+        </p:nvSpPr>
+        <p:spPr>
+          <a:xfrm>
+            <a:off x="987552" y="384048"/>
+            <a:ext cx="3657600" cy="365760"/>
+          </a:xfrm>
+          <a:prstGeom prst="rect">
+            <a:avLst/>
+          </a:prstGeom>
+          <a:noFill/>
+        </p:spPr>
+        <p:txBody>
+          <a:bodyPr wrap="none">
+            <a:spAutoFit/>
+          </a:bodyPr>
+          <a:lstStyle/>
+          <a:p>
+            <a:r>
+              <a:rPr sz="1100" b="1">
+                <a:solidFill>
+                  <a:srgbClr val="9FB0AE"/>
+                </a:solidFill>
+                <a:latin typeface="Calibri"/>
+              </a:rPr>
+              <a:t>REACTIVA TERRITORIO</a:t>
+            </a:r>
+          </a:p>
+        </p:txBody>
+      </p:sp>
+      <p:sp>
+        <p:nvSpPr>
+          <p:cNvPr id="8" name="Oval 7"/>
+          <p:cNvSpPr/>
+          <p:nvPr/>
+        </p:nvSpPr>
+        <p:spPr>
+          <a:xfrm>
+            <a:off x="548640" y="1143000"/>
             <a:ext cx="365760" cy="365760"/>
           </a:xfrm>
           <a:prstGeom prst="ellipse">
@@ -4818,6 +5954,7 @@
           <a:ln>
             <a:noFill/>
           </a:ln>
+          <a:effectLst/>
         </p:spPr>
         <p:style>
           <a:lnRef idx="1">
@@ -4851,13 +5988,13 @@
       </p:sp>
       <p:sp>
         <p:nvSpPr>
-          <p:cNvPr id="4" name="TextBox 3"/>
+          <p:cNvPr id="9" name="TextBox 8"/>
           <p:cNvSpPr txBox="1"/>
           <p:nvPr/>
         </p:nvSpPr>
         <p:spPr>
           <a:xfrm>
-            <a:off x="1051560" y="475488"/>
+            <a:off x="1051560" y="1161288"/>
             <a:ext cx="5486400" cy="365760"/>
           </a:xfrm>
           <a:prstGeom prst="rect">
@@ -4873,7 +6010,7 @@
           <a:p>
             <a:pPr algn="l"/>
             <a:r>
-              <a:rPr sz="1300" b="1">
+              <a:rPr sz="1300" b="1" i="0">
                 <a:solidFill>
                   <a:srgbClr val="14B8A8"/>
                 </a:solidFill>
@@ -4886,13 +6023,13 @@
       </p:sp>
       <p:sp>
         <p:nvSpPr>
-          <p:cNvPr id="5" name="TextBox 4"/>
+          <p:cNvPr id="10" name="TextBox 9"/>
           <p:cNvSpPr txBox="1"/>
           <p:nvPr/>
         </p:nvSpPr>
         <p:spPr>
           <a:xfrm>
-            <a:off x="548640" y="1005840"/>
+            <a:off x="548640" y="1691640"/>
             <a:ext cx="10515600" cy="1097280"/>
           </a:xfrm>
           <a:prstGeom prst="rect">
@@ -4908,7 +6045,7 @@
           <a:p>
             <a:pPr algn="l"/>
             <a:r>
-              <a:rPr sz="3400" b="1">
+              <a:rPr sz="3300" b="1" i="0">
                 <a:solidFill>
                   <a:srgbClr val="FFFFFF"/>
                 </a:solidFill>
@@ -4921,13 +6058,13 @@
       </p:sp>
       <p:sp>
         <p:nvSpPr>
-          <p:cNvPr id="6" name="TextBox 5"/>
+          <p:cNvPr id="11" name="TextBox 10"/>
           <p:cNvSpPr txBox="1"/>
           <p:nvPr/>
         </p:nvSpPr>
         <p:spPr>
           <a:xfrm>
-            <a:off x="548640" y="1920240"/>
+            <a:off x="548640" y="2606040"/>
             <a:ext cx="9601200" cy="731520"/>
           </a:xfrm>
           <a:prstGeom prst="rect">
@@ -4943,7 +6080,7 @@
           <a:p>
             <a:pPr algn="l"/>
             <a:r>
-              <a:rPr sz="1700" b="0">
+              <a:rPr sz="1600" b="0" i="0">
                 <a:solidFill>
                   <a:srgbClr val="9FB0AE"/>
                 </a:solidFill>
@@ -4956,17 +6093,19 @@
       </p:sp>
       <p:sp>
         <p:nvSpPr>
-          <p:cNvPr id="7" name="Rounded Rectangle 6"/>
+          <p:cNvPr id="12" name="Rounded Rectangle 11"/>
           <p:cNvSpPr/>
           <p:nvPr/>
         </p:nvSpPr>
         <p:spPr>
           <a:xfrm>
-            <a:off x="548640" y="2834640"/>
-            <a:ext cx="6583680" cy="822960"/>
+            <a:off x="548640" y="3520440"/>
+            <a:ext cx="6675120" cy="868680"/>
           </a:xfrm>
           <a:prstGeom prst="roundRect">
-            <a:avLst/>
+            <a:avLst>
+              <a:gd name="adj" fmla="val 8000"/>
+            </a:avLst>
           </a:prstGeom>
           <a:solidFill>
             <a:srgbClr val="162A47"/>
@@ -4976,6 +6115,7 @@
               <a:srgbClr val="273C5C"/>
             </a:solidFill>
           </a:ln>
+          <a:effectLst/>
         </p:spPr>
         <p:style>
           <a:lnRef idx="1">
@@ -4997,6 +6137,14 @@
           <a:p>
             <a:pPr algn="ctr"/>
             <a:r>
+              <a:rPr sz="1400">
+                <a:solidFill>
+                  <a:srgbClr val="14B8A8"/>
+                </a:solidFill>
+              </a:rPr>
+              <a:t>●  </a:t>
+            </a:r>
+            <a:r>
               <a:rPr sz="2400" b="1">
                 <a:solidFill>
                   <a:srgbClr val="FFFFFF"/>
@@ -5010,13 +6158,13 @@
       </p:sp>
       <p:sp>
         <p:nvSpPr>
-          <p:cNvPr id="8" name="TextBox 7"/>
+          <p:cNvPr id="13" name="TextBox 12"/>
           <p:cNvSpPr txBox="1"/>
           <p:nvPr/>
         </p:nvSpPr>
         <p:spPr>
           <a:xfrm>
-            <a:off x="548640" y="3931920"/>
+            <a:off x="548640" y="4663440"/>
             <a:ext cx="10058400" cy="731520"/>
           </a:xfrm>
           <a:prstGeom prst="rect">
@@ -5032,13 +6180,48 @@
           <a:p>
             <a:pPr algn="l"/>
             <a:r>
-              <a:rPr sz="1400" b="0">
+              <a:rPr sz="1350" b="0" i="0">
                 <a:solidFill>
                   <a:srgbClr val="9FB0AE"/>
                 </a:solidFill>
                 <a:latin typeface="Calibri"/>
               </a:rPr>
-              <a:t>Cuentas demo: lider@demo.reactiva · org@demo.reactiva · admin@demo.reactiva  —  contraseña: demo1234</a:t>
+              <a:t>Cuentas demo: lider@demo.reactiva  ·  org@demo.reactiva  ·  admin@demo.reactiva   —   contraseña: demo1234</a:t>
+            </a:r>
+          </a:p>
+        </p:txBody>
+      </p:sp>
+      <p:sp>
+        <p:nvSpPr>
+          <p:cNvPr id="14" name="TextBox 13"/>
+          <p:cNvSpPr txBox="1"/>
+          <p:nvPr/>
+        </p:nvSpPr>
+        <p:spPr>
+          <a:xfrm>
+            <a:off x="11247120" y="6446520"/>
+            <a:ext cx="731520" cy="320040"/>
+          </a:xfrm>
+          <a:prstGeom prst="rect">
+            <a:avLst/>
+          </a:prstGeom>
+          <a:noFill/>
+        </p:spPr>
+        <p:txBody>
+          <a:bodyPr wrap="square">
+            <a:spAutoFit/>
+          </a:bodyPr>
+          <a:lstStyle/>
+          <a:p>
+            <a:pPr algn="r"/>
+            <a:r>
+              <a:rPr sz="1100" b="0" i="0">
+                <a:solidFill>
+                  <a:srgbClr val="9FB0AE"/>
+                </a:solidFill>
+                <a:latin typeface="Calibri"/>
+              </a:rPr>
+              <a:t>5/7</a:t>
             </a:r>
           </a:p>
         </p:txBody>
@@ -5113,7 +6296,199 @@
         </p:nvSpPr>
         <p:spPr>
           <a:xfrm>
-            <a:off x="548640" y="457200"/>
+            <a:off x="-2743200" y="-2743200"/>
+            <a:ext cx="8229600" cy="8229600"/>
+          </a:xfrm>
+          <a:prstGeom prst="ellipse">
+            <a:avLst/>
+          </a:prstGeom>
+          <a:solidFill>
+            <a:srgbClr val="142B42"/>
+          </a:solidFill>
+          <a:ln>
+            <a:noFill/>
+          </a:ln>
+          <a:effectLst/>
+        </p:spPr>
+        <p:style>
+          <a:lnRef idx="1">
+            <a:schemeClr val="accent1"/>
+          </a:lnRef>
+          <a:fillRef idx="3">
+            <a:schemeClr val="accent1"/>
+          </a:fillRef>
+          <a:effectRef idx="2">
+            <a:schemeClr val="accent1"/>
+          </a:effectRef>
+          <a:fontRef idx="minor">
+            <a:schemeClr val="lt1"/>
+          </a:fontRef>
+        </p:style>
+        <p:txBody>
+          <a:bodyPr rtlCol="0" anchor="ctr"/>
+          <a:lstStyle/>
+          <a:p>
+            <a:pPr algn="ctr"/>
+          </a:p>
+        </p:txBody>
+      </p:sp>
+      <p:sp>
+        <p:nvSpPr>
+          <p:cNvPr id="4" name="Oval 3"/>
+          <p:cNvSpPr/>
+          <p:nvPr/>
+        </p:nvSpPr>
+        <p:spPr>
+          <a:xfrm>
+            <a:off x="9601200" y="4114800"/>
+            <a:ext cx="5486400" cy="5486400"/>
+          </a:xfrm>
+          <a:prstGeom prst="ellipse">
+            <a:avLst/>
+          </a:prstGeom>
+          <a:solidFill>
+            <a:srgbClr val="142B42"/>
+          </a:solidFill>
+          <a:ln>
+            <a:noFill/>
+          </a:ln>
+          <a:effectLst/>
+        </p:spPr>
+        <p:style>
+          <a:lnRef idx="1">
+            <a:schemeClr val="accent1"/>
+          </a:lnRef>
+          <a:fillRef idx="3">
+            <a:schemeClr val="accent1"/>
+          </a:fillRef>
+          <a:effectRef idx="2">
+            <a:schemeClr val="accent1"/>
+          </a:effectRef>
+          <a:fontRef idx="minor">
+            <a:schemeClr val="lt1"/>
+          </a:fontRef>
+        </p:style>
+        <p:txBody>
+          <a:bodyPr rtlCol="0" anchor="ctr"/>
+          <a:lstStyle/>
+          <a:p>
+            <a:pPr algn="ctr"/>
+          </a:p>
+        </p:txBody>
+      </p:sp>
+      <p:sp>
+        <p:nvSpPr>
+          <p:cNvPr id="5" name="Rounded Rectangle 4"/>
+          <p:cNvSpPr/>
+          <p:nvPr/>
+        </p:nvSpPr>
+        <p:spPr>
+          <a:xfrm>
+            <a:off x="502920" y="365760"/>
+            <a:ext cx="384048" cy="384048"/>
+          </a:xfrm>
+          <a:prstGeom prst="roundRect">
+            <a:avLst>
+              <a:gd name="adj" fmla="val 28000"/>
+            </a:avLst>
+          </a:prstGeom>
+          <a:solidFill>
+            <a:srgbClr val="FFFFFF"/>
+          </a:solidFill>
+          <a:ln>
+            <a:noFill/>
+          </a:ln>
+          <a:effectLst/>
+        </p:spPr>
+        <p:style>
+          <a:lnRef idx="1">
+            <a:schemeClr val="accent1"/>
+          </a:lnRef>
+          <a:fillRef idx="3">
+            <a:schemeClr val="accent1"/>
+          </a:fillRef>
+          <a:effectRef idx="2">
+            <a:schemeClr val="accent1"/>
+          </a:effectRef>
+          <a:fontRef idx="minor">
+            <a:schemeClr val="lt1"/>
+          </a:fontRef>
+        </p:style>
+        <p:txBody>
+          <a:bodyPr rtlCol="0" anchor="ctr"/>
+          <a:lstStyle/>
+          <a:p>
+            <a:pPr algn="ctr"/>
+          </a:p>
+        </p:txBody>
+      </p:sp>
+      <p:pic>
+        <p:nvPicPr>
+          <p:cNvPr id="6" name="Picture 5" descr="logo-icon.png"/>
+          <p:cNvPicPr>
+            <a:picLocks noChangeAspect="1"/>
+          </p:cNvPicPr>
+          <p:nvPr/>
+        </p:nvPicPr>
+        <p:blipFill>
+          <a:blip r:embed="rId2"/>
+          <a:stretch>
+            <a:fillRect/>
+          </a:stretch>
+        </p:blipFill>
+        <p:spPr>
+          <a:xfrm>
+            <a:off x="557784" y="420624"/>
+            <a:ext cx="383084" cy="274320"/>
+          </a:xfrm>
+          <a:prstGeom prst="rect">
+            <a:avLst/>
+          </a:prstGeom>
+        </p:spPr>
+      </p:pic>
+      <p:sp>
+        <p:nvSpPr>
+          <p:cNvPr id="7" name="TextBox 6"/>
+          <p:cNvSpPr txBox="1"/>
+          <p:nvPr/>
+        </p:nvSpPr>
+        <p:spPr>
+          <a:xfrm>
+            <a:off x="987552" y="384048"/>
+            <a:ext cx="3657600" cy="365760"/>
+          </a:xfrm>
+          <a:prstGeom prst="rect">
+            <a:avLst/>
+          </a:prstGeom>
+          <a:noFill/>
+        </p:spPr>
+        <p:txBody>
+          <a:bodyPr wrap="none">
+            <a:spAutoFit/>
+          </a:bodyPr>
+          <a:lstStyle/>
+          <a:p>
+            <a:r>
+              <a:rPr sz="1100" b="1">
+                <a:solidFill>
+                  <a:srgbClr val="9FB0AE"/>
+                </a:solidFill>
+                <a:latin typeface="Calibri"/>
+              </a:rPr>
+              <a:t>REACTIVA TERRITORIO</a:t>
+            </a:r>
+          </a:p>
+        </p:txBody>
+      </p:sp>
+      <p:sp>
+        <p:nvSpPr>
+          <p:cNvPr id="8" name="Oval 7"/>
+          <p:cNvSpPr/>
+          <p:nvPr/>
+        </p:nvSpPr>
+        <p:spPr>
+          <a:xfrm>
+            <a:off x="548640" y="1143000"/>
             <a:ext cx="365760" cy="365760"/>
           </a:xfrm>
           <a:prstGeom prst="ellipse">
@@ -5125,6 +6500,7 @@
           <a:ln>
             <a:noFill/>
           </a:ln>
+          <a:effectLst/>
         </p:spPr>
         <p:style>
           <a:lnRef idx="1">
@@ -5158,13 +6534,13 @@
       </p:sp>
       <p:sp>
         <p:nvSpPr>
-          <p:cNvPr id="4" name="TextBox 3"/>
+          <p:cNvPr id="9" name="TextBox 8"/>
           <p:cNvSpPr txBox="1"/>
           <p:nvPr/>
         </p:nvSpPr>
         <p:spPr>
           <a:xfrm>
-            <a:off x="1051560" y="475488"/>
+            <a:off x="1051560" y="1161288"/>
             <a:ext cx="5486400" cy="365760"/>
           </a:xfrm>
           <a:prstGeom prst="rect">
@@ -5180,7 +6556,7 @@
           <a:p>
             <a:pPr algn="l"/>
             <a:r>
-              <a:rPr sz="1300" b="1">
+              <a:rPr sz="1300" b="1" i="0">
                 <a:solidFill>
                   <a:srgbClr val="14B8A8"/>
                 </a:solidFill>
@@ -5193,13 +6569,13 @@
       </p:sp>
       <p:sp>
         <p:nvSpPr>
-          <p:cNvPr id="5" name="TextBox 4"/>
+          <p:cNvPr id="10" name="TextBox 9"/>
           <p:cNvSpPr txBox="1"/>
           <p:nvPr/>
         </p:nvSpPr>
         <p:spPr>
           <a:xfrm>
-            <a:off x="548640" y="1005840"/>
+            <a:off x="548640" y="1691640"/>
             <a:ext cx="10515600" cy="1097280"/>
           </a:xfrm>
           <a:prstGeom prst="rect">
@@ -5215,7 +6591,7 @@
           <a:p>
             <a:pPr algn="l"/>
             <a:r>
-              <a:rPr sz="3400" b="1">
+              <a:rPr sz="3300" b="1" i="0">
                 <a:solidFill>
                   <a:srgbClr val="FFFFFF"/>
                 </a:solidFill>
@@ -5228,17 +6604,19 @@
       </p:sp>
       <p:sp>
         <p:nvSpPr>
-          <p:cNvPr id="6" name="Rounded Rectangle 5"/>
+          <p:cNvPr id="11" name="Rounded Rectangle 10"/>
           <p:cNvSpPr/>
           <p:nvPr/>
         </p:nvSpPr>
         <p:spPr>
           <a:xfrm>
-            <a:off x="548640" y="2103120"/>
-            <a:ext cx="8686800" cy="822960"/>
+            <a:off x="548640" y="2743200"/>
+            <a:ext cx="8778240" cy="868680"/>
           </a:xfrm>
           <a:prstGeom prst="roundRect">
-            <a:avLst/>
+            <a:avLst>
+              <a:gd name="adj" fmla="val 8000"/>
+            </a:avLst>
           </a:prstGeom>
           <a:solidFill>
             <a:srgbClr val="162A47"/>
@@ -5248,6 +6626,7 @@
               <a:srgbClr val="273C5C"/>
             </a:solidFill>
           </a:ln>
+          <a:effectLst/>
         </p:spPr>
         <p:style>
           <a:lnRef idx="1">
@@ -5269,7 +6648,15 @@
           <a:p>
             <a:pPr algn="ctr"/>
             <a:r>
-              <a:rPr sz="2000" b="1">
+              <a:rPr sz="1200">
+                <a:solidFill>
+                  <a:srgbClr val="14B8A8"/>
+                </a:solidFill>
+              </a:rPr>
+              <a:t>●  </a:t>
+            </a:r>
+            <a:r>
+              <a:rPr sz="1900" b="1">
                 <a:solidFill>
                   <a:srgbClr val="FFFFFF"/>
                 </a:solidFill>
@@ -5282,13 +6669,13 @@
       </p:sp>
       <p:sp>
         <p:nvSpPr>
-          <p:cNvPr id="7" name="TextBox 6"/>
+          <p:cNvPr id="12" name="TextBox 11"/>
           <p:cNvSpPr txBox="1"/>
           <p:nvPr/>
         </p:nvSpPr>
         <p:spPr>
           <a:xfrm>
-            <a:off x="548640" y="3291840"/>
+            <a:off x="548640" y="3977639"/>
             <a:ext cx="3383280" cy="640080"/>
           </a:xfrm>
           <a:prstGeom prst="rect">
@@ -5304,7 +6691,7 @@
           <a:p>
             <a:pPr algn="l"/>
             <a:r>
-              <a:rPr sz="3000" b="1">
+              <a:rPr sz="2800" b="1" i="0">
                 <a:solidFill>
                   <a:srgbClr val="FFFFFF"/>
                 </a:solidFill>
@@ -5317,13 +6704,13 @@
       </p:sp>
       <p:sp>
         <p:nvSpPr>
-          <p:cNvPr id="8" name="TextBox 7"/>
+          <p:cNvPr id="13" name="TextBox 12"/>
           <p:cNvSpPr txBox="1"/>
           <p:nvPr/>
         </p:nvSpPr>
         <p:spPr>
           <a:xfrm>
-            <a:off x="548640" y="3977639"/>
+            <a:off x="548640" y="4617720"/>
             <a:ext cx="3383280" cy="731520"/>
           </a:xfrm>
           <a:prstGeom prst="rect">
@@ -5339,7 +6726,7 @@
           <a:p>
             <a:pPr algn="l"/>
             <a:r>
-              <a:rPr sz="1300" b="0">
+              <a:rPr sz="1250" b="0" i="0">
                 <a:solidFill>
                   <a:srgbClr val="9FB0AE"/>
                 </a:solidFill>
@@ -5352,13 +6739,13 @@
       </p:sp>
       <p:sp>
         <p:nvSpPr>
-          <p:cNvPr id="9" name="TextBox 8"/>
+          <p:cNvPr id="14" name="TextBox 13"/>
           <p:cNvSpPr txBox="1"/>
           <p:nvPr/>
         </p:nvSpPr>
         <p:spPr>
           <a:xfrm>
-            <a:off x="4206240" y="3291840"/>
+            <a:off x="4206240" y="3977639"/>
             <a:ext cx="3383280" cy="640080"/>
           </a:xfrm>
           <a:prstGeom prst="rect">
@@ -5374,7 +6761,7 @@
           <a:p>
             <a:pPr algn="l"/>
             <a:r>
-              <a:rPr sz="3000" b="1">
+              <a:rPr sz="2800" b="1" i="0">
                 <a:solidFill>
                   <a:srgbClr val="FFFFFF"/>
                 </a:solidFill>
@@ -5387,13 +6774,13 @@
       </p:sp>
       <p:sp>
         <p:nvSpPr>
-          <p:cNvPr id="10" name="TextBox 9"/>
+          <p:cNvPr id="15" name="TextBox 14"/>
           <p:cNvSpPr txBox="1"/>
           <p:nvPr/>
         </p:nvSpPr>
         <p:spPr>
           <a:xfrm>
-            <a:off x="4206240" y="3977639"/>
+            <a:off x="4206240" y="4617720"/>
             <a:ext cx="3383280" cy="731520"/>
           </a:xfrm>
           <a:prstGeom prst="rect">
@@ -5409,7 +6796,7 @@
           <a:p>
             <a:pPr algn="l"/>
             <a:r>
-              <a:rPr sz="1300" b="0">
+              <a:rPr sz="1250" b="0" i="0">
                 <a:solidFill>
                   <a:srgbClr val="9FB0AE"/>
                 </a:solidFill>
@@ -5422,13 +6809,13 @@
       </p:sp>
       <p:sp>
         <p:nvSpPr>
-          <p:cNvPr id="11" name="TextBox 10"/>
+          <p:cNvPr id="16" name="TextBox 15"/>
           <p:cNvSpPr txBox="1"/>
           <p:nvPr/>
         </p:nvSpPr>
         <p:spPr>
           <a:xfrm>
-            <a:off x="7863840" y="3291840"/>
+            <a:off x="7863840" y="3977639"/>
             <a:ext cx="3383280" cy="640080"/>
           </a:xfrm>
           <a:prstGeom prst="rect">
@@ -5444,7 +6831,7 @@
           <a:p>
             <a:pPr algn="l"/>
             <a:r>
-              <a:rPr sz="3000" b="1">
+              <a:rPr sz="2800" b="1" i="0">
                 <a:solidFill>
                   <a:srgbClr val="FFFFFF"/>
                 </a:solidFill>
@@ -5457,13 +6844,13 @@
       </p:sp>
       <p:sp>
         <p:nvSpPr>
-          <p:cNvPr id="12" name="TextBox 11"/>
+          <p:cNvPr id="17" name="TextBox 16"/>
           <p:cNvSpPr txBox="1"/>
           <p:nvPr/>
         </p:nvSpPr>
         <p:spPr>
           <a:xfrm>
-            <a:off x="7863840" y="3977639"/>
+            <a:off x="7863840" y="4617720"/>
             <a:ext cx="3383280" cy="731520"/>
           </a:xfrm>
           <a:prstGeom prst="rect">
@@ -5479,13 +6866,48 @@
           <a:p>
             <a:pPr algn="l"/>
             <a:r>
-              <a:rPr sz="1300" b="0">
+              <a:rPr sz="1250" b="0" i="0">
                 <a:solidFill>
                   <a:srgbClr val="9FB0AE"/>
                 </a:solidFill>
                 <a:latin typeface="Calibri"/>
               </a:rPr>
               <a:t>reglas de seguridad reales en Firestore</a:t>
+            </a:r>
+          </a:p>
+        </p:txBody>
+      </p:sp>
+      <p:sp>
+        <p:nvSpPr>
+          <p:cNvPr id="18" name="TextBox 17"/>
+          <p:cNvSpPr txBox="1"/>
+          <p:nvPr/>
+        </p:nvSpPr>
+        <p:spPr>
+          <a:xfrm>
+            <a:off x="11247120" y="6446520"/>
+            <a:ext cx="731520" cy="320040"/>
+          </a:xfrm>
+          <a:prstGeom prst="rect">
+            <a:avLst/>
+          </a:prstGeom>
+          <a:noFill/>
+        </p:spPr>
+        <p:txBody>
+          <a:bodyPr wrap="square">
+            <a:spAutoFit/>
+          </a:bodyPr>
+          <a:lstStyle/>
+          <a:p>
+            <a:pPr algn="r"/>
+            <a:r>
+              <a:rPr sz="1100" b="0" i="0">
+                <a:solidFill>
+                  <a:srgbClr val="9FB0AE"/>
+                </a:solidFill>
+                <a:latin typeface="Calibri"/>
+              </a:rPr>
+              <a:t>6/7</a:t>
             </a:r>
           </a:p>
         </p:txBody>
@@ -5560,7 +6982,199 @@
         </p:nvSpPr>
         <p:spPr>
           <a:xfrm>
-            <a:off x="548640" y="457200"/>
+            <a:off x="-2743200" y="-2743200"/>
+            <a:ext cx="8229600" cy="8229600"/>
+          </a:xfrm>
+          <a:prstGeom prst="ellipse">
+            <a:avLst/>
+          </a:prstGeom>
+          <a:solidFill>
+            <a:srgbClr val="142B42"/>
+          </a:solidFill>
+          <a:ln>
+            <a:noFill/>
+          </a:ln>
+          <a:effectLst/>
+        </p:spPr>
+        <p:style>
+          <a:lnRef idx="1">
+            <a:schemeClr val="accent1"/>
+          </a:lnRef>
+          <a:fillRef idx="3">
+            <a:schemeClr val="accent1"/>
+          </a:fillRef>
+          <a:effectRef idx="2">
+            <a:schemeClr val="accent1"/>
+          </a:effectRef>
+          <a:fontRef idx="minor">
+            <a:schemeClr val="lt1"/>
+          </a:fontRef>
+        </p:style>
+        <p:txBody>
+          <a:bodyPr rtlCol="0" anchor="ctr"/>
+          <a:lstStyle/>
+          <a:p>
+            <a:pPr algn="ctr"/>
+          </a:p>
+        </p:txBody>
+      </p:sp>
+      <p:sp>
+        <p:nvSpPr>
+          <p:cNvPr id="4" name="Oval 3"/>
+          <p:cNvSpPr/>
+          <p:nvPr/>
+        </p:nvSpPr>
+        <p:spPr>
+          <a:xfrm>
+            <a:off x="9601200" y="4114800"/>
+            <a:ext cx="5486400" cy="5486400"/>
+          </a:xfrm>
+          <a:prstGeom prst="ellipse">
+            <a:avLst/>
+          </a:prstGeom>
+          <a:solidFill>
+            <a:srgbClr val="142B42"/>
+          </a:solidFill>
+          <a:ln>
+            <a:noFill/>
+          </a:ln>
+          <a:effectLst/>
+        </p:spPr>
+        <p:style>
+          <a:lnRef idx="1">
+            <a:schemeClr val="accent1"/>
+          </a:lnRef>
+          <a:fillRef idx="3">
+            <a:schemeClr val="accent1"/>
+          </a:fillRef>
+          <a:effectRef idx="2">
+            <a:schemeClr val="accent1"/>
+          </a:effectRef>
+          <a:fontRef idx="minor">
+            <a:schemeClr val="lt1"/>
+          </a:fontRef>
+        </p:style>
+        <p:txBody>
+          <a:bodyPr rtlCol="0" anchor="ctr"/>
+          <a:lstStyle/>
+          <a:p>
+            <a:pPr algn="ctr"/>
+          </a:p>
+        </p:txBody>
+      </p:sp>
+      <p:sp>
+        <p:nvSpPr>
+          <p:cNvPr id="5" name="Rounded Rectangle 4"/>
+          <p:cNvSpPr/>
+          <p:nvPr/>
+        </p:nvSpPr>
+        <p:spPr>
+          <a:xfrm>
+            <a:off x="502920" y="365760"/>
+            <a:ext cx="384048" cy="384048"/>
+          </a:xfrm>
+          <a:prstGeom prst="roundRect">
+            <a:avLst>
+              <a:gd name="adj" fmla="val 28000"/>
+            </a:avLst>
+          </a:prstGeom>
+          <a:solidFill>
+            <a:srgbClr val="FFFFFF"/>
+          </a:solidFill>
+          <a:ln>
+            <a:noFill/>
+          </a:ln>
+          <a:effectLst/>
+        </p:spPr>
+        <p:style>
+          <a:lnRef idx="1">
+            <a:schemeClr val="accent1"/>
+          </a:lnRef>
+          <a:fillRef idx="3">
+            <a:schemeClr val="accent1"/>
+          </a:fillRef>
+          <a:effectRef idx="2">
+            <a:schemeClr val="accent1"/>
+          </a:effectRef>
+          <a:fontRef idx="minor">
+            <a:schemeClr val="lt1"/>
+          </a:fontRef>
+        </p:style>
+        <p:txBody>
+          <a:bodyPr rtlCol="0" anchor="ctr"/>
+          <a:lstStyle/>
+          <a:p>
+            <a:pPr algn="ctr"/>
+          </a:p>
+        </p:txBody>
+      </p:sp>
+      <p:pic>
+        <p:nvPicPr>
+          <p:cNvPr id="6" name="Picture 5" descr="logo-icon.png"/>
+          <p:cNvPicPr>
+            <a:picLocks noChangeAspect="1"/>
+          </p:cNvPicPr>
+          <p:nvPr/>
+        </p:nvPicPr>
+        <p:blipFill>
+          <a:blip r:embed="rId2"/>
+          <a:stretch>
+            <a:fillRect/>
+          </a:stretch>
+        </p:blipFill>
+        <p:spPr>
+          <a:xfrm>
+            <a:off x="557784" y="420624"/>
+            <a:ext cx="383084" cy="274320"/>
+          </a:xfrm>
+          <a:prstGeom prst="rect">
+            <a:avLst/>
+          </a:prstGeom>
+        </p:spPr>
+      </p:pic>
+      <p:sp>
+        <p:nvSpPr>
+          <p:cNvPr id="7" name="TextBox 6"/>
+          <p:cNvSpPr txBox="1"/>
+          <p:nvPr/>
+        </p:nvSpPr>
+        <p:spPr>
+          <a:xfrm>
+            <a:off x="987552" y="384048"/>
+            <a:ext cx="3657600" cy="365760"/>
+          </a:xfrm>
+          <a:prstGeom prst="rect">
+            <a:avLst/>
+          </a:prstGeom>
+          <a:noFill/>
+        </p:spPr>
+        <p:txBody>
+          <a:bodyPr wrap="none">
+            <a:spAutoFit/>
+          </a:bodyPr>
+          <a:lstStyle/>
+          <a:p>
+            <a:r>
+              <a:rPr sz="1100" b="1">
+                <a:solidFill>
+                  <a:srgbClr val="9FB0AE"/>
+                </a:solidFill>
+                <a:latin typeface="Calibri"/>
+              </a:rPr>
+              <a:t>REACTIVA TERRITORIO</a:t>
+            </a:r>
+          </a:p>
+        </p:txBody>
+      </p:sp>
+      <p:sp>
+        <p:nvSpPr>
+          <p:cNvPr id="8" name="Oval 7"/>
+          <p:cNvSpPr/>
+          <p:nvPr/>
+        </p:nvSpPr>
+        <p:spPr>
+          <a:xfrm>
+            <a:off x="548640" y="1143000"/>
             <a:ext cx="365760" cy="365760"/>
           </a:xfrm>
           <a:prstGeom prst="ellipse">
@@ -5572,6 +7186,7 @@
           <a:ln>
             <a:noFill/>
           </a:ln>
+          <a:effectLst/>
         </p:spPr>
         <p:style>
           <a:lnRef idx="1">
@@ -5605,13 +7220,13 @@
       </p:sp>
       <p:sp>
         <p:nvSpPr>
-          <p:cNvPr id="4" name="TextBox 3"/>
+          <p:cNvPr id="9" name="TextBox 8"/>
           <p:cNvSpPr txBox="1"/>
           <p:nvPr/>
         </p:nvSpPr>
         <p:spPr>
           <a:xfrm>
-            <a:off x="1051560" y="475488"/>
+            <a:off x="1051560" y="1161288"/>
             <a:ext cx="5486400" cy="365760"/>
           </a:xfrm>
           <a:prstGeom prst="rect">
@@ -5627,7 +7242,7 @@
           <a:p>
             <a:pPr algn="l"/>
             <a:r>
-              <a:rPr sz="1300" b="1">
+              <a:rPr sz="1300" b="1" i="0">
                 <a:solidFill>
                   <a:srgbClr val="14B8A8"/>
                 </a:solidFill>
@@ -5640,13 +7255,13 @@
       </p:sp>
       <p:sp>
         <p:nvSpPr>
-          <p:cNvPr id="5" name="TextBox 4"/>
+          <p:cNvPr id="10" name="TextBox 9"/>
           <p:cNvSpPr txBox="1"/>
           <p:nvPr/>
         </p:nvSpPr>
         <p:spPr>
           <a:xfrm>
-            <a:off x="548640" y="1005840"/>
+            <a:off x="548640" y="1691640"/>
             <a:ext cx="10515600" cy="1097280"/>
           </a:xfrm>
           <a:prstGeom prst="rect">
@@ -5662,7 +7277,7 @@
           <a:p>
             <a:pPr algn="l"/>
             <a:r>
-              <a:rPr sz="3400" b="1">
+              <a:rPr sz="3300" b="1" i="0">
                 <a:solidFill>
                   <a:srgbClr val="FFFFFF"/>
                 </a:solidFill>
@@ -5675,13 +7290,13 @@
       </p:sp>
       <p:sp>
         <p:nvSpPr>
-          <p:cNvPr id="6" name="TextBox 5"/>
+          <p:cNvPr id="11" name="TextBox 10"/>
           <p:cNvSpPr txBox="1"/>
           <p:nvPr/>
         </p:nvSpPr>
         <p:spPr>
           <a:xfrm>
-            <a:off x="548640" y="1920240"/>
+            <a:off x="548640" y="2606040"/>
             <a:ext cx="9601200" cy="731520"/>
           </a:xfrm>
           <a:prstGeom prst="rect">
@@ -5697,7 +7312,7 @@
           <a:p>
             <a:pPr algn="l"/>
             <a:r>
-              <a:rPr sz="1700" b="0">
+              <a:rPr sz="1600" b="0" i="0">
                 <a:solidFill>
                   <a:srgbClr val="9FB0AE"/>
                 </a:solidFill>
@@ -5710,13 +7325,13 @@
       </p:sp>
       <p:sp>
         <p:nvSpPr>
-          <p:cNvPr id="7" name="TextBox 6"/>
+          <p:cNvPr id="12" name="TextBox 11"/>
           <p:cNvSpPr txBox="1"/>
           <p:nvPr/>
         </p:nvSpPr>
         <p:spPr>
           <a:xfrm>
-            <a:off x="548640" y="3017520"/>
+            <a:off x="548640" y="3566160"/>
             <a:ext cx="2468880" cy="640080"/>
           </a:xfrm>
           <a:prstGeom prst="rect">
@@ -5732,7 +7347,7 @@
           <a:p>
             <a:pPr algn="l"/>
             <a:r>
-              <a:rPr sz="2600" b="1">
+              <a:rPr sz="2600" b="1" i="0">
                 <a:solidFill>
                   <a:srgbClr val="FFFFFF"/>
                 </a:solidFill>
@@ -5745,13 +7360,13 @@
       </p:sp>
       <p:sp>
         <p:nvSpPr>
-          <p:cNvPr id="8" name="TextBox 7"/>
+          <p:cNvPr id="13" name="TextBox 12"/>
           <p:cNvSpPr txBox="1"/>
           <p:nvPr/>
         </p:nvSpPr>
         <p:spPr>
           <a:xfrm>
-            <a:off x="548640" y="3611880"/>
+            <a:off x="548640" y="4160520"/>
             <a:ext cx="2468880" cy="822960"/>
           </a:xfrm>
           <a:prstGeom prst="rect">
@@ -5765,9 +7380,8 @@
           </a:bodyPr>
           <a:lstStyle/>
           <a:p>
-            <a:pPr algn="l"/>
-            <a:r>
-              <a:rPr sz="1200" b="0">
+            <a:r>
+              <a:rPr sz="1200">
                 <a:solidFill>
                   <a:srgbClr val="9FB0AE"/>
                 </a:solidFill>
@@ -5780,13 +7394,13 @@
       </p:sp>
       <p:sp>
         <p:nvSpPr>
-          <p:cNvPr id="9" name="TextBox 8"/>
+          <p:cNvPr id="14" name="TextBox 13"/>
           <p:cNvSpPr txBox="1"/>
           <p:nvPr/>
         </p:nvSpPr>
         <p:spPr>
           <a:xfrm>
-            <a:off x="3200400" y="3017520"/>
+            <a:off x="3200400" y="3566160"/>
             <a:ext cx="2468880" cy="640080"/>
           </a:xfrm>
           <a:prstGeom prst="rect">
@@ -5802,7 +7416,7 @@
           <a:p>
             <a:pPr algn="l"/>
             <a:r>
-              <a:rPr sz="2600" b="1">
+              <a:rPr sz="2600" b="1" i="0">
                 <a:solidFill>
                   <a:srgbClr val="FFFFFF"/>
                 </a:solidFill>
@@ -5815,13 +7429,13 @@
       </p:sp>
       <p:sp>
         <p:nvSpPr>
-          <p:cNvPr id="10" name="TextBox 9"/>
+          <p:cNvPr id="15" name="TextBox 14"/>
           <p:cNvSpPr txBox="1"/>
           <p:nvPr/>
         </p:nvSpPr>
         <p:spPr>
           <a:xfrm>
-            <a:off x="3200400" y="3611880"/>
+            <a:off x="3200400" y="4160520"/>
             <a:ext cx="2468880" cy="822960"/>
           </a:xfrm>
           <a:prstGeom prst="rect">
@@ -5835,9 +7449,8 @@
           </a:bodyPr>
           <a:lstStyle/>
           <a:p>
-            <a:pPr algn="l"/>
-            <a:r>
-              <a:rPr sz="1200" b="0">
+            <a:r>
+              <a:rPr sz="1200">
                 <a:solidFill>
                   <a:srgbClr val="9FB0AE"/>
                 </a:solidFill>
@@ -5850,13 +7463,13 @@
       </p:sp>
       <p:sp>
         <p:nvSpPr>
-          <p:cNvPr id="11" name="TextBox 10"/>
+          <p:cNvPr id="16" name="TextBox 15"/>
           <p:cNvSpPr txBox="1"/>
           <p:nvPr/>
         </p:nvSpPr>
         <p:spPr>
           <a:xfrm>
-            <a:off x="5852159" y="3017520"/>
+            <a:off x="5852159" y="3566160"/>
             <a:ext cx="2468880" cy="640080"/>
           </a:xfrm>
           <a:prstGeom prst="rect">
@@ -5872,7 +7485,7 @@
           <a:p>
             <a:pPr algn="l"/>
             <a:r>
-              <a:rPr sz="2600" b="1">
+              <a:rPr sz="2600" b="1" i="0">
                 <a:solidFill>
                   <a:srgbClr val="FFFFFF"/>
                 </a:solidFill>
@@ -5885,13 +7498,13 @@
       </p:sp>
       <p:sp>
         <p:nvSpPr>
-          <p:cNvPr id="12" name="TextBox 11"/>
+          <p:cNvPr id="17" name="TextBox 16"/>
           <p:cNvSpPr txBox="1"/>
           <p:nvPr/>
         </p:nvSpPr>
         <p:spPr>
           <a:xfrm>
-            <a:off x="5852159" y="3611880"/>
+            <a:off x="5852159" y="4160520"/>
             <a:ext cx="2468880" cy="822960"/>
           </a:xfrm>
           <a:prstGeom prst="rect">
@@ -5905,9 +7518,8 @@
           </a:bodyPr>
           <a:lstStyle/>
           <a:p>
-            <a:pPr algn="l"/>
-            <a:r>
-              <a:rPr sz="1200" b="0">
+            <a:r>
+              <a:rPr sz="1200">
                 <a:solidFill>
                   <a:srgbClr val="9FB0AE"/>
                 </a:solidFill>
@@ -5920,13 +7532,13 @@
       </p:sp>
       <p:sp>
         <p:nvSpPr>
-          <p:cNvPr id="13" name="TextBox 12"/>
+          <p:cNvPr id="18" name="TextBox 17"/>
           <p:cNvSpPr txBox="1"/>
           <p:nvPr/>
         </p:nvSpPr>
         <p:spPr>
           <a:xfrm>
-            <a:off x="8503919" y="3017520"/>
+            <a:off x="8503919" y="3566160"/>
             <a:ext cx="2468880" cy="640080"/>
           </a:xfrm>
           <a:prstGeom prst="rect">
@@ -5942,7 +7554,7 @@
           <a:p>
             <a:pPr algn="l"/>
             <a:r>
-              <a:rPr sz="2600" b="1">
+              <a:rPr sz="2600" b="1" i="0">
                 <a:solidFill>
                   <a:srgbClr val="FFFFFF"/>
                 </a:solidFill>
@@ -5955,13 +7567,13 @@
       </p:sp>
       <p:sp>
         <p:nvSpPr>
-          <p:cNvPr id="14" name="TextBox 13"/>
+          <p:cNvPr id="19" name="TextBox 18"/>
           <p:cNvSpPr txBox="1"/>
           <p:nvPr/>
         </p:nvSpPr>
         <p:spPr>
           <a:xfrm>
-            <a:off x="8503919" y="3611880"/>
+            <a:off x="8503919" y="4160520"/>
             <a:ext cx="2468880" cy="822960"/>
           </a:xfrm>
           <a:prstGeom prst="rect">
@@ -5975,9 +7587,8 @@
           </a:bodyPr>
           <a:lstStyle/>
           <a:p>
-            <a:pPr algn="l"/>
-            <a:r>
-              <a:rPr sz="1200" b="0">
+            <a:r>
+              <a:rPr sz="1200">
                 <a:solidFill>
                   <a:srgbClr val="9FB0AE"/>
                 </a:solidFill>
@@ -5990,17 +7601,19 @@
       </p:sp>
       <p:sp>
         <p:nvSpPr>
-          <p:cNvPr id="15" name="Rounded Rectangle 14"/>
+          <p:cNvPr id="20" name="Rounded Rectangle 19"/>
           <p:cNvSpPr/>
           <p:nvPr/>
         </p:nvSpPr>
         <p:spPr>
           <a:xfrm>
-            <a:off x="548640" y="4663440"/>
-            <a:ext cx="9601200" cy="1005840"/>
+            <a:off x="548640" y="5257800"/>
+            <a:ext cx="9875520" cy="1051560"/>
           </a:xfrm>
           <a:prstGeom prst="roundRect">
-            <a:avLst/>
+            <a:avLst>
+              <a:gd name="adj" fmla="val 8000"/>
+            </a:avLst>
           </a:prstGeom>
           <a:solidFill>
             <a:srgbClr val="162A47"/>
@@ -6010,6 +7623,7 @@
               <a:srgbClr val="273C5C"/>
             </a:solidFill>
           </a:ln>
+          <a:effectLst/>
         </p:spPr>
         <p:style>
           <a:lnRef idx="1">
@@ -6043,13 +7657,48 @@
           <a:p>
             <a:pPr algn="ctr"/>
             <a:r>
-              <a:rPr sz="1500">
+              <a:rPr sz="1450">
                 <a:solidFill>
                   <a:srgbClr val="9FB0AE"/>
                 </a:solidFill>
                 <a:latin typeface="Calibri"/>
               </a:rPr>
               <a:t>guillermonieto.2003@gmail.com   ·   WhatsApp +57 313 389 8628</a:t>
+            </a:r>
+          </a:p>
+        </p:txBody>
+      </p:sp>
+      <p:sp>
+        <p:nvSpPr>
+          <p:cNvPr id="21" name="TextBox 20"/>
+          <p:cNvSpPr txBox="1"/>
+          <p:nvPr/>
+        </p:nvSpPr>
+        <p:spPr>
+          <a:xfrm>
+            <a:off x="11247120" y="6446520"/>
+            <a:ext cx="731520" cy="320040"/>
+          </a:xfrm>
+          <a:prstGeom prst="rect">
+            <a:avLst/>
+          </a:prstGeom>
+          <a:noFill/>
+        </p:spPr>
+        <p:txBody>
+          <a:bodyPr wrap="square">
+            <a:spAutoFit/>
+          </a:bodyPr>
+          <a:lstStyle/>
+          <a:p>
+            <a:pPr algn="r"/>
+            <a:r>
+              <a:rPr sz="1100" b="0" i="0">
+                <a:solidFill>
+                  <a:srgbClr val="9FB0AE"/>
+                </a:solidFill>
+                <a:latin typeface="Calibri"/>
+              </a:rPr>
+              <a:t>7/7</a:t>
             </a:r>
           </a:p>
         </p:txBody>

--- a/docs/slides.pptx
+++ b/docs/slides.pptx
@@ -12,6 +12,8 @@
     <p:sldId id="260" r:id="rId11"/>
     <p:sldId id="261" r:id="rId12"/>
     <p:sldId id="262" r:id="rId13"/>
+    <p:sldId id="263" r:id="rId14"/>
+    <p:sldId id="264" r:id="rId15"/>
   </p:sldIdLst>
   <p:sldSz cx="12191695" cy="6858000" type="screen4x3"/>
   <p:notesSz cx="6858000" cy="9144000"/>
@@ -111,6 +113,354 @@
     </a:lvl9pPr>
   </p:defaultTextStyle>
 </p:presentation>
+</file>
+
+<file path=ppt/charts/chart1.xml><?xml version="1.0" encoding="utf-8"?>
+<c:chartSpace xmlns:c="http://schemas.openxmlformats.org/drawingml/2006/chart" xmlns:a="http://schemas.openxmlformats.org/drawingml/2006/main" xmlns:r="http://schemas.openxmlformats.org/officeDocument/2006/relationships">
+  <c:date1904 val="0"/>
+  <c:chart>
+    <c:title>
+      <c:tx>
+        <c:rich>
+          <a:bodyPr/>
+          <a:lstStyle/>
+          <a:p>
+            <a:r>
+              <a:rPr sz="1200">
+                <a:solidFill>
+                  <a:srgbClr val="FFFFFF"/>
+                </a:solidFill>
+              </a:rPr>
+              <a:t>Casos reales por estado (19 casos, 10 municipios)</a:t>
+            </a:r>
+          </a:p>
+        </c:rich>
+      </c:tx>
+      <c:layout/>
+      <c:overlay val="0"/>
+    </c:title>
+    <c:autoTitleDeleted val="0"/>
+    <c:plotArea>
+      <c:barChart>
+        <c:barDir val="col"/>
+        <c:grouping val="clustered"/>
+        <c:ser>
+          <c:idx val="0"/>
+          <c:order val="0"/>
+          <c:tx>
+            <c:strRef>
+              <c:f>Sheet1!$B$1</c:f>
+              <c:strCache>
+                <c:ptCount val="1"/>
+                <c:pt idx="0">
+                  <c:v>Casos</c:v>
+                </c:pt>
+              </c:strCache>
+            </c:strRef>
+          </c:tx>
+          <c:spPr>
+            <a:solidFill>
+              <a:srgbClr val="14B8A8"/>
+            </a:solidFill>
+          </c:spPr>
+          <c:cat>
+            <c:strRef>
+              <c:f>Sheet1!$A$2:$A$5</c:f>
+              <c:strCache>
+                <c:ptCount val="4"/>
+                <c:pt idx="0">
+                  <c:v>Pendiente</c:v>
+                </c:pt>
+                <c:pt idx="1">
+                  <c:v>En verificación</c:v>
+                </c:pt>
+                <c:pt idx="2">
+                  <c:v>Verificado</c:v>
+                </c:pt>
+                <c:pt idx="3">
+                  <c:v>Atendido</c:v>
+                </c:pt>
+              </c:strCache>
+            </c:strRef>
+          </c:cat>
+          <c:val>
+            <c:numRef>
+              <c:f>Sheet1!$B$2:$B$5</c:f>
+              <c:numCache>
+                <c:formatCode>General</c:formatCode>
+                <c:ptCount val="4"/>
+                <c:pt idx="0">
+                  <c:v>5</c:v>
+                </c:pt>
+                <c:pt idx="1">
+                  <c:v>3</c:v>
+                </c:pt>
+                <c:pt idx="2">
+                  <c:v>5</c:v>
+                </c:pt>
+                <c:pt idx="3">
+                  <c:v>6</c:v>
+                </c:pt>
+              </c:numCache>
+            </c:numRef>
+          </c:val>
+        </c:ser>
+        <c:dLbls>
+          <c:txPr>
+            <a:bodyPr/>
+            <a:lstStyle/>
+            <a:p>
+              <a:pPr>
+                <a:defRPr sz="1200">
+                  <a:solidFill>
+                    <a:srgbClr val="FFFFFF"/>
+                  </a:solidFill>
+                </a:defRPr>
+              </a:pPr>
+            </a:p>
+          </c:txPr>
+          <c:showLegendKey val="0"/>
+          <c:showVal val="1"/>
+          <c:showCatName val="0"/>
+          <c:showSerName val="0"/>
+          <c:showPercent val="0"/>
+          <c:showBubbleSize val="0"/>
+          <c:showLeaderLines val="1"/>
+        </c:dLbls>
+        <c:axId val="-2068027336"/>
+        <c:axId val="-2113994440"/>
+      </c:barChart>
+      <c:catAx>
+        <c:axId val="-2068027336"/>
+        <c:scaling>
+          <c:orientation val="minMax"/>
+        </c:scaling>
+        <c:delete val="0"/>
+        <c:axPos val="b"/>
+        <c:majorTickMark val="out"/>
+        <c:minorTickMark val="none"/>
+        <c:tickLblPos val="nextTo"/>
+        <c:spPr>
+          <a:ln>
+            <a:solidFill>
+              <a:srgbClr val="273C5C"/>
+            </a:solidFill>
+          </a:ln>
+        </c:spPr>
+        <c:txPr>
+          <a:bodyPr/>
+          <a:lstStyle/>
+          <a:p>
+            <a:pPr>
+              <a:defRPr sz="1100">
+                <a:solidFill>
+                  <a:srgbClr val="9FB0AE"/>
+                </a:solidFill>
+              </a:defRPr>
+            </a:pPr>
+          </a:p>
+        </c:txPr>
+        <c:crossAx val="-2113994440"/>
+        <c:crosses val="autoZero"/>
+        <c:auto val="1"/>
+        <c:lblAlgn val="ctr"/>
+        <c:lblOffset val="100"/>
+        <c:noMultiLvlLbl val="0"/>
+      </c:catAx>
+      <c:valAx>
+        <c:axId val="-2113994440"/>
+        <c:scaling/>
+        <c:delete/>
+        <c:axPos val="l"/>
+        <c:majorTickMark val="out"/>
+        <c:minorTickMark val="none"/>
+        <c:tickLblPos val="nextTo"/>
+        <c:crossAx val="-2068027336"/>
+        <c:crosses val="autoZero"/>
+      </c:valAx>
+    </c:plotArea>
+    <c:dispBlanksAs val="gap"/>
+  </c:chart>
+  <c:txPr>
+    <a:bodyPr/>
+    <a:lstStyle/>
+    <a:p>
+      <a:pPr>
+        <a:defRPr sz="1800"/>
+      </a:pPr>
+      <a:endParaRPr lang="en-US"/>
+    </a:p>
+  </c:txPr>
+  <c:externalData r:id="rId1">
+    <c:autoUpdate val="0"/>
+  </c:externalData>
+</c:chartSpace>
+</file>
+
+<file path=ppt/charts/chart2.xml><?xml version="1.0" encoding="utf-8"?>
+<c:chartSpace xmlns:c="http://schemas.openxmlformats.org/drawingml/2006/chart" xmlns:a="http://schemas.openxmlformats.org/drawingml/2006/main" xmlns:r="http://schemas.openxmlformats.org/officeDocument/2006/relationships">
+  <c:date1904 val="0"/>
+  <c:chart>
+    <c:autoTitleDeleted val="1"/>
+    <c:plotArea>
+      <c:barChart>
+        <c:barDir val="col"/>
+        <c:grouping val="clustered"/>
+        <c:ser>
+          <c:idx val="0"/>
+          <c:order val="0"/>
+          <c:tx>
+            <c:strRef>
+              <c:f>Sheet1!$B$1</c:f>
+              <c:strCache>
+                <c:ptCount val="1"/>
+                <c:pt idx="0">
+                  <c:v>Metas del piloto</c:v>
+                </c:pt>
+              </c:strCache>
+            </c:strRef>
+          </c:tx>
+          <c:spPr>
+            <a:solidFill>
+              <a:srgbClr val="F5A623"/>
+            </a:solidFill>
+          </c:spPr>
+          <c:cat>
+            <c:strRef>
+              <c:f>Sheet1!$A$2:$A$5</c:f>
+              <c:strCache>
+                <c:ptCount val="4"/>
+                <c:pt idx="0">
+                  <c:v>Unidades
+productivas</c:v>
+                </c:pt>
+                <c:pt idx="1">
+                  <c:v>% Casos
+verificados</c:v>
+                </c:pt>
+                <c:pt idx="2">
+                  <c:v>Negocios
+reactivados</c:v>
+                </c:pt>
+                <c:pt idx="3">
+                  <c:v>Oportunidades
+laborales</c:v>
+                </c:pt>
+              </c:strCache>
+            </c:strRef>
+          </c:cat>
+          <c:val>
+            <c:numRef>
+              <c:f>Sheet1!$B$2:$B$5</c:f>
+              <c:numCache>
+                <c:formatCode>General</c:formatCode>
+                <c:ptCount val="4"/>
+                <c:pt idx="0">
+                  <c:v>500</c:v>
+                </c:pt>
+                <c:pt idx="1">
+                  <c:v>80</c:v>
+                </c:pt>
+                <c:pt idx="2">
+                  <c:v>100</c:v>
+                </c:pt>
+                <c:pt idx="3">
+                  <c:v>150</c:v>
+                </c:pt>
+              </c:numCache>
+            </c:numRef>
+          </c:val>
+        </c:ser>
+        <c:dLbls>
+          <c:txPr>
+            <a:bodyPr/>
+            <a:lstStyle/>
+            <a:p>
+              <a:pPr>
+                <a:defRPr sz="1300" b="1">
+                  <a:solidFill>
+                    <a:srgbClr val="FFFFFF"/>
+                  </a:solidFill>
+                </a:defRPr>
+              </a:pPr>
+            </a:p>
+          </c:txPr>
+          <c:showLegendKey val="0"/>
+          <c:showVal val="1"/>
+          <c:showCatName val="0"/>
+          <c:showSerName val="0"/>
+          <c:showPercent val="0"/>
+          <c:showBubbleSize val="0"/>
+          <c:showLeaderLines val="1"/>
+        </c:dLbls>
+        <c:axId val="-2068027336"/>
+        <c:axId val="-2113994440"/>
+      </c:barChart>
+      <c:catAx>
+        <c:axId val="-2068027336"/>
+        <c:scaling>
+          <c:orientation val="minMax"/>
+        </c:scaling>
+        <c:delete val="0"/>
+        <c:axPos val="b"/>
+        <c:majorTickMark val="out"/>
+        <c:minorTickMark val="none"/>
+        <c:tickLblPos val="nextTo"/>
+        <c:spPr>
+          <a:ln>
+            <a:solidFill>
+              <a:srgbClr val="273C5C"/>
+            </a:solidFill>
+          </a:ln>
+        </c:spPr>
+        <c:txPr>
+          <a:bodyPr/>
+          <a:lstStyle/>
+          <a:p>
+            <a:pPr>
+              <a:defRPr sz="1050">
+                <a:solidFill>
+                  <a:srgbClr val="9FB0AE"/>
+                </a:solidFill>
+              </a:defRPr>
+            </a:pPr>
+          </a:p>
+        </c:txPr>
+        <c:crossAx val="-2113994440"/>
+        <c:crosses val="autoZero"/>
+        <c:auto val="1"/>
+        <c:lblAlgn val="ctr"/>
+        <c:lblOffset val="100"/>
+        <c:noMultiLvlLbl val="0"/>
+      </c:catAx>
+      <c:valAx>
+        <c:axId val="-2113994440"/>
+        <c:scaling/>
+        <c:delete/>
+        <c:axPos val="l"/>
+        <c:majorTickMark val="out"/>
+        <c:minorTickMark val="none"/>
+        <c:tickLblPos val="nextTo"/>
+        <c:crossAx val="-2068027336"/>
+        <c:crosses val="autoZero"/>
+      </c:valAx>
+    </c:plotArea>
+    <c:dispBlanksAs val="gap"/>
+  </c:chart>
+  <c:txPr>
+    <a:bodyPr/>
+    <a:lstStyle/>
+    <a:p>
+      <a:pPr>
+        <a:defRPr sz="1800"/>
+      </a:pPr>
+      <a:endParaRPr lang="en-US"/>
+    </a:p>
+  </c:txPr>
+  <c:externalData r:id="rId1">
+    <c:autoUpdate val="0"/>
+  </c:externalData>
+</c:chartSpace>
 </file>
 
 <file path=ppt/slideLayouts/slideLayout1.xml><?xml version="1.0" encoding="utf-8"?>
@@ -3094,141 +3444,9 @@
         <p:nvPr/>
       </p:nvGrpSpPr>
       <p:grpSpPr/>
-      <p:sp>
-        <p:nvSpPr>
-          <p:cNvPr id="2" name="Rectangle 1"/>
-          <p:cNvSpPr/>
-          <p:nvPr/>
-        </p:nvSpPr>
-        <p:spPr>
-          <a:xfrm>
-            <a:off x="0" y="0"/>
-            <a:ext cx="12191695" cy="6858000"/>
-          </a:xfrm>
-          <a:prstGeom prst="rect">
-            <a:avLst/>
-          </a:prstGeom>
-          <a:solidFill>
-            <a:srgbClr val="0B1626"/>
-          </a:solidFill>
-          <a:ln>
-            <a:noFill/>
-          </a:ln>
-          <a:effectLst/>
-        </p:spPr>
-        <p:style>
-          <a:lnRef idx="1">
-            <a:schemeClr val="accent1"/>
-          </a:lnRef>
-          <a:fillRef idx="3">
-            <a:schemeClr val="accent1"/>
-          </a:fillRef>
-          <a:effectRef idx="2">
-            <a:schemeClr val="accent1"/>
-          </a:effectRef>
-          <a:fontRef idx="minor">
-            <a:schemeClr val="lt1"/>
-          </a:fontRef>
-        </p:style>
-        <p:txBody>
-          <a:bodyPr rtlCol="0" anchor="ctr"/>
-          <a:lstStyle/>
-          <a:p>
-            <a:pPr algn="ctr"/>
-          </a:p>
-        </p:txBody>
-      </p:sp>
-      <p:sp>
-        <p:nvSpPr>
-          <p:cNvPr id="3" name="Oval 2"/>
-          <p:cNvSpPr/>
-          <p:nvPr/>
-        </p:nvSpPr>
-        <p:spPr>
-          <a:xfrm>
-            <a:off x="-2743200" y="-2743200"/>
-            <a:ext cx="8229600" cy="8229600"/>
-          </a:xfrm>
-          <a:prstGeom prst="ellipse">
-            <a:avLst/>
-          </a:prstGeom>
-          <a:solidFill>
-            <a:srgbClr val="142B42"/>
-          </a:solidFill>
-          <a:ln>
-            <a:noFill/>
-          </a:ln>
-          <a:effectLst/>
-        </p:spPr>
-        <p:style>
-          <a:lnRef idx="1">
-            <a:schemeClr val="accent1"/>
-          </a:lnRef>
-          <a:fillRef idx="3">
-            <a:schemeClr val="accent1"/>
-          </a:fillRef>
-          <a:effectRef idx="2">
-            <a:schemeClr val="accent1"/>
-          </a:effectRef>
-          <a:fontRef idx="minor">
-            <a:schemeClr val="lt1"/>
-          </a:fontRef>
-        </p:style>
-        <p:txBody>
-          <a:bodyPr rtlCol="0" anchor="ctr"/>
-          <a:lstStyle/>
-          <a:p>
-            <a:pPr algn="ctr"/>
-          </a:p>
-        </p:txBody>
-      </p:sp>
-      <p:sp>
-        <p:nvSpPr>
-          <p:cNvPr id="4" name="Oval 3"/>
-          <p:cNvSpPr/>
-          <p:nvPr/>
-        </p:nvSpPr>
-        <p:spPr>
-          <a:xfrm>
-            <a:off x="9601200" y="4114800"/>
-            <a:ext cx="5486400" cy="5486400"/>
-          </a:xfrm>
-          <a:prstGeom prst="ellipse">
-            <a:avLst/>
-          </a:prstGeom>
-          <a:solidFill>
-            <a:srgbClr val="142B42"/>
-          </a:solidFill>
-          <a:ln>
-            <a:noFill/>
-          </a:ln>
-          <a:effectLst/>
-        </p:spPr>
-        <p:style>
-          <a:lnRef idx="1">
-            <a:schemeClr val="accent1"/>
-          </a:lnRef>
-          <a:fillRef idx="3">
-            <a:schemeClr val="accent1"/>
-          </a:fillRef>
-          <a:effectRef idx="2">
-            <a:schemeClr val="accent1"/>
-          </a:effectRef>
-          <a:fontRef idx="minor">
-            <a:schemeClr val="lt1"/>
-          </a:fontRef>
-        </p:style>
-        <p:txBody>
-          <a:bodyPr rtlCol="0" anchor="ctr"/>
-          <a:lstStyle/>
-          <a:p>
-            <a:pPr algn="ctr"/>
-          </a:p>
-        </p:txBody>
-      </p:sp>
       <p:pic>
         <p:nvPicPr>
-          <p:cNvPr id="5" name="Picture 4" descr="logo-icon.png"/>
+          <p:cNvPr id="2" name="Picture 1" descr="sismo-1.jpg"/>
           <p:cNvPicPr>
             <a:picLocks noChangeAspect="1"/>
           </p:cNvPicPr>
@@ -3242,8 +3460,124 @@
         </p:blipFill>
         <p:spPr>
           <a:xfrm>
-            <a:off x="777240" y="822960"/>
-            <a:ext cx="1276945" cy="914400"/>
+            <a:off x="0" y="-634898"/>
+            <a:ext cx="12191695" cy="8127796"/>
+          </a:xfrm>
+          <a:prstGeom prst="rect">
+            <a:avLst/>
+          </a:prstGeom>
+        </p:spPr>
+      </p:pic>
+      <p:sp>
+        <p:nvSpPr>
+          <p:cNvPr id="3" name="Rectangle 2"/>
+          <p:cNvSpPr/>
+          <p:nvPr/>
+        </p:nvSpPr>
+        <p:spPr>
+          <a:xfrm>
+            <a:off x="0" y="0"/>
+            <a:ext cx="12191695" cy="6858000"/>
+          </a:xfrm>
+          <a:prstGeom prst="rect">
+            <a:avLst/>
+          </a:prstGeom>
+          <a:solidFill>
+            <a:srgbClr val="08101C">
+              <a:alpha val="58000"/>
+            </a:srgbClr>
+          </a:solidFill>
+          <a:ln>
+            <a:noFill/>
+          </a:ln>
+          <a:effectLst/>
+        </p:spPr>
+        <p:style>
+          <a:lnRef idx="1">
+            <a:schemeClr val="accent1"/>
+          </a:lnRef>
+          <a:fillRef idx="3">
+            <a:schemeClr val="accent1"/>
+          </a:fillRef>
+          <a:effectRef idx="2">
+            <a:schemeClr val="accent1"/>
+          </a:effectRef>
+          <a:fontRef idx="minor">
+            <a:schemeClr val="lt1"/>
+          </a:fontRef>
+        </p:style>
+        <p:txBody>
+          <a:bodyPr rtlCol="0" anchor="ctr"/>
+          <a:lstStyle/>
+          <a:p>
+            <a:pPr algn="ctr"/>
+          </a:p>
+        </p:txBody>
+      </p:sp>
+      <p:sp>
+        <p:nvSpPr>
+          <p:cNvPr id="4" name="Rounded Rectangle 3"/>
+          <p:cNvSpPr/>
+          <p:nvPr/>
+        </p:nvSpPr>
+        <p:spPr>
+          <a:xfrm>
+            <a:off x="731520" y="685800"/>
+            <a:ext cx="777240" cy="777240"/>
+          </a:xfrm>
+          <a:prstGeom prst="roundRect">
+            <a:avLst>
+              <a:gd name="adj" fmla="val 25000"/>
+            </a:avLst>
+          </a:prstGeom>
+          <a:solidFill>
+            <a:srgbClr val="FFFFFF"/>
+          </a:solidFill>
+          <a:ln>
+            <a:noFill/>
+          </a:ln>
+          <a:effectLst/>
+        </p:spPr>
+        <p:style>
+          <a:lnRef idx="1">
+            <a:schemeClr val="accent1"/>
+          </a:lnRef>
+          <a:fillRef idx="3">
+            <a:schemeClr val="accent1"/>
+          </a:fillRef>
+          <a:effectRef idx="2">
+            <a:schemeClr val="accent1"/>
+          </a:effectRef>
+          <a:fontRef idx="minor">
+            <a:schemeClr val="lt1"/>
+          </a:fontRef>
+        </p:style>
+        <p:txBody>
+          <a:bodyPr rtlCol="0" anchor="ctr"/>
+          <a:lstStyle/>
+          <a:p>
+            <a:pPr algn="ctr"/>
+          </a:p>
+        </p:txBody>
+      </p:sp>
+      <p:pic>
+        <p:nvPicPr>
+          <p:cNvPr id="5" name="Picture 4" descr="logo-icon.png"/>
+          <p:cNvPicPr>
+            <a:picLocks noChangeAspect="1"/>
+          </p:cNvPicPr>
+          <p:nvPr/>
+        </p:nvPicPr>
+        <p:blipFill>
+          <a:blip r:embed="rId3"/>
+          <a:stretch>
+            <a:fillRect/>
+          </a:stretch>
+        </p:blipFill>
+        <p:spPr>
+          <a:xfrm>
+            <a:off x="850392" y="804672"/>
+            <a:ext cx="766167" cy="548640"/>
           </a:xfrm>
           <a:prstGeom prst="rect">
             <a:avLst/>
@@ -3258,8 +3592,8 @@
         </p:nvSpPr>
         <p:spPr>
           <a:xfrm>
-            <a:off x="731520" y="2148840"/>
-            <a:ext cx="7315200" cy="457200"/>
+            <a:off x="777240" y="2331720"/>
+            <a:ext cx="8229600" cy="457200"/>
           </a:xfrm>
           <a:prstGeom prst="rect">
             <a:avLst/>
@@ -3293,8 +3627,8 @@
         </p:nvSpPr>
         <p:spPr>
           <a:xfrm>
-            <a:off x="685800" y="2542032"/>
-            <a:ext cx="9144000" cy="2011680"/>
+            <a:off x="731520" y="2724912"/>
+            <a:ext cx="10058400" cy="2011680"/>
           </a:xfrm>
           <a:prstGeom prst="rect">
             <a:avLst/>
@@ -3308,18 +3642,16 @@
           <a:lstStyle/>
           <a:p>
             <a:r>
-              <a:rPr sz="6000" b="1">
+              <a:rPr sz="5800" b="1">
                 <a:solidFill>
                   <a:srgbClr val="FFFFFF"/>
                 </a:solidFill>
                 <a:latin typeface="Calibri"/>
               </a:rPr>
-              <a:t>ReActiva</a:t>
-            </a:r>
-          </a:p>
-          <a:p>
-            <a:r>
-              <a:rPr sz="6000" b="1">
+              <a:t>ReActiva </a:t>
+            </a:r>
+            <a:r>
+              <a:rPr sz="5800" b="1">
                 <a:solidFill>
                   <a:srgbClr val="14B8A8"/>
                 </a:solidFill>
@@ -3332,48 +3664,13 @@
       </p:sp>
       <p:sp>
         <p:nvSpPr>
-          <p:cNvPr id="8" name="TextBox 7"/>
-          <p:cNvSpPr txBox="1"/>
-          <p:nvPr/>
-        </p:nvSpPr>
-        <p:spPr>
-          <a:xfrm>
-            <a:off x="731520" y="4572000"/>
-            <a:ext cx="8229600" cy="914400"/>
-          </a:xfrm>
-          <a:prstGeom prst="rect">
-            <a:avLst/>
-          </a:prstGeom>
-          <a:noFill/>
-        </p:spPr>
-        <p:txBody>
-          <a:bodyPr wrap="square">
-            <a:spAutoFit/>
-          </a:bodyPr>
-          <a:lstStyle/>
-          <a:p>
-            <a:pPr algn="l"/>
-            <a:r>
-              <a:rPr sz="2000" b="0" i="0">
-                <a:solidFill>
-                  <a:srgbClr val="9FB0AE"/>
-                </a:solidFill>
-                <a:latin typeface="Calibri"/>
-              </a:rPr>
-              <a:t>Convierte los reportes de una comunidad tras un sismo en recuperación verificable — de principio a fin.</a:t>
-            </a:r>
-          </a:p>
-        </p:txBody>
-      </p:sp>
-      <p:sp>
-        <p:nvSpPr>
-          <p:cNvPr id="9" name="Rectangle 8"/>
+          <p:cNvPr id="8" name="Rectangle 7"/>
           <p:cNvSpPr/>
           <p:nvPr/>
         </p:nvSpPr>
         <p:spPr>
           <a:xfrm>
-            <a:off x="731520" y="4343400"/>
+            <a:off x="777240" y="3794760"/>
             <a:ext cx="1280160" cy="38100"/>
           </a:xfrm>
           <a:prstGeom prst="rect">
@@ -3411,14 +3708,14 @@
       </p:sp>
       <p:sp>
         <p:nvSpPr>
-          <p:cNvPr id="10" name="TextBox 9"/>
+          <p:cNvPr id="9" name="TextBox 8"/>
           <p:cNvSpPr txBox="1"/>
           <p:nvPr/>
         </p:nvSpPr>
         <p:spPr>
           <a:xfrm>
-            <a:off x="11247120" y="6446520"/>
-            <a:ext cx="731520" cy="320040"/>
+            <a:off x="777240" y="4023360"/>
+            <a:ext cx="9601200" cy="1280160"/>
           </a:xfrm>
           <a:prstGeom prst="rect">
             <a:avLst/>
@@ -3431,15 +3728,85 @@
           </a:bodyPr>
           <a:lstStyle/>
           <a:p>
-            <a:pPr algn="r"/>
-            <a:r>
-              <a:rPr sz="1100" b="0" i="0">
-                <a:solidFill>
-                  <a:srgbClr val="9FB0AE"/>
+            <a:pPr algn="l"/>
+            <a:r>
+              <a:rPr sz="2200" b="1" i="0">
+                <a:solidFill>
+                  <a:srgbClr val="FFFFFF"/>
                 </a:solidFill>
                 <a:latin typeface="Calibri"/>
               </a:rPr>
-              <a:t>1/7</a:t>
+              <a:t>Un sismo real dejó miles de familias sin nada. Esta es la plataforma que convierte sus reportes en recuperación verificable.</a:t>
+            </a:r>
+          </a:p>
+        </p:txBody>
+      </p:sp>
+      <p:sp>
+        <p:nvSpPr>
+          <p:cNvPr id="10" name="TextBox 9"/>
+          <p:cNvSpPr txBox="1"/>
+          <p:nvPr/>
+        </p:nvSpPr>
+        <p:spPr>
+          <a:xfrm>
+            <a:off x="777240" y="6126480"/>
+            <a:ext cx="9144000" cy="365760"/>
+          </a:xfrm>
+          <a:prstGeom prst="rect">
+            <a:avLst/>
+          </a:prstGeom>
+          <a:noFill/>
+        </p:spPr>
+        <p:txBody>
+          <a:bodyPr wrap="square">
+            <a:spAutoFit/>
+          </a:bodyPr>
+          <a:lstStyle/>
+          <a:p>
+            <a:pPr algn="l"/>
+            <a:r>
+              <a:rPr sz="1100" b="0" i="1">
+                <a:solidFill>
+                  <a:srgbClr val="9FB0AE"/>
+                </a:solidFill>
+                <a:latin typeface="Calibri"/>
+              </a:rPr>
+              <a:t>Foto real — Chocó, Colombia, agosto de 2026</a:t>
+            </a:r>
+          </a:p>
+        </p:txBody>
+      </p:sp>
+      <p:sp>
+        <p:nvSpPr>
+          <p:cNvPr id="11" name="TextBox 10"/>
+          <p:cNvSpPr txBox="1"/>
+          <p:nvPr/>
+        </p:nvSpPr>
+        <p:spPr>
+          <a:xfrm>
+            <a:off x="11109960" y="6446520"/>
+            <a:ext cx="822960" cy="320040"/>
+          </a:xfrm>
+          <a:prstGeom prst="rect">
+            <a:avLst/>
+          </a:prstGeom>
+          <a:noFill/>
+        </p:spPr>
+        <p:txBody>
+          <a:bodyPr wrap="square">
+            <a:spAutoFit/>
+          </a:bodyPr>
+          <a:lstStyle/>
+          <a:p>
+            <a:pPr algn="r"/>
+            <a:r>
+              <a:rPr sz="1100" b="0" i="0">
+                <a:solidFill>
+                  <a:srgbClr val="9FB0AE"/>
+                </a:solidFill>
+                <a:latin typeface="Calibri"/>
+              </a:rPr>
+              <a:t>1/9</a:t>
             </a:r>
           </a:p>
         </p:txBody>
@@ -3462,9 +3829,33 @@
         <p:nvPr/>
       </p:nvGrpSpPr>
       <p:grpSpPr/>
-      <p:sp>
-        <p:nvSpPr>
-          <p:cNvPr id="2" name="Rectangle 1"/>
+      <p:pic>
+        <p:nvPicPr>
+          <p:cNvPr id="2" name="Picture 1" descr="sismo-4.jpg"/>
+          <p:cNvPicPr>
+            <a:picLocks noChangeAspect="1"/>
+          </p:cNvPicPr>
+          <p:nvPr/>
+        </p:nvPicPr>
+        <p:blipFill>
+          <a:blip r:embed="rId2"/>
+          <a:stretch>
+            <a:fillRect/>
+          </a:stretch>
+        </p:blipFill>
+        <p:spPr>
+          <a:xfrm>
+            <a:off x="0" y="-634898"/>
+            <a:ext cx="12191695" cy="8127796"/>
+          </a:xfrm>
+          <a:prstGeom prst="rect">
+            <a:avLst/>
+          </a:prstGeom>
+        </p:spPr>
+      </p:pic>
+      <p:sp>
+        <p:nvSpPr>
+          <p:cNvPr id="3" name="Rectangle 2"/>
           <p:cNvSpPr/>
           <p:nvPr/>
         </p:nvSpPr>
@@ -3477,7 +3868,9 @@
             <a:avLst/>
           </a:prstGeom>
           <a:solidFill>
-            <a:srgbClr val="0B1626"/>
+            <a:srgbClr val="08101C">
+              <a:alpha val="58000"/>
+            </a:srgbClr>
           </a:solidFill>
           <a:ln>
             <a:noFill/>
@@ -3508,95 +3901,7 @@
       </p:sp>
       <p:sp>
         <p:nvSpPr>
-          <p:cNvPr id="3" name="Oval 2"/>
-          <p:cNvSpPr/>
-          <p:nvPr/>
-        </p:nvSpPr>
-        <p:spPr>
-          <a:xfrm>
-            <a:off x="-2743200" y="-2743200"/>
-            <a:ext cx="8229600" cy="8229600"/>
-          </a:xfrm>
-          <a:prstGeom prst="ellipse">
-            <a:avLst/>
-          </a:prstGeom>
-          <a:solidFill>
-            <a:srgbClr val="142B42"/>
-          </a:solidFill>
-          <a:ln>
-            <a:noFill/>
-          </a:ln>
-          <a:effectLst/>
-        </p:spPr>
-        <p:style>
-          <a:lnRef idx="1">
-            <a:schemeClr val="accent1"/>
-          </a:lnRef>
-          <a:fillRef idx="3">
-            <a:schemeClr val="accent1"/>
-          </a:fillRef>
-          <a:effectRef idx="2">
-            <a:schemeClr val="accent1"/>
-          </a:effectRef>
-          <a:fontRef idx="minor">
-            <a:schemeClr val="lt1"/>
-          </a:fontRef>
-        </p:style>
-        <p:txBody>
-          <a:bodyPr rtlCol="0" anchor="ctr"/>
-          <a:lstStyle/>
-          <a:p>
-            <a:pPr algn="ctr"/>
-          </a:p>
-        </p:txBody>
-      </p:sp>
-      <p:sp>
-        <p:nvSpPr>
-          <p:cNvPr id="4" name="Oval 3"/>
-          <p:cNvSpPr/>
-          <p:nvPr/>
-        </p:nvSpPr>
-        <p:spPr>
-          <a:xfrm>
-            <a:off x="9601200" y="4114800"/>
-            <a:ext cx="5486400" cy="5486400"/>
-          </a:xfrm>
-          <a:prstGeom prst="ellipse">
-            <a:avLst/>
-          </a:prstGeom>
-          <a:solidFill>
-            <a:srgbClr val="142B42"/>
-          </a:solidFill>
-          <a:ln>
-            <a:noFill/>
-          </a:ln>
-          <a:effectLst/>
-        </p:spPr>
-        <p:style>
-          <a:lnRef idx="1">
-            <a:schemeClr val="accent1"/>
-          </a:lnRef>
-          <a:fillRef idx="3">
-            <a:schemeClr val="accent1"/>
-          </a:fillRef>
-          <a:effectRef idx="2">
-            <a:schemeClr val="accent1"/>
-          </a:effectRef>
-          <a:fontRef idx="minor">
-            <a:schemeClr val="lt1"/>
-          </a:fontRef>
-        </p:style>
-        <p:txBody>
-          <a:bodyPr rtlCol="0" anchor="ctr"/>
-          <a:lstStyle/>
-          <a:p>
-            <a:pPr algn="ctr"/>
-          </a:p>
-        </p:txBody>
-      </p:sp>
-      <p:sp>
-        <p:nvSpPr>
-          <p:cNvPr id="5" name="Rounded Rectangle 4"/>
+          <p:cNvPr id="4" name="Rounded Rectangle 3"/>
           <p:cNvSpPr/>
           <p:nvPr/>
         </p:nvSpPr>
@@ -3642,14 +3947,14 @@
       </p:sp>
       <p:pic>
         <p:nvPicPr>
-          <p:cNvPr id="6" name="Picture 5" descr="logo-icon.png"/>
+          <p:cNvPr id="5" name="Picture 4" descr="logo-icon.png"/>
           <p:cNvPicPr>
             <a:picLocks noChangeAspect="1"/>
           </p:cNvPicPr>
           <p:nvPr/>
         </p:nvPicPr>
         <p:blipFill>
-          <a:blip r:embed="rId2"/>
+          <a:blip r:embed="rId3"/>
           <a:stretch>
             <a:fillRect/>
           </a:stretch>
@@ -3666,7 +3971,7 @@
       </p:pic>
       <p:sp>
         <p:nvSpPr>
-          <p:cNvPr id="7" name="TextBox 6"/>
+          <p:cNvPr id="6" name="TextBox 5"/>
           <p:cNvSpPr txBox="1"/>
           <p:nvPr/>
         </p:nvSpPr>
@@ -3700,7 +4005,7 @@
       </p:sp>
       <p:sp>
         <p:nvSpPr>
-          <p:cNvPr id="8" name="Oval 7"/>
+          <p:cNvPr id="7" name="Oval 6"/>
           <p:cNvSpPr/>
           <p:nvPr/>
         </p:nvSpPr>
@@ -3752,14 +4057,14 @@
       </p:sp>
       <p:sp>
         <p:nvSpPr>
-          <p:cNvPr id="9" name="TextBox 8"/>
+          <p:cNvPr id="8" name="TextBox 7"/>
           <p:cNvSpPr txBox="1"/>
           <p:nvPr/>
         </p:nvSpPr>
         <p:spPr>
           <a:xfrm>
             <a:off x="1051560" y="1161288"/>
-            <a:ext cx="5486400" cy="365760"/>
+            <a:ext cx="6400800" cy="365760"/>
           </a:xfrm>
           <a:prstGeom prst="rect">
             <a:avLst/>
@@ -3787,13 +4092,13 @@
       </p:sp>
       <p:sp>
         <p:nvSpPr>
-          <p:cNvPr id="10" name="TextBox 9"/>
+          <p:cNvPr id="9" name="TextBox 8"/>
           <p:cNvSpPr txBox="1"/>
           <p:nvPr/>
         </p:nvSpPr>
         <p:spPr>
           <a:xfrm>
-            <a:off x="548640" y="1691640"/>
+            <a:off x="548640" y="1783080"/>
             <a:ext cx="10698480" cy="1463040"/>
           </a:xfrm>
           <a:prstGeom prst="rect">
@@ -3809,20 +4114,20 @@
           <a:p>
             <a:pPr algn="l"/>
             <a:r>
-              <a:rPr sz="3300" b="1" i="0">
+              <a:rPr sz="3400" b="1" i="0">
                 <a:solidFill>
                   <a:srgbClr val="FFFFFF"/>
                 </a:solidFill>
                 <a:latin typeface="Calibri"/>
               </a:rPr>
-              <a:t>El sismo del 10 de agosto de 2026 no falló por falta de ayuda.</a:t>
-            </a:r>
-          </a:p>
-        </p:txBody>
-      </p:sp>
-      <p:sp>
-        <p:nvSpPr>
-          <p:cNvPr id="11" name="TextBox 10"/>
+              <a:t>El sismo no falló por falta de ayuda.</a:t>
+            </a:r>
+          </a:p>
+        </p:txBody>
+      </p:sp>
+      <p:sp>
+        <p:nvSpPr>
+          <p:cNvPr id="10" name="TextBox 9"/>
           <p:cNvSpPr txBox="1"/>
           <p:nvPr/>
         </p:nvSpPr>
@@ -3844,14 +4149,62 @@
           <a:p>
             <a:pPr algn="l"/>
             <a:r>
-              <a:rPr sz="1600" b="0" i="0">
+              <a:rPr sz="1550" b="0" i="0">
                 <a:solidFill>
                   <a:srgbClr val="9FB0AE"/>
                 </a:solidFill>
                 <a:latin typeface="Calibri"/>
               </a:rPr>
-              <a:t>Falló por falta de coordinación. Magnitud 7.4, epicentro en Chocó, con daños en Quibdó, Cali, Pereira, Manizales y Armenia.</a:t>
-            </a:r>
+              <a:t>Magnitud 7.4, epicentro en Chocó. Daños en Quibdó, Cali, Pereira, Manizales y Armenia — sentido incluso en Ecuador y Panamá.</a:t>
+            </a:r>
+          </a:p>
+        </p:txBody>
+      </p:sp>
+      <p:sp>
+        <p:nvSpPr>
+          <p:cNvPr id="11" name="Rounded Rectangle 10"/>
+          <p:cNvSpPr/>
+          <p:nvPr/>
+        </p:nvSpPr>
+        <p:spPr>
+          <a:xfrm>
+            <a:off x="548640" y="3429000"/>
+            <a:ext cx="10424160" cy="2743200"/>
+          </a:xfrm>
+          <a:prstGeom prst="roundRect">
+            <a:avLst>
+              <a:gd name="adj" fmla="val 8000"/>
+            </a:avLst>
+          </a:prstGeom>
+          <a:solidFill>
+            <a:srgbClr val="0C1828"/>
+          </a:solidFill>
+          <a:ln w="12700">
+            <a:solidFill>
+              <a:srgbClr val="273C5C"/>
+            </a:solidFill>
+          </a:ln>
+          <a:effectLst/>
+        </p:spPr>
+        <p:style>
+          <a:lnRef idx="1">
+            <a:schemeClr val="accent1"/>
+          </a:lnRef>
+          <a:fillRef idx="3">
+            <a:schemeClr val="accent1"/>
+          </a:fillRef>
+          <a:effectRef idx="2">
+            <a:schemeClr val="accent1"/>
+          </a:effectRef>
+          <a:fontRef idx="minor">
+            <a:schemeClr val="lt1"/>
+          </a:fontRef>
+        </p:style>
+        <p:txBody>
+          <a:bodyPr rtlCol="0" anchor="ctr"/>
+          <a:lstStyle/>
+          <a:p>
+            <a:pPr algn="ctr"/>
           </a:p>
         </p:txBody>
       </p:sp>
@@ -3863,8 +4216,8 @@
         </p:nvSpPr>
         <p:spPr>
           <a:xfrm>
-            <a:off x="548640" y="3429000"/>
-            <a:ext cx="10332720" cy="4114800"/>
+            <a:off x="868680" y="3703320"/>
+            <a:ext cx="9875520" cy="4114800"/>
           </a:xfrm>
           <a:prstGeom prst="rect">
             <a:avLst/>
@@ -3883,7 +4236,7 @@
               </a:spcAft>
             </a:pPr>
             <a:r>
-              <a:rPr sz="1600" b="1">
+              <a:rPr sz="1700" b="1">
                 <a:solidFill>
                   <a:srgbClr val="14B8A8"/>
                 </a:solidFill>
@@ -3892,7 +4245,7 @@
               <a:t>→  </a:t>
             </a:r>
             <a:r>
-              <a:rPr sz="1600" b="1">
+              <a:rPr sz="1700" b="1">
                 <a:solidFill>
                   <a:srgbClr val="FFFFFF"/>
                 </a:solidFill>
@@ -3901,7 +4254,7 @@
               <a:t>Reportes perdidos</a:t>
             </a:r>
             <a:r>
-              <a:rPr sz="1400">
+              <a:rPr sz="1500">
                 <a:solidFill>
                   <a:srgbClr val="9FB0AE"/>
                 </a:solidFill>
@@ -3917,7 +4270,7 @@
               </a:spcAft>
             </a:pPr>
             <a:r>
-              <a:rPr sz="1600" b="1">
+              <a:rPr sz="1700" b="1">
                 <a:solidFill>
                   <a:srgbClr val="14B8A8"/>
                 </a:solidFill>
@@ -3926,7 +4279,7 @@
               <a:t>→  </a:t>
             </a:r>
             <a:r>
-              <a:rPr sz="1600" b="1">
+              <a:rPr sz="1700" b="1">
                 <a:solidFill>
                   <a:srgbClr val="FFFFFF"/>
                 </a:solidFill>
@@ -3935,7 +4288,7 @@
               <a:t>Ayuda mal dirigida</a:t>
             </a:r>
             <a:r>
-              <a:rPr sz="1400">
+              <a:rPr sz="1500">
                 <a:solidFill>
                   <a:srgbClr val="9FB0AE"/>
                 </a:solidFill>
@@ -3951,7 +4304,7 @@
               </a:spcAft>
             </a:pPr>
             <a:r>
-              <a:rPr sz="1600" b="1">
+              <a:rPr sz="1700" b="1">
                 <a:solidFill>
                   <a:srgbClr val="14B8A8"/>
                 </a:solidFill>
@@ -3960,7 +4313,7 @@
               <a:t>→  </a:t>
             </a:r>
             <a:r>
-              <a:rPr sz="1600" b="1">
+              <a:rPr sz="1700" b="1">
                 <a:solidFill>
                   <a:srgbClr val="FFFFFF"/>
                 </a:solidFill>
@@ -3969,7 +4322,7 @@
               <a:t>Nadie mide el resultado</a:t>
             </a:r>
             <a:r>
-              <a:rPr sz="1400">
+              <a:rPr sz="1500">
                 <a:solidFill>
                   <a:srgbClr val="9FB0AE"/>
                 </a:solidFill>
@@ -3988,8 +4341,8 @@
         </p:nvSpPr>
         <p:spPr>
           <a:xfrm>
-            <a:off x="11247120" y="6446520"/>
-            <a:ext cx="731520" cy="320040"/>
+            <a:off x="11109960" y="6446520"/>
+            <a:ext cx="822960" cy="320040"/>
           </a:xfrm>
           <a:prstGeom prst="rect">
             <a:avLst/>
@@ -4010,7 +4363,7 @@
                 </a:solidFill>
                 <a:latin typeface="Calibri"/>
               </a:rPr>
-              <a:t>2/7</a:t>
+              <a:t>2/9</a:t>
             </a:r>
           </a:p>
         </p:txBody>
@@ -4330,7 +4683,7 @@
         <p:spPr>
           <a:xfrm>
             <a:off x="1051560" y="1161288"/>
-            <a:ext cx="5486400" cy="365760"/>
+            <a:ext cx="6400800" cy="365760"/>
           </a:xfrm>
           <a:prstGeom prst="rect">
             <a:avLst/>
@@ -4365,7 +4718,7 @@
         <p:spPr>
           <a:xfrm>
             <a:off x="548640" y="1691640"/>
-            <a:ext cx="10515600" cy="1097280"/>
+            <a:ext cx="10515600" cy="914400"/>
           </a:xfrm>
           <a:prstGeom prst="rect">
             <a:avLst/>
@@ -4380,27 +4733,127 @@
           <a:p>
             <a:pPr algn="l"/>
             <a:r>
-              <a:rPr sz="3100" b="1" i="0">
+              <a:rPr sz="3200" b="1" i="0">
                 <a:solidFill>
                   <a:srgbClr val="FFFFFF"/>
                 </a:solidFill>
                 <a:latin typeface="Calibri"/>
               </a:rPr>
-              <a:t>Reporte, verificación, coincidencia y seguimiento — en un solo flujo.</a:t>
-            </a:r>
-          </a:p>
-        </p:txBody>
-      </p:sp>
-      <p:sp>
-        <p:nvSpPr>
-          <p:cNvPr id="11" name="TextBox 10"/>
+              <a:t>Un flujo, de principio a fin.</a:t>
+            </a:r>
+          </a:p>
+        </p:txBody>
+      </p:sp>
+      <p:sp>
+        <p:nvSpPr>
+          <p:cNvPr id="11" name="Rounded Rectangle 10"/>
+          <p:cNvSpPr/>
+          <p:nvPr/>
+        </p:nvSpPr>
+        <p:spPr>
+          <a:xfrm>
+            <a:off x="548640" y="2926080"/>
+            <a:ext cx="2331720" cy="2103120"/>
+          </a:xfrm>
+          <a:prstGeom prst="roundRect">
+            <a:avLst>
+              <a:gd name="adj" fmla="val 8000"/>
+            </a:avLst>
+          </a:prstGeom>
+          <a:solidFill>
+            <a:srgbClr val="162A47"/>
+          </a:solidFill>
+          <a:ln w="12700">
+            <a:solidFill>
+              <a:srgbClr val="273C5C"/>
+            </a:solidFill>
+          </a:ln>
+          <a:effectLst/>
+        </p:spPr>
+        <p:style>
+          <a:lnRef idx="1">
+            <a:schemeClr val="accent1"/>
+          </a:lnRef>
+          <a:fillRef idx="3">
+            <a:schemeClr val="accent1"/>
+          </a:fillRef>
+          <a:effectRef idx="2">
+            <a:schemeClr val="accent1"/>
+          </a:effectRef>
+          <a:fontRef idx="minor">
+            <a:schemeClr val="lt1"/>
+          </a:fontRef>
+        </p:style>
+        <p:txBody>
+          <a:bodyPr rtlCol="0" anchor="ctr"/>
+          <a:lstStyle/>
+          <a:p>
+            <a:pPr algn="ctr"/>
+          </a:p>
+        </p:txBody>
+      </p:sp>
+      <p:sp>
+        <p:nvSpPr>
+          <p:cNvPr id="12" name="Oval 11"/>
+          <p:cNvSpPr/>
+          <p:nvPr/>
+        </p:nvSpPr>
+        <p:spPr>
+          <a:xfrm>
+            <a:off x="713232" y="3090672"/>
+            <a:ext cx="457200" cy="457200"/>
+          </a:xfrm>
+          <a:prstGeom prst="ellipse">
+            <a:avLst/>
+          </a:prstGeom>
+          <a:solidFill>
+            <a:srgbClr val="0E9488"/>
+          </a:solidFill>
+          <a:ln>
+            <a:noFill/>
+          </a:ln>
+          <a:effectLst/>
+        </p:spPr>
+        <p:style>
+          <a:lnRef idx="1">
+            <a:schemeClr val="accent1"/>
+          </a:lnRef>
+          <a:fillRef idx="3">
+            <a:schemeClr val="accent1"/>
+          </a:fillRef>
+          <a:effectRef idx="2">
+            <a:schemeClr val="accent1"/>
+          </a:effectRef>
+          <a:fontRef idx="minor">
+            <a:schemeClr val="lt1"/>
+          </a:fontRef>
+        </p:style>
+        <p:txBody>
+          <a:bodyPr rtlCol="0" anchor="ctr"/>
+          <a:lstStyle/>
+          <a:p>
+            <a:pPr algn="ctr"/>
+            <a:r>
+              <a:rPr sz="1800" b="1">
+                <a:solidFill>
+                  <a:srgbClr val="FFFFFF"/>
+                </a:solidFill>
+              </a:rPr>
+              <a:t>1</a:t>
+            </a:r>
+          </a:p>
+        </p:txBody>
+      </p:sp>
+      <p:sp>
+        <p:nvSpPr>
+          <p:cNvPr id="13" name="TextBox 12"/>
           <p:cNvSpPr txBox="1"/>
           <p:nvPr/>
         </p:nvSpPr>
         <p:spPr>
           <a:xfrm>
-            <a:off x="548640" y="2788920"/>
-            <a:ext cx="10515600" cy="4114800"/>
+            <a:off x="713232" y="3794760"/>
+            <a:ext cx="2011680" cy="457200"/>
           </a:xfrm>
           <a:prstGeom prst="rect">
             <a:avLst/>
@@ -4413,153 +4866,29 @@
           </a:bodyPr>
           <a:lstStyle/>
           <a:p>
-            <a:pPr>
-              <a:spcAft>
-                <a:spcPts val="1600"/>
-              </a:spcAft>
-            </a:pPr>
-            <a:r>
-              <a:rPr sz="1700" b="1">
-                <a:solidFill>
-                  <a:srgbClr val="14B8A8"/>
+            <a:pPr algn="l"/>
+            <a:r>
+              <a:rPr sz="1800" b="1" i="0">
+                <a:solidFill>
+                  <a:srgbClr val="FFFFFF"/>
                 </a:solidFill>
                 <a:latin typeface="Calibri"/>
               </a:rPr>
-              <a:t>→  </a:t>
-            </a:r>
-            <a:r>
-              <a:rPr sz="1700" b="1">
-                <a:solidFill>
-                  <a:srgbClr val="FFFFFF"/>
-                </a:solidFill>
-                <a:latin typeface="Calibri"/>
-              </a:rPr>
-              <a:t>Reportar</a:t>
-            </a:r>
-            <a:r>
-              <a:rPr sz="1500">
-                <a:solidFill>
-                  <a:srgbClr val="9FB0AE"/>
-                </a:solidFill>
-                <a:latin typeface="Calibri"/>
-              </a:rPr>
-              <a:t>  — cualquier líder comunitario reporta, incluso sin conexión a internet.</a:t>
-            </a:r>
-          </a:p>
-          <a:p>
-            <a:pPr>
-              <a:spcAft>
-                <a:spcPts val="1600"/>
-              </a:spcAft>
-            </a:pPr>
-            <a:r>
-              <a:rPr sz="1700" b="1">
-                <a:solidFill>
-                  <a:srgbClr val="14B8A8"/>
-                </a:solidFill>
-                <a:latin typeface="Calibri"/>
-              </a:rPr>
-              <a:t>→  </a:t>
-            </a:r>
-            <a:r>
-              <a:rPr sz="1700" b="1">
-                <a:solidFill>
-                  <a:srgbClr val="FFFFFF"/>
-                </a:solidFill>
-                <a:latin typeface="Calibri"/>
-              </a:rPr>
-              <a:t>Verificar</a:t>
-            </a:r>
-            <a:r>
-              <a:rPr sz="1500">
-                <a:solidFill>
-                  <a:srgbClr val="9FB0AE"/>
-                </a:solidFill>
-                <a:latin typeface="Calibri"/>
-              </a:rPr>
-              <a:t>  — se calcula una prioridad objetiva, con criterios transparentes.</a:t>
-            </a:r>
-          </a:p>
-          <a:p>
-            <a:pPr>
-              <a:spcAft>
-                <a:spcPts val="1600"/>
-              </a:spcAft>
-            </a:pPr>
-            <a:r>
-              <a:rPr sz="1700" b="1">
-                <a:solidFill>
-                  <a:srgbClr val="14B8A8"/>
-                </a:solidFill>
-                <a:latin typeface="Calibri"/>
-              </a:rPr>
-              <a:t>→  </a:t>
-            </a:r>
-            <a:r>
-              <a:rPr sz="1700" b="1">
-                <a:solidFill>
-                  <a:srgbClr val="FFFFFF"/>
-                </a:solidFill>
-                <a:latin typeface="Calibri"/>
-              </a:rPr>
-              <a:t>Conectar</a:t>
-            </a:r>
-            <a:r>
-              <a:rPr sz="1500">
-                <a:solidFill>
-                  <a:srgbClr val="9FB0AE"/>
-                </a:solidFill>
-                <a:latin typeface="Calibri"/>
-              </a:rPr>
-              <a:t>  — reglas simples y explicables sugieren ofertas de ayuda compatibles.</a:t>
-            </a:r>
-          </a:p>
-          <a:p>
-            <a:pPr>
-              <a:spcAft>
-                <a:spcPts val="1600"/>
-              </a:spcAft>
-            </a:pPr>
-            <a:r>
-              <a:rPr sz="1700" b="1">
-                <a:solidFill>
-                  <a:srgbClr val="14B8A8"/>
-                </a:solidFill>
-                <a:latin typeface="Calibri"/>
-              </a:rPr>
-              <a:t>→  </a:t>
-            </a:r>
-            <a:r>
-              <a:rPr sz="1700" b="1">
-                <a:solidFill>
-                  <a:srgbClr val="FFFFFF"/>
-                </a:solidFill>
-                <a:latin typeface="Calibri"/>
-              </a:rPr>
-              <a:t>Confirmar</a:t>
-            </a:r>
-            <a:r>
-              <a:rPr sz="1500">
-                <a:solidFill>
-                  <a:srgbClr val="9FB0AE"/>
-                </a:solidFill>
-                <a:latin typeface="Calibri"/>
-              </a:rPr>
-              <a:t>  — seguimiento con evidencia hasta que la comunidad cierra el caso.</a:t>
-            </a:r>
-          </a:p>
-        </p:txBody>
-      </p:sp>
-      <p:sp>
-        <p:nvSpPr>
-          <p:cNvPr id="12" name="TextBox 11"/>
+              <a:t>REPORTAR</a:t>
+            </a:r>
+          </a:p>
+        </p:txBody>
+      </p:sp>
+      <p:sp>
+        <p:nvSpPr>
+          <p:cNvPr id="14" name="TextBox 13"/>
           <p:cNvSpPr txBox="1"/>
           <p:nvPr/>
         </p:nvSpPr>
         <p:spPr>
           <a:xfrm>
-            <a:off x="11247120" y="6446520"/>
-            <a:ext cx="731520" cy="320040"/>
+            <a:off x="713232" y="4297680"/>
+            <a:ext cx="2011680" cy="640080"/>
           </a:xfrm>
           <a:prstGeom prst="rect">
             <a:avLst/>
@@ -4572,15 +4901,692 @@
           </a:bodyPr>
           <a:lstStyle/>
           <a:p>
-            <a:pPr algn="r"/>
-            <a:r>
-              <a:rPr sz="1100" b="0" i="0">
+            <a:pPr algn="l"/>
+            <a:r>
+              <a:rPr sz="1300" b="0" i="0">
                 <a:solidFill>
                   <a:srgbClr val="9FB0AE"/>
                 </a:solidFill>
                 <a:latin typeface="Calibri"/>
               </a:rPr>
-              <a:t>3/7</a:t>
+              <a:t>Sin conexión a internet</a:t>
+            </a:r>
+          </a:p>
+        </p:txBody>
+      </p:sp>
+      <p:sp>
+        <p:nvSpPr>
+          <p:cNvPr id="15" name="Chevron 14"/>
+          <p:cNvSpPr/>
+          <p:nvPr/>
+        </p:nvSpPr>
+        <p:spPr>
+          <a:xfrm>
+            <a:off x="2898648" y="3794760"/>
+            <a:ext cx="283464" cy="365760"/>
+          </a:xfrm>
+          <a:prstGeom prst="chevron">
+            <a:avLst/>
+          </a:prstGeom>
+          <a:solidFill>
+            <a:srgbClr val="F5A623"/>
+          </a:solidFill>
+          <a:ln>
+            <a:noFill/>
+          </a:ln>
+          <a:effectLst/>
+        </p:spPr>
+        <p:style>
+          <a:lnRef idx="1">
+            <a:schemeClr val="accent1"/>
+          </a:lnRef>
+          <a:fillRef idx="3">
+            <a:schemeClr val="accent1"/>
+          </a:fillRef>
+          <a:effectRef idx="2">
+            <a:schemeClr val="accent1"/>
+          </a:effectRef>
+          <a:fontRef idx="minor">
+            <a:schemeClr val="lt1"/>
+          </a:fontRef>
+        </p:style>
+        <p:txBody>
+          <a:bodyPr rtlCol="0" anchor="ctr"/>
+          <a:lstStyle/>
+          <a:p>
+            <a:pPr algn="ctr"/>
+          </a:p>
+        </p:txBody>
+      </p:sp>
+      <p:sp>
+        <p:nvSpPr>
+          <p:cNvPr id="16" name="Rounded Rectangle 15"/>
+          <p:cNvSpPr/>
+          <p:nvPr/>
+        </p:nvSpPr>
+        <p:spPr>
+          <a:xfrm>
+            <a:off x="3200400" y="2926080"/>
+            <a:ext cx="2331720" cy="2103120"/>
+          </a:xfrm>
+          <a:prstGeom prst="roundRect">
+            <a:avLst>
+              <a:gd name="adj" fmla="val 8000"/>
+            </a:avLst>
+          </a:prstGeom>
+          <a:solidFill>
+            <a:srgbClr val="1B3556"/>
+          </a:solidFill>
+          <a:ln w="12700">
+            <a:solidFill>
+              <a:srgbClr val="273C5C"/>
+            </a:solidFill>
+          </a:ln>
+          <a:effectLst/>
+        </p:spPr>
+        <p:style>
+          <a:lnRef idx="1">
+            <a:schemeClr val="accent1"/>
+          </a:lnRef>
+          <a:fillRef idx="3">
+            <a:schemeClr val="accent1"/>
+          </a:fillRef>
+          <a:effectRef idx="2">
+            <a:schemeClr val="accent1"/>
+          </a:effectRef>
+          <a:fontRef idx="minor">
+            <a:schemeClr val="lt1"/>
+          </a:fontRef>
+        </p:style>
+        <p:txBody>
+          <a:bodyPr rtlCol="0" anchor="ctr"/>
+          <a:lstStyle/>
+          <a:p>
+            <a:pPr algn="ctr"/>
+          </a:p>
+        </p:txBody>
+      </p:sp>
+      <p:sp>
+        <p:nvSpPr>
+          <p:cNvPr id="17" name="Oval 16"/>
+          <p:cNvSpPr/>
+          <p:nvPr/>
+        </p:nvSpPr>
+        <p:spPr>
+          <a:xfrm>
+            <a:off x="3364992" y="3090672"/>
+            <a:ext cx="457200" cy="457200"/>
+          </a:xfrm>
+          <a:prstGeom prst="ellipse">
+            <a:avLst/>
+          </a:prstGeom>
+          <a:solidFill>
+            <a:srgbClr val="0E9488"/>
+          </a:solidFill>
+          <a:ln>
+            <a:noFill/>
+          </a:ln>
+          <a:effectLst/>
+        </p:spPr>
+        <p:style>
+          <a:lnRef idx="1">
+            <a:schemeClr val="accent1"/>
+          </a:lnRef>
+          <a:fillRef idx="3">
+            <a:schemeClr val="accent1"/>
+          </a:fillRef>
+          <a:effectRef idx="2">
+            <a:schemeClr val="accent1"/>
+          </a:effectRef>
+          <a:fontRef idx="minor">
+            <a:schemeClr val="lt1"/>
+          </a:fontRef>
+        </p:style>
+        <p:txBody>
+          <a:bodyPr rtlCol="0" anchor="ctr"/>
+          <a:lstStyle/>
+          <a:p>
+            <a:pPr algn="ctr"/>
+            <a:r>
+              <a:rPr sz="1800" b="1">
+                <a:solidFill>
+                  <a:srgbClr val="FFFFFF"/>
+                </a:solidFill>
+              </a:rPr>
+              <a:t>2</a:t>
+            </a:r>
+          </a:p>
+        </p:txBody>
+      </p:sp>
+      <p:sp>
+        <p:nvSpPr>
+          <p:cNvPr id="18" name="TextBox 17"/>
+          <p:cNvSpPr txBox="1"/>
+          <p:nvPr/>
+        </p:nvSpPr>
+        <p:spPr>
+          <a:xfrm>
+            <a:off x="3364992" y="3794760"/>
+            <a:ext cx="2011680" cy="457200"/>
+          </a:xfrm>
+          <a:prstGeom prst="rect">
+            <a:avLst/>
+          </a:prstGeom>
+          <a:noFill/>
+        </p:spPr>
+        <p:txBody>
+          <a:bodyPr wrap="square">
+            <a:spAutoFit/>
+          </a:bodyPr>
+          <a:lstStyle/>
+          <a:p>
+            <a:pPr algn="l"/>
+            <a:r>
+              <a:rPr sz="1800" b="1" i="0">
+                <a:solidFill>
+                  <a:srgbClr val="FFFFFF"/>
+                </a:solidFill>
+                <a:latin typeface="Calibri"/>
+              </a:rPr>
+              <a:t>VERIFICAR</a:t>
+            </a:r>
+          </a:p>
+        </p:txBody>
+      </p:sp>
+      <p:sp>
+        <p:nvSpPr>
+          <p:cNvPr id="19" name="TextBox 18"/>
+          <p:cNvSpPr txBox="1"/>
+          <p:nvPr/>
+        </p:nvSpPr>
+        <p:spPr>
+          <a:xfrm>
+            <a:off x="3364992" y="4297680"/>
+            <a:ext cx="2011680" cy="640080"/>
+          </a:xfrm>
+          <a:prstGeom prst="rect">
+            <a:avLst/>
+          </a:prstGeom>
+          <a:noFill/>
+        </p:spPr>
+        <p:txBody>
+          <a:bodyPr wrap="square">
+            <a:spAutoFit/>
+          </a:bodyPr>
+          <a:lstStyle/>
+          <a:p>
+            <a:pPr algn="l"/>
+            <a:r>
+              <a:rPr sz="1300" b="0" i="0">
+                <a:solidFill>
+                  <a:srgbClr val="9FB0AE"/>
+                </a:solidFill>
+                <a:latin typeface="Calibri"/>
+              </a:rPr>
+              <a:t>Prioridad objetiva</a:t>
+            </a:r>
+          </a:p>
+        </p:txBody>
+      </p:sp>
+      <p:sp>
+        <p:nvSpPr>
+          <p:cNvPr id="20" name="Chevron 19"/>
+          <p:cNvSpPr/>
+          <p:nvPr/>
+        </p:nvSpPr>
+        <p:spPr>
+          <a:xfrm>
+            <a:off x="5550408" y="3794760"/>
+            <a:ext cx="283464" cy="365760"/>
+          </a:xfrm>
+          <a:prstGeom prst="chevron">
+            <a:avLst/>
+          </a:prstGeom>
+          <a:solidFill>
+            <a:srgbClr val="F5A623"/>
+          </a:solidFill>
+          <a:ln>
+            <a:noFill/>
+          </a:ln>
+          <a:effectLst/>
+        </p:spPr>
+        <p:style>
+          <a:lnRef idx="1">
+            <a:schemeClr val="accent1"/>
+          </a:lnRef>
+          <a:fillRef idx="3">
+            <a:schemeClr val="accent1"/>
+          </a:fillRef>
+          <a:effectRef idx="2">
+            <a:schemeClr val="accent1"/>
+          </a:effectRef>
+          <a:fontRef idx="minor">
+            <a:schemeClr val="lt1"/>
+          </a:fontRef>
+        </p:style>
+        <p:txBody>
+          <a:bodyPr rtlCol="0" anchor="ctr"/>
+          <a:lstStyle/>
+          <a:p>
+            <a:pPr algn="ctr"/>
+          </a:p>
+        </p:txBody>
+      </p:sp>
+      <p:sp>
+        <p:nvSpPr>
+          <p:cNvPr id="21" name="Rounded Rectangle 20"/>
+          <p:cNvSpPr/>
+          <p:nvPr/>
+        </p:nvSpPr>
+        <p:spPr>
+          <a:xfrm>
+            <a:off x="5852160" y="2926080"/>
+            <a:ext cx="2331720" cy="2103120"/>
+          </a:xfrm>
+          <a:prstGeom prst="roundRect">
+            <a:avLst>
+              <a:gd name="adj" fmla="val 8000"/>
+            </a:avLst>
+          </a:prstGeom>
+          <a:solidFill>
+            <a:srgbClr val="162A47"/>
+          </a:solidFill>
+          <a:ln w="12700">
+            <a:solidFill>
+              <a:srgbClr val="273C5C"/>
+            </a:solidFill>
+          </a:ln>
+          <a:effectLst/>
+        </p:spPr>
+        <p:style>
+          <a:lnRef idx="1">
+            <a:schemeClr val="accent1"/>
+          </a:lnRef>
+          <a:fillRef idx="3">
+            <a:schemeClr val="accent1"/>
+          </a:fillRef>
+          <a:effectRef idx="2">
+            <a:schemeClr val="accent1"/>
+          </a:effectRef>
+          <a:fontRef idx="minor">
+            <a:schemeClr val="lt1"/>
+          </a:fontRef>
+        </p:style>
+        <p:txBody>
+          <a:bodyPr rtlCol="0" anchor="ctr"/>
+          <a:lstStyle/>
+          <a:p>
+            <a:pPr algn="ctr"/>
+          </a:p>
+        </p:txBody>
+      </p:sp>
+      <p:sp>
+        <p:nvSpPr>
+          <p:cNvPr id="22" name="Oval 21"/>
+          <p:cNvSpPr/>
+          <p:nvPr/>
+        </p:nvSpPr>
+        <p:spPr>
+          <a:xfrm>
+            <a:off x="6016752" y="3090672"/>
+            <a:ext cx="457200" cy="457200"/>
+          </a:xfrm>
+          <a:prstGeom prst="ellipse">
+            <a:avLst/>
+          </a:prstGeom>
+          <a:solidFill>
+            <a:srgbClr val="0E9488"/>
+          </a:solidFill>
+          <a:ln>
+            <a:noFill/>
+          </a:ln>
+          <a:effectLst/>
+        </p:spPr>
+        <p:style>
+          <a:lnRef idx="1">
+            <a:schemeClr val="accent1"/>
+          </a:lnRef>
+          <a:fillRef idx="3">
+            <a:schemeClr val="accent1"/>
+          </a:fillRef>
+          <a:effectRef idx="2">
+            <a:schemeClr val="accent1"/>
+          </a:effectRef>
+          <a:fontRef idx="minor">
+            <a:schemeClr val="lt1"/>
+          </a:fontRef>
+        </p:style>
+        <p:txBody>
+          <a:bodyPr rtlCol="0" anchor="ctr"/>
+          <a:lstStyle/>
+          <a:p>
+            <a:pPr algn="ctr"/>
+            <a:r>
+              <a:rPr sz="1800" b="1">
+                <a:solidFill>
+                  <a:srgbClr val="FFFFFF"/>
+                </a:solidFill>
+              </a:rPr>
+              <a:t>3</a:t>
+            </a:r>
+          </a:p>
+        </p:txBody>
+      </p:sp>
+      <p:sp>
+        <p:nvSpPr>
+          <p:cNvPr id="23" name="TextBox 22"/>
+          <p:cNvSpPr txBox="1"/>
+          <p:nvPr/>
+        </p:nvSpPr>
+        <p:spPr>
+          <a:xfrm>
+            <a:off x="6016752" y="3794760"/>
+            <a:ext cx="2011680" cy="457200"/>
+          </a:xfrm>
+          <a:prstGeom prst="rect">
+            <a:avLst/>
+          </a:prstGeom>
+          <a:noFill/>
+        </p:spPr>
+        <p:txBody>
+          <a:bodyPr wrap="square">
+            <a:spAutoFit/>
+          </a:bodyPr>
+          <a:lstStyle/>
+          <a:p>
+            <a:pPr algn="l"/>
+            <a:r>
+              <a:rPr sz="1800" b="1" i="0">
+                <a:solidFill>
+                  <a:srgbClr val="FFFFFF"/>
+                </a:solidFill>
+                <a:latin typeface="Calibri"/>
+              </a:rPr>
+              <a:t>CONECTAR</a:t>
+            </a:r>
+          </a:p>
+        </p:txBody>
+      </p:sp>
+      <p:sp>
+        <p:nvSpPr>
+          <p:cNvPr id="24" name="TextBox 23"/>
+          <p:cNvSpPr txBox="1"/>
+          <p:nvPr/>
+        </p:nvSpPr>
+        <p:spPr>
+          <a:xfrm>
+            <a:off x="6016752" y="4297680"/>
+            <a:ext cx="2011680" cy="640080"/>
+          </a:xfrm>
+          <a:prstGeom prst="rect">
+            <a:avLst/>
+          </a:prstGeom>
+          <a:noFill/>
+        </p:spPr>
+        <p:txBody>
+          <a:bodyPr wrap="square">
+            <a:spAutoFit/>
+          </a:bodyPr>
+          <a:lstStyle/>
+          <a:p>
+            <a:pPr algn="l"/>
+            <a:r>
+              <a:rPr sz="1300" b="0" i="0">
+                <a:solidFill>
+                  <a:srgbClr val="9FB0AE"/>
+                </a:solidFill>
+                <a:latin typeface="Calibri"/>
+              </a:rPr>
+              <a:t>Reglas explicables</a:t>
+            </a:r>
+          </a:p>
+        </p:txBody>
+      </p:sp>
+      <p:sp>
+        <p:nvSpPr>
+          <p:cNvPr id="25" name="Chevron 24"/>
+          <p:cNvSpPr/>
+          <p:nvPr/>
+        </p:nvSpPr>
+        <p:spPr>
+          <a:xfrm>
+            <a:off x="8202168" y="3794760"/>
+            <a:ext cx="283464" cy="365760"/>
+          </a:xfrm>
+          <a:prstGeom prst="chevron">
+            <a:avLst/>
+          </a:prstGeom>
+          <a:solidFill>
+            <a:srgbClr val="F5A623"/>
+          </a:solidFill>
+          <a:ln>
+            <a:noFill/>
+          </a:ln>
+          <a:effectLst/>
+        </p:spPr>
+        <p:style>
+          <a:lnRef idx="1">
+            <a:schemeClr val="accent1"/>
+          </a:lnRef>
+          <a:fillRef idx="3">
+            <a:schemeClr val="accent1"/>
+          </a:fillRef>
+          <a:effectRef idx="2">
+            <a:schemeClr val="accent1"/>
+          </a:effectRef>
+          <a:fontRef idx="minor">
+            <a:schemeClr val="lt1"/>
+          </a:fontRef>
+        </p:style>
+        <p:txBody>
+          <a:bodyPr rtlCol="0" anchor="ctr"/>
+          <a:lstStyle/>
+          <a:p>
+            <a:pPr algn="ctr"/>
+          </a:p>
+        </p:txBody>
+      </p:sp>
+      <p:sp>
+        <p:nvSpPr>
+          <p:cNvPr id="26" name="Rounded Rectangle 25"/>
+          <p:cNvSpPr/>
+          <p:nvPr/>
+        </p:nvSpPr>
+        <p:spPr>
+          <a:xfrm>
+            <a:off x="8503920" y="2926080"/>
+            <a:ext cx="2331720" cy="2103120"/>
+          </a:xfrm>
+          <a:prstGeom prst="roundRect">
+            <a:avLst>
+              <a:gd name="adj" fmla="val 8000"/>
+            </a:avLst>
+          </a:prstGeom>
+          <a:solidFill>
+            <a:srgbClr val="1B3556"/>
+          </a:solidFill>
+          <a:ln w="12700">
+            <a:solidFill>
+              <a:srgbClr val="273C5C"/>
+            </a:solidFill>
+          </a:ln>
+          <a:effectLst/>
+        </p:spPr>
+        <p:style>
+          <a:lnRef idx="1">
+            <a:schemeClr val="accent1"/>
+          </a:lnRef>
+          <a:fillRef idx="3">
+            <a:schemeClr val="accent1"/>
+          </a:fillRef>
+          <a:effectRef idx="2">
+            <a:schemeClr val="accent1"/>
+          </a:effectRef>
+          <a:fontRef idx="minor">
+            <a:schemeClr val="lt1"/>
+          </a:fontRef>
+        </p:style>
+        <p:txBody>
+          <a:bodyPr rtlCol="0" anchor="ctr"/>
+          <a:lstStyle/>
+          <a:p>
+            <a:pPr algn="ctr"/>
+          </a:p>
+        </p:txBody>
+      </p:sp>
+      <p:sp>
+        <p:nvSpPr>
+          <p:cNvPr id="27" name="Oval 26"/>
+          <p:cNvSpPr/>
+          <p:nvPr/>
+        </p:nvSpPr>
+        <p:spPr>
+          <a:xfrm>
+            <a:off x="8668512" y="3090672"/>
+            <a:ext cx="457200" cy="457200"/>
+          </a:xfrm>
+          <a:prstGeom prst="ellipse">
+            <a:avLst/>
+          </a:prstGeom>
+          <a:solidFill>
+            <a:srgbClr val="0E9488"/>
+          </a:solidFill>
+          <a:ln>
+            <a:noFill/>
+          </a:ln>
+          <a:effectLst/>
+        </p:spPr>
+        <p:style>
+          <a:lnRef idx="1">
+            <a:schemeClr val="accent1"/>
+          </a:lnRef>
+          <a:fillRef idx="3">
+            <a:schemeClr val="accent1"/>
+          </a:fillRef>
+          <a:effectRef idx="2">
+            <a:schemeClr val="accent1"/>
+          </a:effectRef>
+          <a:fontRef idx="minor">
+            <a:schemeClr val="lt1"/>
+          </a:fontRef>
+        </p:style>
+        <p:txBody>
+          <a:bodyPr rtlCol="0" anchor="ctr"/>
+          <a:lstStyle/>
+          <a:p>
+            <a:pPr algn="ctr"/>
+            <a:r>
+              <a:rPr sz="1800" b="1">
+                <a:solidFill>
+                  <a:srgbClr val="FFFFFF"/>
+                </a:solidFill>
+              </a:rPr>
+              <a:t>4</a:t>
+            </a:r>
+          </a:p>
+        </p:txBody>
+      </p:sp>
+      <p:sp>
+        <p:nvSpPr>
+          <p:cNvPr id="28" name="TextBox 27"/>
+          <p:cNvSpPr txBox="1"/>
+          <p:nvPr/>
+        </p:nvSpPr>
+        <p:spPr>
+          <a:xfrm>
+            <a:off x="8668512" y="3794760"/>
+            <a:ext cx="2011680" cy="457200"/>
+          </a:xfrm>
+          <a:prstGeom prst="rect">
+            <a:avLst/>
+          </a:prstGeom>
+          <a:noFill/>
+        </p:spPr>
+        <p:txBody>
+          <a:bodyPr wrap="square">
+            <a:spAutoFit/>
+          </a:bodyPr>
+          <a:lstStyle/>
+          <a:p>
+            <a:pPr algn="l"/>
+            <a:r>
+              <a:rPr sz="1800" b="1" i="0">
+                <a:solidFill>
+                  <a:srgbClr val="FFFFFF"/>
+                </a:solidFill>
+                <a:latin typeface="Calibri"/>
+              </a:rPr>
+              <a:t>CONFIRMAR</a:t>
+            </a:r>
+          </a:p>
+        </p:txBody>
+      </p:sp>
+      <p:sp>
+        <p:nvSpPr>
+          <p:cNvPr id="29" name="TextBox 28"/>
+          <p:cNvSpPr txBox="1"/>
+          <p:nvPr/>
+        </p:nvSpPr>
+        <p:spPr>
+          <a:xfrm>
+            <a:off x="8668512" y="4297680"/>
+            <a:ext cx="2011680" cy="640080"/>
+          </a:xfrm>
+          <a:prstGeom prst="rect">
+            <a:avLst/>
+          </a:prstGeom>
+          <a:noFill/>
+        </p:spPr>
+        <p:txBody>
+          <a:bodyPr wrap="square">
+            <a:spAutoFit/>
+          </a:bodyPr>
+          <a:lstStyle/>
+          <a:p>
+            <a:pPr algn="l"/>
+            <a:r>
+              <a:rPr sz="1300" b="0" i="0">
+                <a:solidFill>
+                  <a:srgbClr val="9FB0AE"/>
+                </a:solidFill>
+                <a:latin typeface="Calibri"/>
+              </a:rPr>
+              <a:t>Evidencia real</a:t>
+            </a:r>
+          </a:p>
+        </p:txBody>
+      </p:sp>
+      <p:sp>
+        <p:nvSpPr>
+          <p:cNvPr id="30" name="TextBox 29"/>
+          <p:cNvSpPr txBox="1"/>
+          <p:nvPr/>
+        </p:nvSpPr>
+        <p:spPr>
+          <a:xfrm>
+            <a:off x="11109960" y="6446520"/>
+            <a:ext cx="822960" cy="320040"/>
+          </a:xfrm>
+          <a:prstGeom prst="rect">
+            <a:avLst/>
+          </a:prstGeom>
+          <a:noFill/>
+        </p:spPr>
+        <p:txBody>
+          <a:bodyPr wrap="square">
+            <a:spAutoFit/>
+          </a:bodyPr>
+          <a:lstStyle/>
+          <a:p>
+            <a:pPr algn="r"/>
+            <a:r>
+              <a:rPr sz="1100" b="0" i="0">
+                <a:solidFill>
+                  <a:srgbClr val="9FB0AE"/>
+                </a:solidFill>
+                <a:latin typeface="Calibri"/>
+              </a:rPr>
+              <a:t>3/9</a:t>
             </a:r>
           </a:p>
         </p:txBody>
@@ -4900,7 +5906,7 @@
         <p:spPr>
           <a:xfrm>
             <a:off x="1051560" y="1161288"/>
-            <a:ext cx="5486400" cy="365760"/>
+            <a:ext cx="6400800" cy="365760"/>
           </a:xfrm>
           <a:prstGeom prst="rect">
             <a:avLst/>
@@ -4921,7 +5927,7 @@
                 </a:solidFill>
                 <a:latin typeface="Calibri"/>
               </a:rPr>
-              <a:t>TECNOLOGÍAS DE GOOGLE · 1:00–1:30</a:t>
+              <a:t>CÓMO SE VE, EN ACCIÓN</a:t>
             </a:r>
           </a:p>
         </p:txBody>
@@ -4935,7 +5941,7 @@
         <p:spPr>
           <a:xfrm>
             <a:off x="548640" y="1691640"/>
-            <a:ext cx="10515600" cy="1097280"/>
+            <a:ext cx="10515600" cy="822960"/>
           </a:xfrm>
           <a:prstGeom prst="rect">
             <a:avLst/>
@@ -4950,61 +5956,50 @@
           <a:p>
             <a:pPr algn="l"/>
             <a:r>
-              <a:rPr sz="2900" b="1" i="0">
+              <a:rPr sz="2800" b="1" i="0">
                 <a:solidFill>
                   <a:srgbClr val="FFFFFF"/>
                 </a:solidFill>
                 <a:latin typeface="Calibri"/>
               </a:rPr>
-              <a:t>Construido sobre el ecosistema de Google, de verdad, en producción.</a:t>
-            </a:r>
-          </a:p>
-        </p:txBody>
-      </p:sp>
-      <p:sp>
-        <p:nvSpPr>
-          <p:cNvPr id="11" name="Oval 10"/>
-          <p:cNvSpPr/>
-          <p:nvPr/>
-        </p:nvSpPr>
-        <p:spPr>
-          <a:xfrm>
-            <a:off x="548640" y="2962656"/>
-            <a:ext cx="118872" cy="118872"/>
-          </a:xfrm>
-          <a:prstGeom prst="ellipse">
-            <a:avLst/>
-          </a:prstGeom>
-          <a:solidFill>
-            <a:srgbClr val="14B8A8"/>
-          </a:solidFill>
-          <a:ln>
-            <a:noFill/>
-          </a:ln>
-          <a:effectLst/>
-        </p:spPr>
-        <p:style>
-          <a:lnRef idx="1">
-            <a:schemeClr val="accent1"/>
-          </a:lnRef>
-          <a:fillRef idx="3">
-            <a:schemeClr val="accent1"/>
-          </a:fillRef>
-          <a:effectRef idx="2">
-            <a:schemeClr val="accent1"/>
-          </a:effectRef>
-          <a:fontRef idx="minor">
-            <a:schemeClr val="lt1"/>
-          </a:fontRef>
-        </p:style>
-        <p:txBody>
-          <a:bodyPr rtlCol="0" anchor="ctr"/>
-          <a:lstStyle/>
-          <a:p>
-            <a:pPr algn="ctr"/>
-          </a:p>
-        </p:txBody>
-      </p:sp>
+              <a:t>Reportar, verificar, conectar y alertar — en vivo.</a:t>
+            </a:r>
+          </a:p>
+        </p:txBody>
+      </p:sp>
+      <p:pic>
+        <p:nvPicPr>
+          <p:cNvPr id="11" name="process_montage.mp4">
+            <a:hlinkClick r:id="" action="ppaction://media"/>
+          </p:cNvPr>
+          <p:cNvPicPr>
+            <a:picLocks noChangeAspect="1"/>
+          </p:cNvPicPr>
+          <p:nvPr>
+            <a:videoFile r:link="rId4"/>
+            <p:extLst>
+              <p:ext uri="{DAA4B4D4-6D71-4841-9C94-3DE7FCFB9230}">
+                <p14:media xmlns:p14="http://schemas.microsoft.com/office/powerpoint/2010/main" r:embed="rId3"/>
+              </p:ext>
+            </p:extLst>
+          </p:nvPr>
+        </p:nvPicPr>
+        <p:blipFill>
+          <a:blip r:embed="rId5"/>
+          <a:stretch>
+            <a:fillRect/>
+          </a:stretch>
+        </p:blipFill>
+        <p:spPr>
+          <a:xfrm>
+            <a:off x="1889607" y="2606040"/>
+            <a:ext cx="8412480" cy="3794760"/>
+          </a:xfrm>
+          <a:prstGeom prst="rect">
+            <a:avLst/>
+          </a:prstGeom>
+        </p:spPr>
+      </p:pic>
       <p:sp>
         <p:nvSpPr>
           <p:cNvPr id="12" name="TextBox 11"/>
@@ -5013,8 +6008,8 @@
         </p:nvSpPr>
         <p:spPr>
           <a:xfrm>
-            <a:off x="841248" y="2825496"/>
-            <a:ext cx="4937760" cy="365760"/>
+            <a:off x="548640" y="6446520"/>
+            <a:ext cx="8229600" cy="320040"/>
           </a:xfrm>
           <a:prstGeom prst="rect">
             <a:avLst/>
@@ -5029,13 +6024,13 @@
           <a:p>
             <a:pPr algn="l"/>
             <a:r>
-              <a:rPr sz="1550" b="1" i="0">
-                <a:solidFill>
-                  <a:srgbClr val="FFFFFF"/>
+              <a:rPr sz="1150" b="0" i="1">
+                <a:solidFill>
+                  <a:srgbClr val="9FB0AE"/>
                 </a:solidFill>
                 <a:latin typeface="Calibri"/>
               </a:rPr>
-              <a:t>Firebase Authentication</a:t>
+              <a:t>Haz clic para reproducir  ·  clip real de la plataforma, sin edición</a:t>
             </a:r>
           </a:p>
         </p:txBody>
@@ -5048,8 +6043,8 @@
         </p:nvSpPr>
         <p:spPr>
           <a:xfrm>
-            <a:off x="841248" y="3172968"/>
-            <a:ext cx="4937760" cy="457200"/>
+            <a:off x="11109960" y="6446520"/>
+            <a:ext cx="822960" cy="320040"/>
           </a:xfrm>
           <a:prstGeom prst="rect">
             <a:avLst/>
@@ -5062,620 +6057,15 @@
           </a:bodyPr>
           <a:lstStyle/>
           <a:p>
-            <a:pPr algn="l"/>
-            <a:r>
-              <a:rPr sz="1200" b="0" i="0">
+            <a:pPr algn="r"/>
+            <a:r>
+              <a:rPr sz="1100" b="0" i="0">
                 <a:solidFill>
                   <a:srgbClr val="9FB0AE"/>
                 </a:solidFill>
                 <a:latin typeface="Calibri"/>
               </a:rPr>
-              <a:t>Cuentas reales, recuperación de contraseña, 2FA con TOTP</a:t>
-            </a:r>
-          </a:p>
-        </p:txBody>
-      </p:sp>
-      <p:sp>
-        <p:nvSpPr>
-          <p:cNvPr id="14" name="Oval 13"/>
-          <p:cNvSpPr/>
-          <p:nvPr/>
-        </p:nvSpPr>
-        <p:spPr>
-          <a:xfrm>
-            <a:off x="6035040" y="2962656"/>
-            <a:ext cx="118872" cy="118872"/>
-          </a:xfrm>
-          <a:prstGeom prst="ellipse">
-            <a:avLst/>
-          </a:prstGeom>
-          <a:solidFill>
-            <a:srgbClr val="14B8A8"/>
-          </a:solidFill>
-          <a:ln>
-            <a:noFill/>
-          </a:ln>
-          <a:effectLst/>
-        </p:spPr>
-        <p:style>
-          <a:lnRef idx="1">
-            <a:schemeClr val="accent1"/>
-          </a:lnRef>
-          <a:fillRef idx="3">
-            <a:schemeClr val="accent1"/>
-          </a:fillRef>
-          <a:effectRef idx="2">
-            <a:schemeClr val="accent1"/>
-          </a:effectRef>
-          <a:fontRef idx="minor">
-            <a:schemeClr val="lt1"/>
-          </a:fontRef>
-        </p:style>
-        <p:txBody>
-          <a:bodyPr rtlCol="0" anchor="ctr"/>
-          <a:lstStyle/>
-          <a:p>
-            <a:pPr algn="ctr"/>
-          </a:p>
-        </p:txBody>
-      </p:sp>
-      <p:sp>
-        <p:nvSpPr>
-          <p:cNvPr id="15" name="TextBox 14"/>
-          <p:cNvSpPr txBox="1"/>
-          <p:nvPr/>
-        </p:nvSpPr>
-        <p:spPr>
-          <a:xfrm>
-            <a:off x="6327648" y="2825496"/>
-            <a:ext cx="4937760" cy="365760"/>
-          </a:xfrm>
-          <a:prstGeom prst="rect">
-            <a:avLst/>
-          </a:prstGeom>
-          <a:noFill/>
-        </p:spPr>
-        <p:txBody>
-          <a:bodyPr wrap="square">
-            <a:spAutoFit/>
-          </a:bodyPr>
-          <a:lstStyle/>
-          <a:p>
-            <a:pPr algn="l"/>
-            <a:r>
-              <a:rPr sz="1550" b="1" i="0">
-                <a:solidFill>
-                  <a:srgbClr val="FFFFFF"/>
-                </a:solidFill>
-                <a:latin typeface="Calibri"/>
-              </a:rPr>
-              <a:t>Cloud Firestore</a:t>
-            </a:r>
-          </a:p>
-        </p:txBody>
-      </p:sp>
-      <p:sp>
-        <p:nvSpPr>
-          <p:cNvPr id="16" name="TextBox 15"/>
-          <p:cNvSpPr txBox="1"/>
-          <p:nvPr/>
-        </p:nvSpPr>
-        <p:spPr>
-          <a:xfrm>
-            <a:off x="6327648" y="3172968"/>
-            <a:ext cx="4937760" cy="457200"/>
-          </a:xfrm>
-          <a:prstGeom prst="rect">
-            <a:avLst/>
-          </a:prstGeom>
-          <a:noFill/>
-        </p:spPr>
-        <p:txBody>
-          <a:bodyPr wrap="square">
-            <a:spAutoFit/>
-          </a:bodyPr>
-          <a:lstStyle/>
-          <a:p>
-            <a:pPr algn="l"/>
-            <a:r>
-              <a:rPr sz="1200" b="0" i="0">
-                <a:solidFill>
-                  <a:srgbClr val="9FB0AE"/>
-                </a:solidFill>
-                <a:latin typeface="Calibri"/>
-              </a:rPr>
-              <a:t>Base de datos en tiempo real, con caché offline persistente</a:t>
-            </a:r>
-          </a:p>
-        </p:txBody>
-      </p:sp>
-      <p:sp>
-        <p:nvSpPr>
-          <p:cNvPr id="17" name="Oval 16"/>
-          <p:cNvSpPr/>
-          <p:nvPr/>
-        </p:nvSpPr>
-        <p:spPr>
-          <a:xfrm>
-            <a:off x="548640" y="4133087"/>
-            <a:ext cx="118872" cy="118872"/>
-          </a:xfrm>
-          <a:prstGeom prst="ellipse">
-            <a:avLst/>
-          </a:prstGeom>
-          <a:solidFill>
-            <a:srgbClr val="14B8A8"/>
-          </a:solidFill>
-          <a:ln>
-            <a:noFill/>
-          </a:ln>
-          <a:effectLst/>
-        </p:spPr>
-        <p:style>
-          <a:lnRef idx="1">
-            <a:schemeClr val="accent1"/>
-          </a:lnRef>
-          <a:fillRef idx="3">
-            <a:schemeClr val="accent1"/>
-          </a:fillRef>
-          <a:effectRef idx="2">
-            <a:schemeClr val="accent1"/>
-          </a:effectRef>
-          <a:fontRef idx="minor">
-            <a:schemeClr val="lt1"/>
-          </a:fontRef>
-        </p:style>
-        <p:txBody>
-          <a:bodyPr rtlCol="0" anchor="ctr"/>
-          <a:lstStyle/>
-          <a:p>
-            <a:pPr algn="ctr"/>
-          </a:p>
-        </p:txBody>
-      </p:sp>
-      <p:sp>
-        <p:nvSpPr>
-          <p:cNvPr id="18" name="TextBox 17"/>
-          <p:cNvSpPr txBox="1"/>
-          <p:nvPr/>
-        </p:nvSpPr>
-        <p:spPr>
-          <a:xfrm>
-            <a:off x="841248" y="3995927"/>
-            <a:ext cx="4937760" cy="365760"/>
-          </a:xfrm>
-          <a:prstGeom prst="rect">
-            <a:avLst/>
-          </a:prstGeom>
-          <a:noFill/>
-        </p:spPr>
-        <p:txBody>
-          <a:bodyPr wrap="square">
-            <a:spAutoFit/>
-          </a:bodyPr>
-          <a:lstStyle/>
-          <a:p>
-            <a:pPr algn="l"/>
-            <a:r>
-              <a:rPr sz="1550" b="1" i="0">
-                <a:solidFill>
-                  <a:srgbClr val="FFFFFF"/>
-                </a:solidFill>
-                <a:latin typeface="Calibri"/>
-              </a:rPr>
-              <a:t>Firebase Storage</a:t>
-            </a:r>
-          </a:p>
-        </p:txBody>
-      </p:sp>
-      <p:sp>
-        <p:nvSpPr>
-          <p:cNvPr id="19" name="TextBox 18"/>
-          <p:cNvSpPr txBox="1"/>
-          <p:nvPr/>
-        </p:nvSpPr>
-        <p:spPr>
-          <a:xfrm>
-            <a:off x="841248" y="4343399"/>
-            <a:ext cx="4937760" cy="457200"/>
-          </a:xfrm>
-          <a:prstGeom prst="rect">
-            <a:avLst/>
-          </a:prstGeom>
-          <a:noFill/>
-        </p:spPr>
-        <p:txBody>
-          <a:bodyPr wrap="square">
-            <a:spAutoFit/>
-          </a:bodyPr>
-          <a:lstStyle/>
-          <a:p>
-            <a:pPr algn="l"/>
-            <a:r>
-              <a:rPr sz="1200" b="0" i="0">
-                <a:solidFill>
-                  <a:srgbClr val="9FB0AE"/>
-                </a:solidFill>
-                <a:latin typeface="Calibri"/>
-              </a:rPr>
-              <a:t>Evidencia fotográfica de casos y entregas</a:t>
-            </a:r>
-          </a:p>
-        </p:txBody>
-      </p:sp>
-      <p:sp>
-        <p:nvSpPr>
-          <p:cNvPr id="20" name="Oval 19"/>
-          <p:cNvSpPr/>
-          <p:nvPr/>
-        </p:nvSpPr>
-        <p:spPr>
-          <a:xfrm>
-            <a:off x="6035040" y="4133087"/>
-            <a:ext cx="118872" cy="118872"/>
-          </a:xfrm>
-          <a:prstGeom prst="ellipse">
-            <a:avLst/>
-          </a:prstGeom>
-          <a:solidFill>
-            <a:srgbClr val="14B8A8"/>
-          </a:solidFill>
-          <a:ln>
-            <a:noFill/>
-          </a:ln>
-          <a:effectLst/>
-        </p:spPr>
-        <p:style>
-          <a:lnRef idx="1">
-            <a:schemeClr val="accent1"/>
-          </a:lnRef>
-          <a:fillRef idx="3">
-            <a:schemeClr val="accent1"/>
-          </a:fillRef>
-          <a:effectRef idx="2">
-            <a:schemeClr val="accent1"/>
-          </a:effectRef>
-          <a:fontRef idx="minor">
-            <a:schemeClr val="lt1"/>
-          </a:fontRef>
-        </p:style>
-        <p:txBody>
-          <a:bodyPr rtlCol="0" anchor="ctr"/>
-          <a:lstStyle/>
-          <a:p>
-            <a:pPr algn="ctr"/>
-          </a:p>
-        </p:txBody>
-      </p:sp>
-      <p:sp>
-        <p:nvSpPr>
-          <p:cNvPr id="21" name="TextBox 20"/>
-          <p:cNvSpPr txBox="1"/>
-          <p:nvPr/>
-        </p:nvSpPr>
-        <p:spPr>
-          <a:xfrm>
-            <a:off x="6327648" y="3995927"/>
-            <a:ext cx="4937760" cy="365760"/>
-          </a:xfrm>
-          <a:prstGeom prst="rect">
-            <a:avLst/>
-          </a:prstGeom>
-          <a:noFill/>
-        </p:spPr>
-        <p:txBody>
-          <a:bodyPr wrap="square">
-            <a:spAutoFit/>
-          </a:bodyPr>
-          <a:lstStyle/>
-          <a:p>
-            <a:pPr algn="l"/>
-            <a:r>
-              <a:rPr sz="1550" b="1" i="0">
-                <a:solidFill>
-                  <a:srgbClr val="FFFFFF"/>
-                </a:solidFill>
-                <a:latin typeface="Calibri"/>
-              </a:rPr>
-              <a:t>Firebase Hosting</a:t>
-            </a:r>
-          </a:p>
-        </p:txBody>
-      </p:sp>
-      <p:sp>
-        <p:nvSpPr>
-          <p:cNvPr id="22" name="TextBox 21"/>
-          <p:cNvSpPr txBox="1"/>
-          <p:nvPr/>
-        </p:nvSpPr>
-        <p:spPr>
-          <a:xfrm>
-            <a:off x="6327648" y="4343399"/>
-            <a:ext cx="4937760" cy="457200"/>
-          </a:xfrm>
-          <a:prstGeom prst="rect">
-            <a:avLst/>
-          </a:prstGeom>
-          <a:noFill/>
-        </p:spPr>
-        <p:txBody>
-          <a:bodyPr wrap="square">
-            <a:spAutoFit/>
-          </a:bodyPr>
-          <a:lstStyle/>
-          <a:p>
-            <a:pPr algn="l"/>
-            <a:r>
-              <a:rPr sz="1200" b="0" i="0">
-                <a:solidFill>
-                  <a:srgbClr val="9FB0AE"/>
-                </a:solidFill>
-                <a:latin typeface="Calibri"/>
-              </a:rPr>
-              <a:t>Despliegue real en producción, hoy visitable</a:t>
-            </a:r>
-          </a:p>
-        </p:txBody>
-      </p:sp>
-      <p:sp>
-        <p:nvSpPr>
-          <p:cNvPr id="23" name="Oval 22"/>
-          <p:cNvSpPr/>
-          <p:nvPr/>
-        </p:nvSpPr>
-        <p:spPr>
-          <a:xfrm>
-            <a:off x="548640" y="5303520"/>
-            <a:ext cx="118872" cy="118872"/>
-          </a:xfrm>
-          <a:prstGeom prst="ellipse">
-            <a:avLst/>
-          </a:prstGeom>
-          <a:solidFill>
-            <a:srgbClr val="14B8A8"/>
-          </a:solidFill>
-          <a:ln>
-            <a:noFill/>
-          </a:ln>
-          <a:effectLst/>
-        </p:spPr>
-        <p:style>
-          <a:lnRef idx="1">
-            <a:schemeClr val="accent1"/>
-          </a:lnRef>
-          <a:fillRef idx="3">
-            <a:schemeClr val="accent1"/>
-          </a:fillRef>
-          <a:effectRef idx="2">
-            <a:schemeClr val="accent1"/>
-          </a:effectRef>
-          <a:fontRef idx="minor">
-            <a:schemeClr val="lt1"/>
-          </a:fontRef>
-        </p:style>
-        <p:txBody>
-          <a:bodyPr rtlCol="0" anchor="ctr"/>
-          <a:lstStyle/>
-          <a:p>
-            <a:pPr algn="ctr"/>
-          </a:p>
-        </p:txBody>
-      </p:sp>
-      <p:sp>
-        <p:nvSpPr>
-          <p:cNvPr id="24" name="TextBox 23"/>
-          <p:cNvSpPr txBox="1"/>
-          <p:nvPr/>
-        </p:nvSpPr>
-        <p:spPr>
-          <a:xfrm>
-            <a:off x="841248" y="5166360"/>
-            <a:ext cx="4937760" cy="365760"/>
-          </a:xfrm>
-          <a:prstGeom prst="rect">
-            <a:avLst/>
-          </a:prstGeom>
-          <a:noFill/>
-        </p:spPr>
-        <p:txBody>
-          <a:bodyPr wrap="square">
-            <a:spAutoFit/>
-          </a:bodyPr>
-          <a:lstStyle/>
-          <a:p>
-            <a:pPr algn="l"/>
-            <a:r>
-              <a:rPr sz="1550" b="1" i="0">
-                <a:solidFill>
-                  <a:srgbClr val="FFFFFF"/>
-                </a:solidFill>
-                <a:latin typeface="Calibri"/>
-              </a:rPr>
-              <a:t>Google Maps Platform</a:t>
-            </a:r>
-          </a:p>
-        </p:txBody>
-      </p:sp>
-      <p:sp>
-        <p:nvSpPr>
-          <p:cNvPr id="25" name="TextBox 24"/>
-          <p:cNvSpPr txBox="1"/>
-          <p:nvPr/>
-        </p:nvSpPr>
-        <p:spPr>
-          <a:xfrm>
-            <a:off x="841248" y="5513832"/>
-            <a:ext cx="4937760" cy="457200"/>
-          </a:xfrm>
-          <a:prstGeom prst="rect">
-            <a:avLst/>
-          </a:prstGeom>
-          <a:noFill/>
-        </p:spPr>
-        <p:txBody>
-          <a:bodyPr wrap="square">
-            <a:spAutoFit/>
-          </a:bodyPr>
-          <a:lstStyle/>
-          <a:p>
-            <a:pPr algn="l"/>
-            <a:r>
-              <a:rPr sz="1200" b="0" i="0">
-                <a:solidFill>
-                  <a:srgbClr val="9FB0AE"/>
-                </a:solidFill>
-                <a:latin typeface="Calibri"/>
-              </a:rPr>
-              <a:t>Mapa de casos con ajuste automático de vista</a:t>
-            </a:r>
-          </a:p>
-        </p:txBody>
-      </p:sp>
-      <p:sp>
-        <p:nvSpPr>
-          <p:cNvPr id="26" name="Oval 25"/>
-          <p:cNvSpPr/>
-          <p:nvPr/>
-        </p:nvSpPr>
-        <p:spPr>
-          <a:xfrm>
-            <a:off x="6035040" y="5303520"/>
-            <a:ext cx="118872" cy="118872"/>
-          </a:xfrm>
-          <a:prstGeom prst="ellipse">
-            <a:avLst/>
-          </a:prstGeom>
-          <a:solidFill>
-            <a:srgbClr val="14B8A8"/>
-          </a:solidFill>
-          <a:ln>
-            <a:noFill/>
-          </a:ln>
-          <a:effectLst/>
-        </p:spPr>
-        <p:style>
-          <a:lnRef idx="1">
-            <a:schemeClr val="accent1"/>
-          </a:lnRef>
-          <a:fillRef idx="3">
-            <a:schemeClr val="accent1"/>
-          </a:fillRef>
-          <a:effectRef idx="2">
-            <a:schemeClr val="accent1"/>
-          </a:effectRef>
-          <a:fontRef idx="minor">
-            <a:schemeClr val="lt1"/>
-          </a:fontRef>
-        </p:style>
-        <p:txBody>
-          <a:bodyPr rtlCol="0" anchor="ctr"/>
-          <a:lstStyle/>
-          <a:p>
-            <a:pPr algn="ctr"/>
-          </a:p>
-        </p:txBody>
-      </p:sp>
-      <p:sp>
-        <p:nvSpPr>
-          <p:cNvPr id="27" name="TextBox 26"/>
-          <p:cNvSpPr txBox="1"/>
-          <p:nvPr/>
-        </p:nvSpPr>
-        <p:spPr>
-          <a:xfrm>
-            <a:off x="6327648" y="5166360"/>
-            <a:ext cx="4937760" cy="365760"/>
-          </a:xfrm>
-          <a:prstGeom prst="rect">
-            <a:avLst/>
-          </a:prstGeom>
-          <a:noFill/>
-        </p:spPr>
-        <p:txBody>
-          <a:bodyPr wrap="square">
-            <a:spAutoFit/>
-          </a:bodyPr>
-          <a:lstStyle/>
-          <a:p>
-            <a:pPr algn="l"/>
-            <a:r>
-              <a:rPr sz="1550" b="1" i="0">
-                <a:solidFill>
-                  <a:srgbClr val="FFFFFF"/>
-                </a:solidFill>
-                <a:latin typeface="Calibri"/>
-              </a:rPr>
-              <a:t>Gemini API</a:t>
-            </a:r>
-          </a:p>
-        </p:txBody>
-      </p:sp>
-      <p:sp>
-        <p:nvSpPr>
-          <p:cNvPr id="28" name="TextBox 27"/>
-          <p:cNvSpPr txBox="1"/>
-          <p:nvPr/>
-        </p:nvSpPr>
-        <p:spPr>
-          <a:xfrm>
-            <a:off x="6327648" y="5513832"/>
-            <a:ext cx="4937760" cy="457200"/>
-          </a:xfrm>
-          <a:prstGeom prst="rect">
-            <a:avLst/>
-          </a:prstGeom>
-          <a:noFill/>
-        </p:spPr>
-        <p:txBody>
-          <a:bodyPr wrap="square">
-            <a:spAutoFit/>
-          </a:bodyPr>
-          <a:lstStyle/>
-          <a:p>
-            <a:pPr algn="l"/>
-            <a:r>
-              <a:rPr sz="1200" b="0" i="0">
-                <a:solidFill>
-                  <a:srgbClr val="9FB0AE"/>
-                </a:solidFill>
-                <a:latin typeface="Calibri"/>
-              </a:rPr>
-              <a:t>Narración de este video generada con texto a voz</a:t>
-            </a:r>
-          </a:p>
-        </p:txBody>
-      </p:sp>
-      <p:sp>
-        <p:nvSpPr>
-          <p:cNvPr id="29" name="TextBox 28"/>
-          <p:cNvSpPr txBox="1"/>
-          <p:nvPr/>
-        </p:nvSpPr>
-        <p:spPr>
-          <a:xfrm>
-            <a:off x="11247120" y="6446520"/>
-            <a:ext cx="731520" cy="320040"/>
-          </a:xfrm>
-          <a:prstGeom prst="rect">
-            <a:avLst/>
-          </a:prstGeom>
-          <a:noFill/>
-        </p:spPr>
-        <p:txBody>
-          <a:bodyPr wrap="square">
-            <a:spAutoFit/>
-          </a:bodyPr>
-          <a:lstStyle/>
-          <a:p>
-            <a:pPr algn="r"/>
-            <a:r>
-              <a:rPr sz="1100" b="0" i="0">
-                <a:solidFill>
-                  <a:srgbClr val="9FB0AE"/>
-                </a:solidFill>
-                <a:latin typeface="Calibri"/>
-              </a:rPr>
-              <a:t>4/7</a:t>
+              <a:t>4/9</a:t>
             </a:r>
           </a:p>
         </p:txBody>
@@ -5685,6 +6075,28 @@
   <p:clrMapOvr>
     <a:masterClrMapping/>
   </p:clrMapOvr>
+  <p:timing>
+    <p:tnLst>
+      <p:par>
+        <p:cTn id="1" dur="indefinite" restart="never" nodeType="tmRoot">
+          <p:childTnLst>
+            <p:video>
+              <p:cMediaNode vol="80000">
+                <p:cTn id="2" fill="hold" display="0">
+                  <p:stCondLst>
+                    <p:cond delay="indefinite"/>
+                  </p:stCondLst>
+                </p:cTn>
+                <p:tgtEl>
+                  <p:spTgt spid="11"/>
+                </p:tgtEl>
+              </p:cMediaNode>
+            </p:video>
+          </p:childTnLst>
+        </p:cTn>
+      </p:par>
+    </p:tnLst>
+  </p:timing>
 </p:sld>
 </file>
 
@@ -5995,7 +6407,7 @@
         <p:spPr>
           <a:xfrm>
             <a:off x="1051560" y="1161288"/>
-            <a:ext cx="5486400" cy="365760"/>
+            <a:ext cx="6400800" cy="365760"/>
           </a:xfrm>
           <a:prstGeom prst="rect">
             <a:avLst/>
@@ -6016,7 +6428,7 @@
                 </a:solidFill>
                 <a:latin typeface="Calibri"/>
               </a:rPr>
-              <a:t>DEMO EN VIVO · 1:30–2:00</a:t>
+              <a:t>TECNOLOGÍAS DE GOOGLE · 1:00–1:30</a:t>
             </a:r>
           </a:p>
         </p:txBody>
@@ -6045,75 +6457,36 @@
           <a:p>
             <a:pPr algn="l"/>
             <a:r>
-              <a:rPr sz="3300" b="1" i="0">
+              <a:rPr sz="2700" b="1" i="0">
                 <a:solidFill>
                   <a:srgbClr val="FFFFFF"/>
                 </a:solidFill>
                 <a:latin typeface="Calibri"/>
               </a:rPr>
-              <a:t>No es una maqueta. Es un proyecto real, hoy.</a:t>
-            </a:r>
-          </a:p>
-        </p:txBody>
-      </p:sp>
-      <p:sp>
-        <p:nvSpPr>
-          <p:cNvPr id="11" name="TextBox 10"/>
-          <p:cNvSpPr txBox="1"/>
-          <p:nvPr/>
-        </p:nvSpPr>
-        <p:spPr>
-          <a:xfrm>
-            <a:off x="548640" y="2606040"/>
-            <a:ext cx="9601200" cy="731520"/>
-          </a:xfrm>
-          <a:prstGeom prst="rect">
-            <a:avLst/>
-          </a:prstGeom>
-          <a:noFill/>
-        </p:spPr>
-        <p:txBody>
-          <a:bodyPr wrap="square">
-            <a:spAutoFit/>
-          </a:bodyPr>
-          <a:lstStyle/>
-          <a:p>
-            <a:pPr algn="l"/>
-            <a:r>
-              <a:rPr sz="1600" b="0" i="0">
-                <a:solidFill>
-                  <a:srgbClr val="9FB0AE"/>
-                </a:solidFill>
-                <a:latin typeface="Calibri"/>
-              </a:rPr>
-              <a:t>19 casos reales, en 10 municipios distintos, corriendo en un proyecto Firebase real — no en una simulación local.</a:t>
-            </a:r>
-          </a:p>
-        </p:txBody>
-      </p:sp>
-      <p:sp>
-        <p:nvSpPr>
-          <p:cNvPr id="12" name="Rounded Rectangle 11"/>
+              <a:t>Construido sobre el ecosistema de Google, de verdad, en producción.</a:t>
+            </a:r>
+          </a:p>
+        </p:txBody>
+      </p:sp>
+      <p:sp>
+        <p:nvSpPr>
+          <p:cNvPr id="11" name="Oval 10"/>
           <p:cNvSpPr/>
           <p:nvPr/>
         </p:nvSpPr>
         <p:spPr>
           <a:xfrm>
-            <a:off x="548640" y="3520440"/>
-            <a:ext cx="6675120" cy="868680"/>
-          </a:xfrm>
-          <a:prstGeom prst="roundRect">
-            <a:avLst>
-              <a:gd name="adj" fmla="val 8000"/>
-            </a:avLst>
+            <a:off x="548640" y="2871216"/>
+            <a:ext cx="118872" cy="118872"/>
+          </a:xfrm>
+          <a:prstGeom prst="ellipse">
+            <a:avLst/>
           </a:prstGeom>
           <a:solidFill>
-            <a:srgbClr val="162A47"/>
+            <a:srgbClr val="14B8A8"/>
           </a:solidFill>
-          <a:ln w="12700">
-            <a:solidFill>
-              <a:srgbClr val="273C5C"/>
-            </a:solidFill>
+          <a:ln>
+            <a:noFill/>
           </a:ln>
           <a:effectLst/>
         </p:spPr>
@@ -6132,40 +6505,23 @@
           </a:fontRef>
         </p:style>
         <p:txBody>
-          <a:bodyPr rtlCol="0" anchor="ctr" wrap="square"/>
+          <a:bodyPr rtlCol="0" anchor="ctr"/>
           <a:lstStyle/>
           <a:p>
             <a:pPr algn="ctr"/>
-            <a:r>
-              <a:rPr sz="1400">
-                <a:solidFill>
-                  <a:srgbClr val="14B8A8"/>
-                </a:solidFill>
-              </a:rPr>
-              <a:t>●  </a:t>
-            </a:r>
-            <a:r>
-              <a:rPr sz="2400" b="1">
-                <a:solidFill>
-                  <a:srgbClr val="FFFFFF"/>
-                </a:solidFill>
-                <a:latin typeface="Consolas"/>
-              </a:rPr>
-              <a:t>reactivaterritorio.web.app</a:t>
-            </a:r>
-          </a:p>
-        </p:txBody>
-      </p:sp>
-      <p:sp>
-        <p:nvSpPr>
-          <p:cNvPr id="13" name="TextBox 12"/>
+          </a:p>
+        </p:txBody>
+      </p:sp>
+      <p:sp>
+        <p:nvSpPr>
+          <p:cNvPr id="12" name="TextBox 11"/>
           <p:cNvSpPr txBox="1"/>
           <p:nvPr/>
         </p:nvSpPr>
         <p:spPr>
           <a:xfrm>
-            <a:off x="548640" y="4663440"/>
-            <a:ext cx="10058400" cy="731520"/>
+            <a:off x="841248" y="2734056"/>
+            <a:ext cx="4937760" cy="365760"/>
           </a:xfrm>
           <a:prstGeom prst="rect">
             <a:avLst/>
@@ -6180,27 +6536,27 @@
           <a:p>
             <a:pPr algn="l"/>
             <a:r>
-              <a:rPr sz="1350" b="0" i="0">
-                <a:solidFill>
-                  <a:srgbClr val="9FB0AE"/>
+              <a:rPr sz="1550" b="1" i="0">
+                <a:solidFill>
+                  <a:srgbClr val="FFFFFF"/>
                 </a:solidFill>
                 <a:latin typeface="Calibri"/>
               </a:rPr>
-              <a:t>Cuentas demo: lider@demo.reactiva  ·  org@demo.reactiva  ·  admin@demo.reactiva   —   contraseña: demo1234</a:t>
-            </a:r>
-          </a:p>
-        </p:txBody>
-      </p:sp>
-      <p:sp>
-        <p:nvSpPr>
-          <p:cNvPr id="14" name="TextBox 13"/>
+              <a:t>Firebase Authentication</a:t>
+            </a:r>
+          </a:p>
+        </p:txBody>
+      </p:sp>
+      <p:sp>
+        <p:nvSpPr>
+          <p:cNvPr id="13" name="TextBox 12"/>
           <p:cNvSpPr txBox="1"/>
           <p:nvPr/>
         </p:nvSpPr>
         <p:spPr>
           <a:xfrm>
-            <a:off x="11247120" y="6446520"/>
-            <a:ext cx="731520" cy="320040"/>
+            <a:off x="841248" y="3081528"/>
+            <a:ext cx="4937760" cy="457200"/>
           </a:xfrm>
           <a:prstGeom prst="rect">
             <a:avLst/>
@@ -6213,15 +6569,620 @@
           </a:bodyPr>
           <a:lstStyle/>
           <a:p>
-            <a:pPr algn="r"/>
-            <a:r>
-              <a:rPr sz="1100" b="0" i="0">
+            <a:pPr algn="l"/>
+            <a:r>
+              <a:rPr sz="1200" b="0" i="0">
                 <a:solidFill>
                   <a:srgbClr val="9FB0AE"/>
                 </a:solidFill>
                 <a:latin typeface="Calibri"/>
               </a:rPr>
-              <a:t>5/7</a:t>
+              <a:t>Cuentas reales, recuperación de contraseña, 2FA con TOTP</a:t>
+            </a:r>
+          </a:p>
+        </p:txBody>
+      </p:sp>
+      <p:sp>
+        <p:nvSpPr>
+          <p:cNvPr id="14" name="Oval 13"/>
+          <p:cNvSpPr/>
+          <p:nvPr/>
+        </p:nvSpPr>
+        <p:spPr>
+          <a:xfrm>
+            <a:off x="6035040" y="2871216"/>
+            <a:ext cx="118872" cy="118872"/>
+          </a:xfrm>
+          <a:prstGeom prst="ellipse">
+            <a:avLst/>
+          </a:prstGeom>
+          <a:solidFill>
+            <a:srgbClr val="14B8A8"/>
+          </a:solidFill>
+          <a:ln>
+            <a:noFill/>
+          </a:ln>
+          <a:effectLst/>
+        </p:spPr>
+        <p:style>
+          <a:lnRef idx="1">
+            <a:schemeClr val="accent1"/>
+          </a:lnRef>
+          <a:fillRef idx="3">
+            <a:schemeClr val="accent1"/>
+          </a:fillRef>
+          <a:effectRef idx="2">
+            <a:schemeClr val="accent1"/>
+          </a:effectRef>
+          <a:fontRef idx="minor">
+            <a:schemeClr val="lt1"/>
+          </a:fontRef>
+        </p:style>
+        <p:txBody>
+          <a:bodyPr rtlCol="0" anchor="ctr"/>
+          <a:lstStyle/>
+          <a:p>
+            <a:pPr algn="ctr"/>
+          </a:p>
+        </p:txBody>
+      </p:sp>
+      <p:sp>
+        <p:nvSpPr>
+          <p:cNvPr id="15" name="TextBox 14"/>
+          <p:cNvSpPr txBox="1"/>
+          <p:nvPr/>
+        </p:nvSpPr>
+        <p:spPr>
+          <a:xfrm>
+            <a:off x="6327648" y="2734056"/>
+            <a:ext cx="4937760" cy="365760"/>
+          </a:xfrm>
+          <a:prstGeom prst="rect">
+            <a:avLst/>
+          </a:prstGeom>
+          <a:noFill/>
+        </p:spPr>
+        <p:txBody>
+          <a:bodyPr wrap="square">
+            <a:spAutoFit/>
+          </a:bodyPr>
+          <a:lstStyle/>
+          <a:p>
+            <a:pPr algn="l"/>
+            <a:r>
+              <a:rPr sz="1550" b="1" i="0">
+                <a:solidFill>
+                  <a:srgbClr val="FFFFFF"/>
+                </a:solidFill>
+                <a:latin typeface="Calibri"/>
+              </a:rPr>
+              <a:t>Cloud Firestore</a:t>
+            </a:r>
+          </a:p>
+        </p:txBody>
+      </p:sp>
+      <p:sp>
+        <p:nvSpPr>
+          <p:cNvPr id="16" name="TextBox 15"/>
+          <p:cNvSpPr txBox="1"/>
+          <p:nvPr/>
+        </p:nvSpPr>
+        <p:spPr>
+          <a:xfrm>
+            <a:off x="6327648" y="3081528"/>
+            <a:ext cx="4937760" cy="457200"/>
+          </a:xfrm>
+          <a:prstGeom prst="rect">
+            <a:avLst/>
+          </a:prstGeom>
+          <a:noFill/>
+        </p:spPr>
+        <p:txBody>
+          <a:bodyPr wrap="square">
+            <a:spAutoFit/>
+          </a:bodyPr>
+          <a:lstStyle/>
+          <a:p>
+            <a:pPr algn="l"/>
+            <a:r>
+              <a:rPr sz="1200" b="0" i="0">
+                <a:solidFill>
+                  <a:srgbClr val="9FB0AE"/>
+                </a:solidFill>
+                <a:latin typeface="Calibri"/>
+              </a:rPr>
+              <a:t>Base de datos en tiempo real, con caché offline persistente</a:t>
+            </a:r>
+          </a:p>
+        </p:txBody>
+      </p:sp>
+      <p:sp>
+        <p:nvSpPr>
+          <p:cNvPr id="17" name="Oval 16"/>
+          <p:cNvSpPr/>
+          <p:nvPr/>
+        </p:nvSpPr>
+        <p:spPr>
+          <a:xfrm>
+            <a:off x="548640" y="4041648"/>
+            <a:ext cx="118872" cy="118872"/>
+          </a:xfrm>
+          <a:prstGeom prst="ellipse">
+            <a:avLst/>
+          </a:prstGeom>
+          <a:solidFill>
+            <a:srgbClr val="14B8A8"/>
+          </a:solidFill>
+          <a:ln>
+            <a:noFill/>
+          </a:ln>
+          <a:effectLst/>
+        </p:spPr>
+        <p:style>
+          <a:lnRef idx="1">
+            <a:schemeClr val="accent1"/>
+          </a:lnRef>
+          <a:fillRef idx="3">
+            <a:schemeClr val="accent1"/>
+          </a:fillRef>
+          <a:effectRef idx="2">
+            <a:schemeClr val="accent1"/>
+          </a:effectRef>
+          <a:fontRef idx="minor">
+            <a:schemeClr val="lt1"/>
+          </a:fontRef>
+        </p:style>
+        <p:txBody>
+          <a:bodyPr rtlCol="0" anchor="ctr"/>
+          <a:lstStyle/>
+          <a:p>
+            <a:pPr algn="ctr"/>
+          </a:p>
+        </p:txBody>
+      </p:sp>
+      <p:sp>
+        <p:nvSpPr>
+          <p:cNvPr id="18" name="TextBox 17"/>
+          <p:cNvSpPr txBox="1"/>
+          <p:nvPr/>
+        </p:nvSpPr>
+        <p:spPr>
+          <a:xfrm>
+            <a:off x="841248" y="3904488"/>
+            <a:ext cx="4937760" cy="365760"/>
+          </a:xfrm>
+          <a:prstGeom prst="rect">
+            <a:avLst/>
+          </a:prstGeom>
+          <a:noFill/>
+        </p:spPr>
+        <p:txBody>
+          <a:bodyPr wrap="square">
+            <a:spAutoFit/>
+          </a:bodyPr>
+          <a:lstStyle/>
+          <a:p>
+            <a:pPr algn="l"/>
+            <a:r>
+              <a:rPr sz="1550" b="1" i="0">
+                <a:solidFill>
+                  <a:srgbClr val="FFFFFF"/>
+                </a:solidFill>
+                <a:latin typeface="Calibri"/>
+              </a:rPr>
+              <a:t>Firebase Storage</a:t>
+            </a:r>
+          </a:p>
+        </p:txBody>
+      </p:sp>
+      <p:sp>
+        <p:nvSpPr>
+          <p:cNvPr id="19" name="TextBox 18"/>
+          <p:cNvSpPr txBox="1"/>
+          <p:nvPr/>
+        </p:nvSpPr>
+        <p:spPr>
+          <a:xfrm>
+            <a:off x="841248" y="4251960"/>
+            <a:ext cx="4937760" cy="457200"/>
+          </a:xfrm>
+          <a:prstGeom prst="rect">
+            <a:avLst/>
+          </a:prstGeom>
+          <a:noFill/>
+        </p:spPr>
+        <p:txBody>
+          <a:bodyPr wrap="square">
+            <a:spAutoFit/>
+          </a:bodyPr>
+          <a:lstStyle/>
+          <a:p>
+            <a:pPr algn="l"/>
+            <a:r>
+              <a:rPr sz="1200" b="0" i="0">
+                <a:solidFill>
+                  <a:srgbClr val="9FB0AE"/>
+                </a:solidFill>
+                <a:latin typeface="Calibri"/>
+              </a:rPr>
+              <a:t>Evidencia fotográfica de casos y entregas</a:t>
+            </a:r>
+          </a:p>
+        </p:txBody>
+      </p:sp>
+      <p:sp>
+        <p:nvSpPr>
+          <p:cNvPr id="20" name="Oval 19"/>
+          <p:cNvSpPr/>
+          <p:nvPr/>
+        </p:nvSpPr>
+        <p:spPr>
+          <a:xfrm>
+            <a:off x="6035040" y="4041648"/>
+            <a:ext cx="118872" cy="118872"/>
+          </a:xfrm>
+          <a:prstGeom prst="ellipse">
+            <a:avLst/>
+          </a:prstGeom>
+          <a:solidFill>
+            <a:srgbClr val="14B8A8"/>
+          </a:solidFill>
+          <a:ln>
+            <a:noFill/>
+          </a:ln>
+          <a:effectLst/>
+        </p:spPr>
+        <p:style>
+          <a:lnRef idx="1">
+            <a:schemeClr val="accent1"/>
+          </a:lnRef>
+          <a:fillRef idx="3">
+            <a:schemeClr val="accent1"/>
+          </a:fillRef>
+          <a:effectRef idx="2">
+            <a:schemeClr val="accent1"/>
+          </a:effectRef>
+          <a:fontRef idx="minor">
+            <a:schemeClr val="lt1"/>
+          </a:fontRef>
+        </p:style>
+        <p:txBody>
+          <a:bodyPr rtlCol="0" anchor="ctr"/>
+          <a:lstStyle/>
+          <a:p>
+            <a:pPr algn="ctr"/>
+          </a:p>
+        </p:txBody>
+      </p:sp>
+      <p:sp>
+        <p:nvSpPr>
+          <p:cNvPr id="21" name="TextBox 20"/>
+          <p:cNvSpPr txBox="1"/>
+          <p:nvPr/>
+        </p:nvSpPr>
+        <p:spPr>
+          <a:xfrm>
+            <a:off x="6327648" y="3904488"/>
+            <a:ext cx="4937760" cy="365760"/>
+          </a:xfrm>
+          <a:prstGeom prst="rect">
+            <a:avLst/>
+          </a:prstGeom>
+          <a:noFill/>
+        </p:spPr>
+        <p:txBody>
+          <a:bodyPr wrap="square">
+            <a:spAutoFit/>
+          </a:bodyPr>
+          <a:lstStyle/>
+          <a:p>
+            <a:pPr algn="l"/>
+            <a:r>
+              <a:rPr sz="1550" b="1" i="0">
+                <a:solidFill>
+                  <a:srgbClr val="FFFFFF"/>
+                </a:solidFill>
+                <a:latin typeface="Calibri"/>
+              </a:rPr>
+              <a:t>Firebase Hosting</a:t>
+            </a:r>
+          </a:p>
+        </p:txBody>
+      </p:sp>
+      <p:sp>
+        <p:nvSpPr>
+          <p:cNvPr id="22" name="TextBox 21"/>
+          <p:cNvSpPr txBox="1"/>
+          <p:nvPr/>
+        </p:nvSpPr>
+        <p:spPr>
+          <a:xfrm>
+            <a:off x="6327648" y="4251960"/>
+            <a:ext cx="4937760" cy="457200"/>
+          </a:xfrm>
+          <a:prstGeom prst="rect">
+            <a:avLst/>
+          </a:prstGeom>
+          <a:noFill/>
+        </p:spPr>
+        <p:txBody>
+          <a:bodyPr wrap="square">
+            <a:spAutoFit/>
+          </a:bodyPr>
+          <a:lstStyle/>
+          <a:p>
+            <a:pPr algn="l"/>
+            <a:r>
+              <a:rPr sz="1200" b="0" i="0">
+                <a:solidFill>
+                  <a:srgbClr val="9FB0AE"/>
+                </a:solidFill>
+                <a:latin typeface="Calibri"/>
+              </a:rPr>
+              <a:t>Despliegue real en producción, hoy visitable</a:t>
+            </a:r>
+          </a:p>
+        </p:txBody>
+      </p:sp>
+      <p:sp>
+        <p:nvSpPr>
+          <p:cNvPr id="23" name="Oval 22"/>
+          <p:cNvSpPr/>
+          <p:nvPr/>
+        </p:nvSpPr>
+        <p:spPr>
+          <a:xfrm>
+            <a:off x="548640" y="5212079"/>
+            <a:ext cx="118872" cy="118872"/>
+          </a:xfrm>
+          <a:prstGeom prst="ellipse">
+            <a:avLst/>
+          </a:prstGeom>
+          <a:solidFill>
+            <a:srgbClr val="14B8A8"/>
+          </a:solidFill>
+          <a:ln>
+            <a:noFill/>
+          </a:ln>
+          <a:effectLst/>
+        </p:spPr>
+        <p:style>
+          <a:lnRef idx="1">
+            <a:schemeClr val="accent1"/>
+          </a:lnRef>
+          <a:fillRef idx="3">
+            <a:schemeClr val="accent1"/>
+          </a:fillRef>
+          <a:effectRef idx="2">
+            <a:schemeClr val="accent1"/>
+          </a:effectRef>
+          <a:fontRef idx="minor">
+            <a:schemeClr val="lt1"/>
+          </a:fontRef>
+        </p:style>
+        <p:txBody>
+          <a:bodyPr rtlCol="0" anchor="ctr"/>
+          <a:lstStyle/>
+          <a:p>
+            <a:pPr algn="ctr"/>
+          </a:p>
+        </p:txBody>
+      </p:sp>
+      <p:sp>
+        <p:nvSpPr>
+          <p:cNvPr id="24" name="TextBox 23"/>
+          <p:cNvSpPr txBox="1"/>
+          <p:nvPr/>
+        </p:nvSpPr>
+        <p:spPr>
+          <a:xfrm>
+            <a:off x="841248" y="5074919"/>
+            <a:ext cx="4937760" cy="365760"/>
+          </a:xfrm>
+          <a:prstGeom prst="rect">
+            <a:avLst/>
+          </a:prstGeom>
+          <a:noFill/>
+        </p:spPr>
+        <p:txBody>
+          <a:bodyPr wrap="square">
+            <a:spAutoFit/>
+          </a:bodyPr>
+          <a:lstStyle/>
+          <a:p>
+            <a:pPr algn="l"/>
+            <a:r>
+              <a:rPr sz="1550" b="1" i="0">
+                <a:solidFill>
+                  <a:srgbClr val="FFFFFF"/>
+                </a:solidFill>
+                <a:latin typeface="Calibri"/>
+              </a:rPr>
+              <a:t>Google Maps Platform</a:t>
+            </a:r>
+          </a:p>
+        </p:txBody>
+      </p:sp>
+      <p:sp>
+        <p:nvSpPr>
+          <p:cNvPr id="25" name="TextBox 24"/>
+          <p:cNvSpPr txBox="1"/>
+          <p:nvPr/>
+        </p:nvSpPr>
+        <p:spPr>
+          <a:xfrm>
+            <a:off x="841248" y="5422391"/>
+            <a:ext cx="4937760" cy="457200"/>
+          </a:xfrm>
+          <a:prstGeom prst="rect">
+            <a:avLst/>
+          </a:prstGeom>
+          <a:noFill/>
+        </p:spPr>
+        <p:txBody>
+          <a:bodyPr wrap="square">
+            <a:spAutoFit/>
+          </a:bodyPr>
+          <a:lstStyle/>
+          <a:p>
+            <a:pPr algn="l"/>
+            <a:r>
+              <a:rPr sz="1200" b="0" i="0">
+                <a:solidFill>
+                  <a:srgbClr val="9FB0AE"/>
+                </a:solidFill>
+                <a:latin typeface="Calibri"/>
+              </a:rPr>
+              <a:t>Mapa de casos con ajuste automático de vista</a:t>
+            </a:r>
+          </a:p>
+        </p:txBody>
+      </p:sp>
+      <p:sp>
+        <p:nvSpPr>
+          <p:cNvPr id="26" name="Oval 25"/>
+          <p:cNvSpPr/>
+          <p:nvPr/>
+        </p:nvSpPr>
+        <p:spPr>
+          <a:xfrm>
+            <a:off x="6035040" y="5212079"/>
+            <a:ext cx="118872" cy="118872"/>
+          </a:xfrm>
+          <a:prstGeom prst="ellipse">
+            <a:avLst/>
+          </a:prstGeom>
+          <a:solidFill>
+            <a:srgbClr val="14B8A8"/>
+          </a:solidFill>
+          <a:ln>
+            <a:noFill/>
+          </a:ln>
+          <a:effectLst/>
+        </p:spPr>
+        <p:style>
+          <a:lnRef idx="1">
+            <a:schemeClr val="accent1"/>
+          </a:lnRef>
+          <a:fillRef idx="3">
+            <a:schemeClr val="accent1"/>
+          </a:fillRef>
+          <a:effectRef idx="2">
+            <a:schemeClr val="accent1"/>
+          </a:effectRef>
+          <a:fontRef idx="minor">
+            <a:schemeClr val="lt1"/>
+          </a:fontRef>
+        </p:style>
+        <p:txBody>
+          <a:bodyPr rtlCol="0" anchor="ctr"/>
+          <a:lstStyle/>
+          <a:p>
+            <a:pPr algn="ctr"/>
+          </a:p>
+        </p:txBody>
+      </p:sp>
+      <p:sp>
+        <p:nvSpPr>
+          <p:cNvPr id="27" name="TextBox 26"/>
+          <p:cNvSpPr txBox="1"/>
+          <p:nvPr/>
+        </p:nvSpPr>
+        <p:spPr>
+          <a:xfrm>
+            <a:off x="6327648" y="5074919"/>
+            <a:ext cx="4937760" cy="365760"/>
+          </a:xfrm>
+          <a:prstGeom prst="rect">
+            <a:avLst/>
+          </a:prstGeom>
+          <a:noFill/>
+        </p:spPr>
+        <p:txBody>
+          <a:bodyPr wrap="square">
+            <a:spAutoFit/>
+          </a:bodyPr>
+          <a:lstStyle/>
+          <a:p>
+            <a:pPr algn="l"/>
+            <a:r>
+              <a:rPr sz="1550" b="1" i="0">
+                <a:solidFill>
+                  <a:srgbClr val="FFFFFF"/>
+                </a:solidFill>
+                <a:latin typeface="Calibri"/>
+              </a:rPr>
+              <a:t>Gemini API</a:t>
+            </a:r>
+          </a:p>
+        </p:txBody>
+      </p:sp>
+      <p:sp>
+        <p:nvSpPr>
+          <p:cNvPr id="28" name="TextBox 27"/>
+          <p:cNvSpPr txBox="1"/>
+          <p:nvPr/>
+        </p:nvSpPr>
+        <p:spPr>
+          <a:xfrm>
+            <a:off x="6327648" y="5422391"/>
+            <a:ext cx="4937760" cy="457200"/>
+          </a:xfrm>
+          <a:prstGeom prst="rect">
+            <a:avLst/>
+          </a:prstGeom>
+          <a:noFill/>
+        </p:spPr>
+        <p:txBody>
+          <a:bodyPr wrap="square">
+            <a:spAutoFit/>
+          </a:bodyPr>
+          <a:lstStyle/>
+          <a:p>
+            <a:pPr algn="l"/>
+            <a:r>
+              <a:rPr sz="1200" b="0" i="0">
+                <a:solidFill>
+                  <a:srgbClr val="9FB0AE"/>
+                </a:solidFill>
+                <a:latin typeface="Calibri"/>
+              </a:rPr>
+              <a:t>Narración de este video generada con texto a voz</a:t>
+            </a:r>
+          </a:p>
+        </p:txBody>
+      </p:sp>
+      <p:sp>
+        <p:nvSpPr>
+          <p:cNvPr id="29" name="TextBox 28"/>
+          <p:cNvSpPr txBox="1"/>
+          <p:nvPr/>
+        </p:nvSpPr>
+        <p:spPr>
+          <a:xfrm>
+            <a:off x="11109960" y="6446520"/>
+            <a:ext cx="822960" cy="320040"/>
+          </a:xfrm>
+          <a:prstGeom prst="rect">
+            <a:avLst/>
+          </a:prstGeom>
+          <a:noFill/>
+        </p:spPr>
+        <p:txBody>
+          <a:bodyPr wrap="square">
+            <a:spAutoFit/>
+          </a:bodyPr>
+          <a:lstStyle/>
+          <a:p>
+            <a:pPr algn="r"/>
+            <a:r>
+              <a:rPr sz="1100" b="0" i="0">
+                <a:solidFill>
+                  <a:srgbClr val="9FB0AE"/>
+                </a:solidFill>
+                <a:latin typeface="Calibri"/>
+              </a:rPr>
+              <a:t>5/9</a:t>
             </a:r>
           </a:p>
         </p:txBody>
@@ -6541,7 +7502,7 @@
         <p:spPr>
           <a:xfrm>
             <a:off x="1051560" y="1161288"/>
-            <a:ext cx="5486400" cy="365760"/>
+            <a:ext cx="6400800" cy="365760"/>
           </a:xfrm>
           <a:prstGeom prst="rect">
             <a:avLst/>
@@ -6562,7 +7523,7 @@
                 </a:solidFill>
                 <a:latin typeface="Calibri"/>
               </a:rPr>
-              <a:t>GITHUB · 2:00–2:30</a:t>
+              <a:t>DEMO EN VIVO · 1:30–2:00</a:t>
             </a:r>
           </a:p>
         </p:txBody>
@@ -6576,7 +7537,7 @@
         <p:spPr>
           <a:xfrm>
             <a:off x="548640" y="1691640"/>
-            <a:ext cx="10515600" cy="1097280"/>
+            <a:ext cx="10515600" cy="914400"/>
           </a:xfrm>
           <a:prstGeom prst="rect">
             <a:avLst/>
@@ -6591,13 +7552,13 @@
           <a:p>
             <a:pPr algn="l"/>
             <a:r>
-              <a:rPr sz="3300" b="1" i="0">
+              <a:rPr sz="3000" b="1" i="0">
                 <a:solidFill>
                   <a:srgbClr val="FFFFFF"/>
                 </a:solidFill>
                 <a:latin typeface="Calibri"/>
               </a:rPr>
-              <a:t>Código público, documentado de punta a punta.</a:t>
+              <a:t>No es una maqueta. Es un proyecto real, hoy.</a:t>
             </a:r>
           </a:p>
         </p:txBody>
@@ -6610,8 +7571,8 @@
         </p:nvSpPr>
         <p:spPr>
           <a:xfrm>
-            <a:off x="548640" y="2743200"/>
-            <a:ext cx="8778240" cy="868680"/>
+            <a:off x="548640" y="2697480"/>
+            <a:ext cx="4846320" cy="777240"/>
           </a:xfrm>
           <a:prstGeom prst="roundRect">
             <a:avLst>
@@ -6648,21 +7609,13 @@
           <a:p>
             <a:pPr algn="ctr"/>
             <a:r>
-              <a:rPr sz="1200">
-                <a:solidFill>
-                  <a:srgbClr val="14B8A8"/>
-                </a:solidFill>
-              </a:rPr>
-              <a:t>●  </a:t>
-            </a:r>
-            <a:r>
-              <a:rPr sz="1900" b="1">
+              <a:rPr sz="1800" b="1">
                 <a:solidFill>
                   <a:srgbClr val="FFFFFF"/>
                 </a:solidFill>
                 <a:latin typeface="Consolas"/>
               </a:rPr>
-              <a:t>github.com/lnieto044/ReActiva_Territorio</a:t>
+              <a:t>reactivaterritorio.web.app</a:t>
             </a:r>
           </a:p>
         </p:txBody>
@@ -6675,8 +7628,8 @@
         </p:nvSpPr>
         <p:spPr>
           <a:xfrm>
-            <a:off x="548640" y="3977639"/>
-            <a:ext cx="3383280" cy="640080"/>
+            <a:off x="548640" y="3611880"/>
+            <a:ext cx="4846320" cy="1188720"/>
           </a:xfrm>
           <a:prstGeom prst="rect">
             <a:avLst/>
@@ -6691,27 +7644,47 @@
           <a:p>
             <a:pPr algn="l"/>
             <a:r>
-              <a:rPr sz="2800" b="1" i="0">
-                <a:solidFill>
-                  <a:srgbClr val="FFFFFF"/>
+              <a:rPr sz="1250" b="0" i="0">
+                <a:solidFill>
+                  <a:srgbClr val="9FB0AE"/>
                 </a:solidFill>
                 <a:latin typeface="Calibri"/>
               </a:rPr>
-              <a:t>React · TS</a:t>
-            </a:r>
-          </a:p>
-        </p:txBody>
-      </p:sp>
-      <p:sp>
-        <p:nvSpPr>
-          <p:cNvPr id="13" name="TextBox 12"/>
+              <a:t>Cuentas demo:
+lider@demo.reactiva · org@demo.reactiva · admin@demo.reactiva
+contraseña: demo1234</a:t>
+            </a:r>
+          </a:p>
+        </p:txBody>
+      </p:sp>
+      <p:graphicFrame>
+        <p:nvGraphicFramePr>
+          <p:cNvPr id="13" name="Chart 12"/>
+          <p:cNvGraphicFramePr>
+            <a:graphicFrameLocks noGrp="1"/>
+          </p:cNvGraphicFramePr>
+          <p:nvPr/>
+        </p:nvGraphicFramePr>
+        <p:xfrm>
+          <a:off x="5760720" y="2697480"/>
+          <a:ext cx="5669280" cy="3383280"/>
+        </p:xfrm>
+        <a:graphic>
+          <a:graphicData uri="http://schemas.openxmlformats.org/drawingml/2006/chart">
+            <c:chart xmlns:c="http://schemas.openxmlformats.org/drawingml/2006/chart" r:id="rId3"/>
+          </a:graphicData>
+        </a:graphic>
+      </p:graphicFrame>
+      <p:sp>
+        <p:nvSpPr>
+          <p:cNvPr id="14" name="TextBox 13"/>
           <p:cNvSpPr txBox="1"/>
           <p:nvPr/>
         </p:nvSpPr>
         <p:spPr>
           <a:xfrm>
-            <a:off x="548640" y="4617720"/>
-            <a:ext cx="3383280" cy="731520"/>
+            <a:off x="11109960" y="6446520"/>
+            <a:ext cx="822960" cy="320040"/>
           </a:xfrm>
           <a:prstGeom prst="rect">
             <a:avLst/>
@@ -6724,190 +7697,15 @@
           </a:bodyPr>
           <a:lstStyle/>
           <a:p>
-            <a:pPr algn="l"/>
-            <a:r>
-              <a:rPr sz="1250" b="0" i="0">
+            <a:pPr algn="r"/>
+            <a:r>
+              <a:rPr sz="1100" b="0" i="0">
                 <a:solidFill>
                   <a:srgbClr val="9FB0AE"/>
                 </a:solidFill>
                 <a:latin typeface="Calibri"/>
               </a:rPr>
-              <a:t>Vite + Tailwind, TypeScript estricto</a:t>
-            </a:r>
-          </a:p>
-        </p:txBody>
-      </p:sp>
-      <p:sp>
-        <p:nvSpPr>
-          <p:cNvPr id="14" name="TextBox 13"/>
-          <p:cNvSpPr txBox="1"/>
-          <p:nvPr/>
-        </p:nvSpPr>
-        <p:spPr>
-          <a:xfrm>
-            <a:off x="4206240" y="3977639"/>
-            <a:ext cx="3383280" cy="640080"/>
-          </a:xfrm>
-          <a:prstGeom prst="rect">
-            <a:avLst/>
-          </a:prstGeom>
-          <a:noFill/>
-        </p:spPr>
-        <p:txBody>
-          <a:bodyPr wrap="square">
-            <a:spAutoFit/>
-          </a:bodyPr>
-          <a:lstStyle/>
-          <a:p>
-            <a:pPr algn="l"/>
-            <a:r>
-              <a:rPr sz="2800" b="1" i="0">
-                <a:solidFill>
-                  <a:srgbClr val="FFFFFF"/>
-                </a:solidFill>
-                <a:latin typeface="Calibri"/>
-              </a:rPr>
-              <a:t>31</a:t>
-            </a:r>
-          </a:p>
-        </p:txBody>
-      </p:sp>
-      <p:sp>
-        <p:nvSpPr>
-          <p:cNvPr id="15" name="TextBox 14"/>
-          <p:cNvSpPr txBox="1"/>
-          <p:nvPr/>
-        </p:nvSpPr>
-        <p:spPr>
-          <a:xfrm>
-            <a:off x="4206240" y="4617720"/>
-            <a:ext cx="3383280" cy="731520"/>
-          </a:xfrm>
-          <a:prstGeom prst="rect">
-            <a:avLst/>
-          </a:prstGeom>
-          <a:noFill/>
-        </p:spPr>
-        <p:txBody>
-          <a:bodyPr wrap="square">
-            <a:spAutoFit/>
-          </a:bodyPr>
-          <a:lstStyle/>
-          <a:p>
-            <a:pPr algn="l"/>
-            <a:r>
-              <a:rPr sz="1250" b="0" i="0">
-                <a:solidFill>
-                  <a:srgbClr val="9FB0AE"/>
-                </a:solidFill>
-                <a:latin typeface="Calibri"/>
-              </a:rPr>
-              <a:t>pruebas unitarias en lógica de dominio</a:t>
-            </a:r>
-          </a:p>
-        </p:txBody>
-      </p:sp>
-      <p:sp>
-        <p:nvSpPr>
-          <p:cNvPr id="16" name="TextBox 15"/>
-          <p:cNvSpPr txBox="1"/>
-          <p:nvPr/>
-        </p:nvSpPr>
-        <p:spPr>
-          <a:xfrm>
-            <a:off x="7863840" y="3977639"/>
-            <a:ext cx="3383280" cy="640080"/>
-          </a:xfrm>
-          <a:prstGeom prst="rect">
-            <a:avLst/>
-          </a:prstGeom>
-          <a:noFill/>
-        </p:spPr>
-        <p:txBody>
-          <a:bodyPr wrap="square">
-            <a:spAutoFit/>
-          </a:bodyPr>
-          <a:lstStyle/>
-          <a:p>
-            <a:pPr algn="l"/>
-            <a:r>
-              <a:rPr sz="2800" b="1" i="0">
-                <a:solidFill>
-                  <a:srgbClr val="FFFFFF"/>
-                </a:solidFill>
-                <a:latin typeface="Calibri"/>
-              </a:rPr>
-              <a:t>100%</a:t>
-            </a:r>
-          </a:p>
-        </p:txBody>
-      </p:sp>
-      <p:sp>
-        <p:nvSpPr>
-          <p:cNvPr id="17" name="TextBox 16"/>
-          <p:cNvSpPr txBox="1"/>
-          <p:nvPr/>
-        </p:nvSpPr>
-        <p:spPr>
-          <a:xfrm>
-            <a:off x="7863840" y="4617720"/>
-            <a:ext cx="3383280" cy="731520"/>
-          </a:xfrm>
-          <a:prstGeom prst="rect">
-            <a:avLst/>
-          </a:prstGeom>
-          <a:noFill/>
-        </p:spPr>
-        <p:txBody>
-          <a:bodyPr wrap="square">
-            <a:spAutoFit/>
-          </a:bodyPr>
-          <a:lstStyle/>
-          <a:p>
-            <a:pPr algn="l"/>
-            <a:r>
-              <a:rPr sz="1250" b="0" i="0">
-                <a:solidFill>
-                  <a:srgbClr val="9FB0AE"/>
-                </a:solidFill>
-                <a:latin typeface="Calibri"/>
-              </a:rPr>
-              <a:t>reglas de seguridad reales en Firestore</a:t>
-            </a:r>
-          </a:p>
-        </p:txBody>
-      </p:sp>
-      <p:sp>
-        <p:nvSpPr>
-          <p:cNvPr id="18" name="TextBox 17"/>
-          <p:cNvSpPr txBox="1"/>
-          <p:nvPr/>
-        </p:nvSpPr>
-        <p:spPr>
-          <a:xfrm>
-            <a:off x="11247120" y="6446520"/>
-            <a:ext cx="731520" cy="320040"/>
-          </a:xfrm>
-          <a:prstGeom prst="rect">
-            <a:avLst/>
-          </a:prstGeom>
-          <a:noFill/>
-        </p:spPr>
-        <p:txBody>
-          <a:bodyPr wrap="square">
-            <a:spAutoFit/>
-          </a:bodyPr>
-          <a:lstStyle/>
-          <a:p>
-            <a:pPr algn="r"/>
-            <a:r>
-              <a:rPr sz="1100" b="0" i="0">
-                <a:solidFill>
-                  <a:srgbClr val="9FB0AE"/>
-                </a:solidFill>
-                <a:latin typeface="Calibri"/>
-              </a:rPr>
-              <a:t>6/7</a:t>
+              <a:t>6/9</a:t>
             </a:r>
           </a:p>
         </p:txBody>
@@ -7227,7 +8025,7 @@
         <p:spPr>
           <a:xfrm>
             <a:off x="1051560" y="1161288"/>
-            <a:ext cx="5486400" cy="365760"/>
+            <a:ext cx="6400800" cy="365760"/>
           </a:xfrm>
           <a:prstGeom prst="rect">
             <a:avLst/>
@@ -7248,7 +8046,7 @@
                 </a:solidFill>
                 <a:latin typeface="Calibri"/>
               </a:rPr>
-              <a:t>CIERRE · 2:30–3:00</a:t>
+              <a:t>GITHUB · 2:00–2:30</a:t>
             </a:r>
           </a:p>
         </p:txBody>
@@ -7277,338 +8075,27 @@
           <a:p>
             <a:pPr algn="l"/>
             <a:r>
-              <a:rPr sz="3300" b="1" i="0">
+              <a:rPr sz="3200" b="1" i="0">
                 <a:solidFill>
                   <a:srgbClr val="FFFFFF"/>
                 </a:solidFill>
                 <a:latin typeface="Calibri"/>
               </a:rPr>
-              <a:t>Coordinar la recuperación, caso por caso.</a:t>
-            </a:r>
-          </a:p>
-        </p:txBody>
-      </p:sp>
-      <p:sp>
-        <p:nvSpPr>
-          <p:cNvPr id="11" name="TextBox 10"/>
-          <p:cNvSpPr txBox="1"/>
-          <p:nvPr/>
-        </p:nvSpPr>
-        <p:spPr>
-          <a:xfrm>
-            <a:off x="548640" y="2606040"/>
-            <a:ext cx="9601200" cy="731520"/>
-          </a:xfrm>
-          <a:prstGeom prst="rect">
-            <a:avLst/>
-          </a:prstGeom>
-          <a:noFill/>
-        </p:spPr>
-        <p:txBody>
-          <a:bodyPr wrap="square">
-            <a:spAutoFit/>
-          </a:bodyPr>
-          <a:lstStyle/>
-          <a:p>
-            <a:pPr algn="l"/>
-            <a:r>
-              <a:rPr sz="1600" b="0" i="0">
-                <a:solidFill>
-                  <a:srgbClr val="9FB0AE"/>
-                </a:solidFill>
-                <a:latin typeface="Calibri"/>
-              </a:rPr>
-              <a:t>Lista para un piloto real que puede verificar cientos de casos y reactivar decenas de negocios en semanas, no en meses.</a:t>
-            </a:r>
-          </a:p>
-        </p:txBody>
-      </p:sp>
-      <p:sp>
-        <p:nvSpPr>
-          <p:cNvPr id="12" name="TextBox 11"/>
-          <p:cNvSpPr txBox="1"/>
-          <p:nvPr/>
-        </p:nvSpPr>
-        <p:spPr>
-          <a:xfrm>
-            <a:off x="548640" y="3566160"/>
-            <a:ext cx="2468880" cy="640080"/>
-          </a:xfrm>
-          <a:prstGeom prst="rect">
-            <a:avLst/>
-          </a:prstGeom>
-          <a:noFill/>
-        </p:spPr>
-        <p:txBody>
-          <a:bodyPr wrap="square">
-            <a:spAutoFit/>
-          </a:bodyPr>
-          <a:lstStyle/>
-          <a:p>
-            <a:pPr algn="l"/>
-            <a:r>
-              <a:rPr sz="2600" b="1" i="0">
-                <a:solidFill>
-                  <a:srgbClr val="FFFFFF"/>
-                </a:solidFill>
-                <a:latin typeface="Calibri"/>
-              </a:rPr>
-              <a:t>500</a:t>
-            </a:r>
-          </a:p>
-        </p:txBody>
-      </p:sp>
-      <p:sp>
-        <p:nvSpPr>
-          <p:cNvPr id="13" name="TextBox 12"/>
-          <p:cNvSpPr txBox="1"/>
-          <p:nvPr/>
-        </p:nvSpPr>
-        <p:spPr>
-          <a:xfrm>
-            <a:off x="548640" y="4160520"/>
-            <a:ext cx="2468880" cy="822960"/>
-          </a:xfrm>
-          <a:prstGeom prst="rect">
-            <a:avLst/>
-          </a:prstGeom>
-          <a:noFill/>
-        </p:spPr>
-        <p:txBody>
-          <a:bodyPr wrap="square">
-            <a:spAutoFit/>
-          </a:bodyPr>
-          <a:lstStyle/>
-          <a:p>
-            <a:r>
-              <a:rPr sz="1200">
-                <a:solidFill>
-                  <a:srgbClr val="9FB0AE"/>
-                </a:solidFill>
-                <a:latin typeface="Calibri"/>
-              </a:rPr>
-              <a:t>Unidades productivas registradas</a:t>
-            </a:r>
-          </a:p>
-        </p:txBody>
-      </p:sp>
-      <p:sp>
-        <p:nvSpPr>
-          <p:cNvPr id="14" name="TextBox 13"/>
-          <p:cNvSpPr txBox="1"/>
-          <p:nvPr/>
-        </p:nvSpPr>
-        <p:spPr>
-          <a:xfrm>
-            <a:off x="3200400" y="3566160"/>
-            <a:ext cx="2468880" cy="640080"/>
-          </a:xfrm>
-          <a:prstGeom prst="rect">
-            <a:avLst/>
-          </a:prstGeom>
-          <a:noFill/>
-        </p:spPr>
-        <p:txBody>
-          <a:bodyPr wrap="square">
-            <a:spAutoFit/>
-          </a:bodyPr>
-          <a:lstStyle/>
-          <a:p>
-            <a:pPr algn="l"/>
-            <a:r>
-              <a:rPr sz="2600" b="1" i="0">
-                <a:solidFill>
-                  <a:srgbClr val="FFFFFF"/>
-                </a:solidFill>
-                <a:latin typeface="Calibri"/>
-              </a:rPr>
-              <a:t>80%</a:t>
-            </a:r>
-          </a:p>
-        </p:txBody>
-      </p:sp>
-      <p:sp>
-        <p:nvSpPr>
-          <p:cNvPr id="15" name="TextBox 14"/>
-          <p:cNvSpPr txBox="1"/>
-          <p:nvPr/>
-        </p:nvSpPr>
-        <p:spPr>
-          <a:xfrm>
-            <a:off x="3200400" y="4160520"/>
-            <a:ext cx="2468880" cy="822960"/>
-          </a:xfrm>
-          <a:prstGeom prst="rect">
-            <a:avLst/>
-          </a:prstGeom>
-          <a:noFill/>
-        </p:spPr>
-        <p:txBody>
-          <a:bodyPr wrap="square">
-            <a:spAutoFit/>
-          </a:bodyPr>
-          <a:lstStyle/>
-          <a:p>
-            <a:r>
-              <a:rPr sz="1200">
-                <a:solidFill>
-                  <a:srgbClr val="9FB0AE"/>
-                </a:solidFill>
-                <a:latin typeface="Calibri"/>
-              </a:rPr>
-              <a:t>De los casos verificados</a:t>
-            </a:r>
-          </a:p>
-        </p:txBody>
-      </p:sp>
-      <p:sp>
-        <p:nvSpPr>
-          <p:cNvPr id="16" name="TextBox 15"/>
-          <p:cNvSpPr txBox="1"/>
-          <p:nvPr/>
-        </p:nvSpPr>
-        <p:spPr>
-          <a:xfrm>
-            <a:off x="5852159" y="3566160"/>
-            <a:ext cx="2468880" cy="640080"/>
-          </a:xfrm>
-          <a:prstGeom prst="rect">
-            <a:avLst/>
-          </a:prstGeom>
-          <a:noFill/>
-        </p:spPr>
-        <p:txBody>
-          <a:bodyPr wrap="square">
-            <a:spAutoFit/>
-          </a:bodyPr>
-          <a:lstStyle/>
-          <a:p>
-            <a:pPr algn="l"/>
-            <a:r>
-              <a:rPr sz="2600" b="1" i="0">
-                <a:solidFill>
-                  <a:srgbClr val="FFFFFF"/>
-                </a:solidFill>
-                <a:latin typeface="Calibri"/>
-              </a:rPr>
-              <a:t>100</a:t>
-            </a:r>
-          </a:p>
-        </p:txBody>
-      </p:sp>
-      <p:sp>
-        <p:nvSpPr>
-          <p:cNvPr id="17" name="TextBox 16"/>
-          <p:cNvSpPr txBox="1"/>
-          <p:nvPr/>
-        </p:nvSpPr>
-        <p:spPr>
-          <a:xfrm>
-            <a:off x="5852159" y="4160520"/>
-            <a:ext cx="2468880" cy="822960"/>
-          </a:xfrm>
-          <a:prstGeom prst="rect">
-            <a:avLst/>
-          </a:prstGeom>
-          <a:noFill/>
-        </p:spPr>
-        <p:txBody>
-          <a:bodyPr wrap="square">
-            <a:spAutoFit/>
-          </a:bodyPr>
-          <a:lstStyle/>
-          <a:p>
-            <a:r>
-              <a:rPr sz="1200">
-                <a:solidFill>
-                  <a:srgbClr val="9FB0AE"/>
-                </a:solidFill>
-                <a:latin typeface="Calibri"/>
-              </a:rPr>
-              <a:t>Negocios reactivados</a:t>
-            </a:r>
-          </a:p>
-        </p:txBody>
-      </p:sp>
-      <p:sp>
-        <p:nvSpPr>
-          <p:cNvPr id="18" name="TextBox 17"/>
-          <p:cNvSpPr txBox="1"/>
-          <p:nvPr/>
-        </p:nvSpPr>
-        <p:spPr>
-          <a:xfrm>
-            <a:off x="8503919" y="3566160"/>
-            <a:ext cx="2468880" cy="640080"/>
-          </a:xfrm>
-          <a:prstGeom prst="rect">
-            <a:avLst/>
-          </a:prstGeom>
-          <a:noFill/>
-        </p:spPr>
-        <p:txBody>
-          <a:bodyPr wrap="square">
-            <a:spAutoFit/>
-          </a:bodyPr>
-          <a:lstStyle/>
-          <a:p>
-            <a:pPr algn="l"/>
-            <a:r>
-              <a:rPr sz="2600" b="1" i="0">
-                <a:solidFill>
-                  <a:srgbClr val="FFFFFF"/>
-                </a:solidFill>
-                <a:latin typeface="Calibri"/>
-              </a:rPr>
-              <a:t>150</a:t>
-            </a:r>
-          </a:p>
-        </p:txBody>
-      </p:sp>
-      <p:sp>
-        <p:nvSpPr>
-          <p:cNvPr id="19" name="TextBox 18"/>
-          <p:cNvSpPr txBox="1"/>
-          <p:nvPr/>
-        </p:nvSpPr>
-        <p:spPr>
-          <a:xfrm>
-            <a:off x="8503919" y="4160520"/>
-            <a:ext cx="2468880" cy="822960"/>
-          </a:xfrm>
-          <a:prstGeom prst="rect">
-            <a:avLst/>
-          </a:prstGeom>
-          <a:noFill/>
-        </p:spPr>
-        <p:txBody>
-          <a:bodyPr wrap="square">
-            <a:spAutoFit/>
-          </a:bodyPr>
-          <a:lstStyle/>
-          <a:p>
-            <a:r>
-              <a:rPr sz="1200">
-                <a:solidFill>
-                  <a:srgbClr val="9FB0AE"/>
-                </a:solidFill>
-                <a:latin typeface="Calibri"/>
-              </a:rPr>
-              <a:t>Oportunidades laborales generadas</a:t>
-            </a:r>
-          </a:p>
-        </p:txBody>
-      </p:sp>
-      <p:sp>
-        <p:nvSpPr>
-          <p:cNvPr id="20" name="Rounded Rectangle 19"/>
+              <a:t>Código público, documentado de punta a punta.</a:t>
+            </a:r>
+          </a:p>
+        </p:txBody>
+      </p:sp>
+      <p:sp>
+        <p:nvSpPr>
+          <p:cNvPr id="11" name="Rounded Rectangle 10"/>
           <p:cNvSpPr/>
           <p:nvPr/>
         </p:nvSpPr>
         <p:spPr>
           <a:xfrm>
-            <a:off x="548640" y="5257800"/>
-            <a:ext cx="9875520" cy="1051560"/>
+            <a:off x="548640" y="2743200"/>
+            <a:ext cx="8778240" cy="868680"/>
           </a:xfrm>
           <a:prstGeom prst="roundRect">
             <a:avLst>
@@ -7645,6 +8132,737 @@
           <a:p>
             <a:pPr algn="ctr"/>
             <a:r>
+              <a:rPr sz="1900" b="1">
+                <a:solidFill>
+                  <a:srgbClr val="FFFFFF"/>
+                </a:solidFill>
+                <a:latin typeface="Consolas"/>
+              </a:rPr>
+              <a:t>github.com/lnieto044/ReActiva_Territorio</a:t>
+            </a:r>
+          </a:p>
+        </p:txBody>
+      </p:sp>
+      <p:sp>
+        <p:nvSpPr>
+          <p:cNvPr id="12" name="TextBox 11"/>
+          <p:cNvSpPr txBox="1"/>
+          <p:nvPr/>
+        </p:nvSpPr>
+        <p:spPr>
+          <a:xfrm>
+            <a:off x="548640" y="3977639"/>
+            <a:ext cx="3383280" cy="640080"/>
+          </a:xfrm>
+          <a:prstGeom prst="rect">
+            <a:avLst/>
+          </a:prstGeom>
+          <a:noFill/>
+        </p:spPr>
+        <p:txBody>
+          <a:bodyPr wrap="square">
+            <a:spAutoFit/>
+          </a:bodyPr>
+          <a:lstStyle/>
+          <a:p>
+            <a:pPr algn="l"/>
+            <a:r>
+              <a:rPr sz="2800" b="1" i="0">
+                <a:solidFill>
+                  <a:srgbClr val="FFFFFF"/>
+                </a:solidFill>
+                <a:latin typeface="Calibri"/>
+              </a:rPr>
+              <a:t>React · TS</a:t>
+            </a:r>
+          </a:p>
+        </p:txBody>
+      </p:sp>
+      <p:sp>
+        <p:nvSpPr>
+          <p:cNvPr id="13" name="TextBox 12"/>
+          <p:cNvSpPr txBox="1"/>
+          <p:nvPr/>
+        </p:nvSpPr>
+        <p:spPr>
+          <a:xfrm>
+            <a:off x="548640" y="4617720"/>
+            <a:ext cx="3383280" cy="731520"/>
+          </a:xfrm>
+          <a:prstGeom prst="rect">
+            <a:avLst/>
+          </a:prstGeom>
+          <a:noFill/>
+        </p:spPr>
+        <p:txBody>
+          <a:bodyPr wrap="square">
+            <a:spAutoFit/>
+          </a:bodyPr>
+          <a:lstStyle/>
+          <a:p>
+            <a:pPr algn="l"/>
+            <a:r>
+              <a:rPr sz="1250" b="0" i="0">
+                <a:solidFill>
+                  <a:srgbClr val="9FB0AE"/>
+                </a:solidFill>
+                <a:latin typeface="Calibri"/>
+              </a:rPr>
+              <a:t>Vite + Tailwind, TypeScript estricto</a:t>
+            </a:r>
+          </a:p>
+        </p:txBody>
+      </p:sp>
+      <p:sp>
+        <p:nvSpPr>
+          <p:cNvPr id="14" name="TextBox 13"/>
+          <p:cNvSpPr txBox="1"/>
+          <p:nvPr/>
+        </p:nvSpPr>
+        <p:spPr>
+          <a:xfrm>
+            <a:off x="4206240" y="3977639"/>
+            <a:ext cx="3383280" cy="640080"/>
+          </a:xfrm>
+          <a:prstGeom prst="rect">
+            <a:avLst/>
+          </a:prstGeom>
+          <a:noFill/>
+        </p:spPr>
+        <p:txBody>
+          <a:bodyPr wrap="square">
+            <a:spAutoFit/>
+          </a:bodyPr>
+          <a:lstStyle/>
+          <a:p>
+            <a:pPr algn="l"/>
+            <a:r>
+              <a:rPr sz="2800" b="1" i="0">
+                <a:solidFill>
+                  <a:srgbClr val="FFFFFF"/>
+                </a:solidFill>
+                <a:latin typeface="Calibri"/>
+              </a:rPr>
+              <a:t>31</a:t>
+            </a:r>
+          </a:p>
+        </p:txBody>
+      </p:sp>
+      <p:sp>
+        <p:nvSpPr>
+          <p:cNvPr id="15" name="TextBox 14"/>
+          <p:cNvSpPr txBox="1"/>
+          <p:nvPr/>
+        </p:nvSpPr>
+        <p:spPr>
+          <a:xfrm>
+            <a:off x="4206240" y="4617720"/>
+            <a:ext cx="3383280" cy="731520"/>
+          </a:xfrm>
+          <a:prstGeom prst="rect">
+            <a:avLst/>
+          </a:prstGeom>
+          <a:noFill/>
+        </p:spPr>
+        <p:txBody>
+          <a:bodyPr wrap="square">
+            <a:spAutoFit/>
+          </a:bodyPr>
+          <a:lstStyle/>
+          <a:p>
+            <a:pPr algn="l"/>
+            <a:r>
+              <a:rPr sz="1250" b="0" i="0">
+                <a:solidFill>
+                  <a:srgbClr val="9FB0AE"/>
+                </a:solidFill>
+                <a:latin typeface="Calibri"/>
+              </a:rPr>
+              <a:t>pruebas unitarias en lógica de dominio</a:t>
+            </a:r>
+          </a:p>
+        </p:txBody>
+      </p:sp>
+      <p:sp>
+        <p:nvSpPr>
+          <p:cNvPr id="16" name="TextBox 15"/>
+          <p:cNvSpPr txBox="1"/>
+          <p:nvPr/>
+        </p:nvSpPr>
+        <p:spPr>
+          <a:xfrm>
+            <a:off x="7863840" y="3977639"/>
+            <a:ext cx="3383280" cy="640080"/>
+          </a:xfrm>
+          <a:prstGeom prst="rect">
+            <a:avLst/>
+          </a:prstGeom>
+          <a:noFill/>
+        </p:spPr>
+        <p:txBody>
+          <a:bodyPr wrap="square">
+            <a:spAutoFit/>
+          </a:bodyPr>
+          <a:lstStyle/>
+          <a:p>
+            <a:pPr algn="l"/>
+            <a:r>
+              <a:rPr sz="2800" b="1" i="0">
+                <a:solidFill>
+                  <a:srgbClr val="FFFFFF"/>
+                </a:solidFill>
+                <a:latin typeface="Calibri"/>
+              </a:rPr>
+              <a:t>100%</a:t>
+            </a:r>
+          </a:p>
+        </p:txBody>
+      </p:sp>
+      <p:sp>
+        <p:nvSpPr>
+          <p:cNvPr id="17" name="TextBox 16"/>
+          <p:cNvSpPr txBox="1"/>
+          <p:nvPr/>
+        </p:nvSpPr>
+        <p:spPr>
+          <a:xfrm>
+            <a:off x="7863840" y="4617720"/>
+            <a:ext cx="3383280" cy="731520"/>
+          </a:xfrm>
+          <a:prstGeom prst="rect">
+            <a:avLst/>
+          </a:prstGeom>
+          <a:noFill/>
+        </p:spPr>
+        <p:txBody>
+          <a:bodyPr wrap="square">
+            <a:spAutoFit/>
+          </a:bodyPr>
+          <a:lstStyle/>
+          <a:p>
+            <a:pPr algn="l"/>
+            <a:r>
+              <a:rPr sz="1250" b="0" i="0">
+                <a:solidFill>
+                  <a:srgbClr val="9FB0AE"/>
+                </a:solidFill>
+                <a:latin typeface="Calibri"/>
+              </a:rPr>
+              <a:t>reglas de seguridad reales en Firestore</a:t>
+            </a:r>
+          </a:p>
+        </p:txBody>
+      </p:sp>
+      <p:sp>
+        <p:nvSpPr>
+          <p:cNvPr id="18" name="TextBox 17"/>
+          <p:cNvSpPr txBox="1"/>
+          <p:nvPr/>
+        </p:nvSpPr>
+        <p:spPr>
+          <a:xfrm>
+            <a:off x="11109960" y="6446520"/>
+            <a:ext cx="822960" cy="320040"/>
+          </a:xfrm>
+          <a:prstGeom prst="rect">
+            <a:avLst/>
+          </a:prstGeom>
+          <a:noFill/>
+        </p:spPr>
+        <p:txBody>
+          <a:bodyPr wrap="square">
+            <a:spAutoFit/>
+          </a:bodyPr>
+          <a:lstStyle/>
+          <a:p>
+            <a:pPr algn="r"/>
+            <a:r>
+              <a:rPr sz="1100" b="0" i="0">
+                <a:solidFill>
+                  <a:srgbClr val="9FB0AE"/>
+                </a:solidFill>
+                <a:latin typeface="Calibri"/>
+              </a:rPr>
+              <a:t>7/9</a:t>
+            </a:r>
+          </a:p>
+        </p:txBody>
+      </p:sp>
+    </p:spTree>
+  </p:cSld>
+  <p:clrMapOvr>
+    <a:masterClrMapping/>
+  </p:clrMapOvr>
+</p:sld>
+</file>
+
+<file path=ppt/slides/slide8.xml><?xml version="1.0" encoding="utf-8"?>
+<p:sld xmlns:a="http://schemas.openxmlformats.org/drawingml/2006/main" xmlns:p="http://schemas.openxmlformats.org/presentationml/2006/main" xmlns:r="http://schemas.openxmlformats.org/officeDocument/2006/relationships">
+  <p:cSld>
+    <p:spTree>
+      <p:nvGrpSpPr>
+        <p:cNvPr id="1" name=""/>
+        <p:cNvGrpSpPr/>
+        <p:nvPr/>
+      </p:nvGrpSpPr>
+      <p:grpSpPr/>
+      <p:sp>
+        <p:nvSpPr>
+          <p:cNvPr id="2" name="Rectangle 1"/>
+          <p:cNvSpPr/>
+          <p:nvPr/>
+        </p:nvSpPr>
+        <p:spPr>
+          <a:xfrm>
+            <a:off x="0" y="0"/>
+            <a:ext cx="12191695" cy="6858000"/>
+          </a:xfrm>
+          <a:prstGeom prst="rect">
+            <a:avLst/>
+          </a:prstGeom>
+          <a:solidFill>
+            <a:srgbClr val="0B1626"/>
+          </a:solidFill>
+          <a:ln>
+            <a:noFill/>
+          </a:ln>
+          <a:effectLst/>
+        </p:spPr>
+        <p:style>
+          <a:lnRef idx="1">
+            <a:schemeClr val="accent1"/>
+          </a:lnRef>
+          <a:fillRef idx="3">
+            <a:schemeClr val="accent1"/>
+          </a:fillRef>
+          <a:effectRef idx="2">
+            <a:schemeClr val="accent1"/>
+          </a:effectRef>
+          <a:fontRef idx="minor">
+            <a:schemeClr val="lt1"/>
+          </a:fontRef>
+        </p:style>
+        <p:txBody>
+          <a:bodyPr rtlCol="0" anchor="ctr"/>
+          <a:lstStyle/>
+          <a:p>
+            <a:pPr algn="ctr"/>
+          </a:p>
+        </p:txBody>
+      </p:sp>
+      <p:sp>
+        <p:nvSpPr>
+          <p:cNvPr id="3" name="Oval 2"/>
+          <p:cNvSpPr/>
+          <p:nvPr/>
+        </p:nvSpPr>
+        <p:spPr>
+          <a:xfrm>
+            <a:off x="-2743200" y="-2743200"/>
+            <a:ext cx="8229600" cy="8229600"/>
+          </a:xfrm>
+          <a:prstGeom prst="ellipse">
+            <a:avLst/>
+          </a:prstGeom>
+          <a:solidFill>
+            <a:srgbClr val="142B42"/>
+          </a:solidFill>
+          <a:ln>
+            <a:noFill/>
+          </a:ln>
+          <a:effectLst/>
+        </p:spPr>
+        <p:style>
+          <a:lnRef idx="1">
+            <a:schemeClr val="accent1"/>
+          </a:lnRef>
+          <a:fillRef idx="3">
+            <a:schemeClr val="accent1"/>
+          </a:fillRef>
+          <a:effectRef idx="2">
+            <a:schemeClr val="accent1"/>
+          </a:effectRef>
+          <a:fontRef idx="minor">
+            <a:schemeClr val="lt1"/>
+          </a:fontRef>
+        </p:style>
+        <p:txBody>
+          <a:bodyPr rtlCol="0" anchor="ctr"/>
+          <a:lstStyle/>
+          <a:p>
+            <a:pPr algn="ctr"/>
+          </a:p>
+        </p:txBody>
+      </p:sp>
+      <p:sp>
+        <p:nvSpPr>
+          <p:cNvPr id="4" name="Oval 3"/>
+          <p:cNvSpPr/>
+          <p:nvPr/>
+        </p:nvSpPr>
+        <p:spPr>
+          <a:xfrm>
+            <a:off x="9601200" y="4114800"/>
+            <a:ext cx="5486400" cy="5486400"/>
+          </a:xfrm>
+          <a:prstGeom prst="ellipse">
+            <a:avLst/>
+          </a:prstGeom>
+          <a:solidFill>
+            <a:srgbClr val="142B42"/>
+          </a:solidFill>
+          <a:ln>
+            <a:noFill/>
+          </a:ln>
+          <a:effectLst/>
+        </p:spPr>
+        <p:style>
+          <a:lnRef idx="1">
+            <a:schemeClr val="accent1"/>
+          </a:lnRef>
+          <a:fillRef idx="3">
+            <a:schemeClr val="accent1"/>
+          </a:fillRef>
+          <a:effectRef idx="2">
+            <a:schemeClr val="accent1"/>
+          </a:effectRef>
+          <a:fontRef idx="minor">
+            <a:schemeClr val="lt1"/>
+          </a:fontRef>
+        </p:style>
+        <p:txBody>
+          <a:bodyPr rtlCol="0" anchor="ctr"/>
+          <a:lstStyle/>
+          <a:p>
+            <a:pPr algn="ctr"/>
+          </a:p>
+        </p:txBody>
+      </p:sp>
+      <p:sp>
+        <p:nvSpPr>
+          <p:cNvPr id="5" name="Rounded Rectangle 4"/>
+          <p:cNvSpPr/>
+          <p:nvPr/>
+        </p:nvSpPr>
+        <p:spPr>
+          <a:xfrm>
+            <a:off x="502920" y="365760"/>
+            <a:ext cx="384048" cy="384048"/>
+          </a:xfrm>
+          <a:prstGeom prst="roundRect">
+            <a:avLst>
+              <a:gd name="adj" fmla="val 28000"/>
+            </a:avLst>
+          </a:prstGeom>
+          <a:solidFill>
+            <a:srgbClr val="FFFFFF"/>
+          </a:solidFill>
+          <a:ln>
+            <a:noFill/>
+          </a:ln>
+          <a:effectLst/>
+        </p:spPr>
+        <p:style>
+          <a:lnRef idx="1">
+            <a:schemeClr val="accent1"/>
+          </a:lnRef>
+          <a:fillRef idx="3">
+            <a:schemeClr val="accent1"/>
+          </a:fillRef>
+          <a:effectRef idx="2">
+            <a:schemeClr val="accent1"/>
+          </a:effectRef>
+          <a:fontRef idx="minor">
+            <a:schemeClr val="lt1"/>
+          </a:fontRef>
+        </p:style>
+        <p:txBody>
+          <a:bodyPr rtlCol="0" anchor="ctr"/>
+          <a:lstStyle/>
+          <a:p>
+            <a:pPr algn="ctr"/>
+          </a:p>
+        </p:txBody>
+      </p:sp>
+      <p:pic>
+        <p:nvPicPr>
+          <p:cNvPr id="6" name="Picture 5" descr="logo-icon.png"/>
+          <p:cNvPicPr>
+            <a:picLocks noChangeAspect="1"/>
+          </p:cNvPicPr>
+          <p:nvPr/>
+        </p:nvPicPr>
+        <p:blipFill>
+          <a:blip r:embed="rId2"/>
+          <a:stretch>
+            <a:fillRect/>
+          </a:stretch>
+        </p:blipFill>
+        <p:spPr>
+          <a:xfrm>
+            <a:off x="557784" y="420624"/>
+            <a:ext cx="383084" cy="274320"/>
+          </a:xfrm>
+          <a:prstGeom prst="rect">
+            <a:avLst/>
+          </a:prstGeom>
+        </p:spPr>
+      </p:pic>
+      <p:sp>
+        <p:nvSpPr>
+          <p:cNvPr id="7" name="TextBox 6"/>
+          <p:cNvSpPr txBox="1"/>
+          <p:nvPr/>
+        </p:nvSpPr>
+        <p:spPr>
+          <a:xfrm>
+            <a:off x="987552" y="384048"/>
+            <a:ext cx="3657600" cy="365760"/>
+          </a:xfrm>
+          <a:prstGeom prst="rect">
+            <a:avLst/>
+          </a:prstGeom>
+          <a:noFill/>
+        </p:spPr>
+        <p:txBody>
+          <a:bodyPr wrap="none">
+            <a:spAutoFit/>
+          </a:bodyPr>
+          <a:lstStyle/>
+          <a:p>
+            <a:r>
+              <a:rPr sz="1100" b="1">
+                <a:solidFill>
+                  <a:srgbClr val="9FB0AE"/>
+                </a:solidFill>
+                <a:latin typeface="Calibri"/>
+              </a:rPr>
+              <a:t>REACTIVA TERRITORIO</a:t>
+            </a:r>
+          </a:p>
+        </p:txBody>
+      </p:sp>
+      <p:sp>
+        <p:nvSpPr>
+          <p:cNvPr id="8" name="Oval 7"/>
+          <p:cNvSpPr/>
+          <p:nvPr/>
+        </p:nvSpPr>
+        <p:spPr>
+          <a:xfrm>
+            <a:off x="548640" y="1143000"/>
+            <a:ext cx="365760" cy="365760"/>
+          </a:xfrm>
+          <a:prstGeom prst="ellipse">
+            <a:avLst/>
+          </a:prstGeom>
+          <a:solidFill>
+            <a:srgbClr val="0E9488"/>
+          </a:solidFill>
+          <a:ln>
+            <a:noFill/>
+          </a:ln>
+          <a:effectLst/>
+        </p:spPr>
+        <p:style>
+          <a:lnRef idx="1">
+            <a:schemeClr val="accent1"/>
+          </a:lnRef>
+          <a:fillRef idx="3">
+            <a:schemeClr val="accent1"/>
+          </a:fillRef>
+          <a:effectRef idx="2">
+            <a:schemeClr val="accent1"/>
+          </a:effectRef>
+          <a:fontRef idx="minor">
+            <a:schemeClr val="lt1"/>
+          </a:fontRef>
+        </p:style>
+        <p:txBody>
+          <a:bodyPr rtlCol="0" anchor="ctr"/>
+          <a:lstStyle/>
+          <a:p>
+            <a:pPr algn="ctr"/>
+            <a:r>
+              <a:rPr sz="1400" b="1">
+                <a:solidFill>
+                  <a:srgbClr val="FFFFFF"/>
+                </a:solidFill>
+              </a:rPr>
+              <a:t>7</a:t>
+            </a:r>
+          </a:p>
+        </p:txBody>
+      </p:sp>
+      <p:sp>
+        <p:nvSpPr>
+          <p:cNvPr id="9" name="TextBox 8"/>
+          <p:cNvSpPr txBox="1"/>
+          <p:nvPr/>
+        </p:nvSpPr>
+        <p:spPr>
+          <a:xfrm>
+            <a:off x="1051560" y="1161288"/>
+            <a:ext cx="6400800" cy="365760"/>
+          </a:xfrm>
+          <a:prstGeom prst="rect">
+            <a:avLst/>
+          </a:prstGeom>
+          <a:noFill/>
+        </p:spPr>
+        <p:txBody>
+          <a:bodyPr wrap="square">
+            <a:spAutoFit/>
+          </a:bodyPr>
+          <a:lstStyle/>
+          <a:p>
+            <a:pPr algn="l"/>
+            <a:r>
+              <a:rPr sz="1300" b="1" i="0">
+                <a:solidFill>
+                  <a:srgbClr val="14B8A8"/>
+                </a:solidFill>
+                <a:latin typeface="Calibri"/>
+              </a:rPr>
+              <a:t>CIERRE · 2:30–3:00</a:t>
+            </a:r>
+          </a:p>
+        </p:txBody>
+      </p:sp>
+      <p:sp>
+        <p:nvSpPr>
+          <p:cNvPr id="10" name="TextBox 9"/>
+          <p:cNvSpPr txBox="1"/>
+          <p:nvPr/>
+        </p:nvSpPr>
+        <p:spPr>
+          <a:xfrm>
+            <a:off x="548640" y="1691640"/>
+            <a:ext cx="5486400" cy="1280160"/>
+          </a:xfrm>
+          <a:prstGeom prst="rect">
+            <a:avLst/>
+          </a:prstGeom>
+          <a:noFill/>
+        </p:spPr>
+        <p:txBody>
+          <a:bodyPr wrap="square">
+            <a:spAutoFit/>
+          </a:bodyPr>
+          <a:lstStyle/>
+          <a:p>
+            <a:pPr algn="l"/>
+            <a:r>
+              <a:rPr sz="2700" b="1" i="0">
+                <a:solidFill>
+                  <a:srgbClr val="FFFFFF"/>
+                </a:solidFill>
+                <a:latin typeface="Calibri"/>
+              </a:rPr>
+              <a:t>Coordinar la recuperación, caso por caso.</a:t>
+            </a:r>
+          </a:p>
+        </p:txBody>
+      </p:sp>
+      <p:sp>
+        <p:nvSpPr>
+          <p:cNvPr id="11" name="TextBox 10"/>
+          <p:cNvSpPr txBox="1"/>
+          <p:nvPr/>
+        </p:nvSpPr>
+        <p:spPr>
+          <a:xfrm>
+            <a:off x="548640" y="2743200"/>
+            <a:ext cx="5120640" cy="1097280"/>
+          </a:xfrm>
+          <a:prstGeom prst="rect">
+            <a:avLst/>
+          </a:prstGeom>
+          <a:noFill/>
+        </p:spPr>
+        <p:txBody>
+          <a:bodyPr wrap="square">
+            <a:spAutoFit/>
+          </a:bodyPr>
+          <a:lstStyle/>
+          <a:p>
+            <a:pPr algn="l"/>
+            <a:r>
+              <a:rPr sz="1400" b="0" i="0">
+                <a:solidFill>
+                  <a:srgbClr val="9FB0AE"/>
+                </a:solidFill>
+                <a:latin typeface="Calibri"/>
+              </a:rPr>
+              <a:t>Lista para un piloto real que puede verificar cientos de casos y reactivar decenas de negocios en semanas, no en meses.</a:t>
+            </a:r>
+          </a:p>
+        </p:txBody>
+      </p:sp>
+      <p:graphicFrame>
+        <p:nvGraphicFramePr>
+          <p:cNvPr id="12" name="Chart 11"/>
+          <p:cNvGraphicFramePr>
+            <a:graphicFrameLocks noGrp="1"/>
+          </p:cNvGraphicFramePr>
+          <p:nvPr/>
+        </p:nvGraphicFramePr>
+        <p:xfrm>
+          <a:off x="5943600" y="1691640"/>
+          <a:ext cx="5577840" cy="3200400"/>
+        </p:xfrm>
+        <a:graphic>
+          <a:graphicData uri="http://schemas.openxmlformats.org/drawingml/2006/chart">
+            <c:chart xmlns:c="http://schemas.openxmlformats.org/drawingml/2006/chart" r:id="rId3"/>
+          </a:graphicData>
+        </a:graphic>
+      </p:graphicFrame>
+      <p:sp>
+        <p:nvSpPr>
+          <p:cNvPr id="13" name="Rounded Rectangle 12"/>
+          <p:cNvSpPr/>
+          <p:nvPr/>
+        </p:nvSpPr>
+        <p:spPr>
+          <a:xfrm>
+            <a:off x="548640" y="5120640"/>
+            <a:ext cx="9966960" cy="1234440"/>
+          </a:xfrm>
+          <a:prstGeom prst="roundRect">
+            <a:avLst>
+              <a:gd name="adj" fmla="val 8000"/>
+            </a:avLst>
+          </a:prstGeom>
+          <a:solidFill>
+            <a:srgbClr val="162A47"/>
+          </a:solidFill>
+          <a:ln w="12700">
+            <a:solidFill>
+              <a:srgbClr val="273C5C"/>
+            </a:solidFill>
+          </a:ln>
+          <a:effectLst/>
+        </p:spPr>
+        <p:style>
+          <a:lnRef idx="1">
+            <a:schemeClr val="accent1"/>
+          </a:lnRef>
+          <a:fillRef idx="3">
+            <a:schemeClr val="accent1"/>
+          </a:fillRef>
+          <a:effectRef idx="2">
+            <a:schemeClr val="accent1"/>
+          </a:effectRef>
+          <a:fontRef idx="minor">
+            <a:schemeClr val="lt1"/>
+          </a:fontRef>
+        </p:style>
+        <p:txBody>
+          <a:bodyPr rtlCol="0" anchor="ctr" wrap="square"/>
+          <a:lstStyle/>
+          <a:p>
+            <a:pPr algn="ctr"/>
+            <a:r>
               <a:rPr sz="1800" b="1">
                 <a:solidFill>
                   <a:srgbClr val="FFFFFF"/>
@@ -7670,14 +8888,14 @@
       </p:sp>
       <p:sp>
         <p:nvSpPr>
-          <p:cNvPr id="21" name="TextBox 20"/>
+          <p:cNvPr id="14" name="TextBox 13"/>
           <p:cNvSpPr txBox="1"/>
           <p:nvPr/>
         </p:nvSpPr>
         <p:spPr>
           <a:xfrm>
-            <a:off x="11247120" y="6446520"/>
-            <a:ext cx="731520" cy="320040"/>
+            <a:off x="11109960" y="6446520"/>
+            <a:ext cx="822960" cy="320040"/>
           </a:xfrm>
           <a:prstGeom prst="rect">
             <a:avLst/>
@@ -7698,7 +8916,473 @@
                 </a:solidFill>
                 <a:latin typeface="Calibri"/>
               </a:rPr>
-              <a:t>7/7</a:t>
+              <a:t>8/9</a:t>
+            </a:r>
+          </a:p>
+        </p:txBody>
+      </p:sp>
+    </p:spTree>
+  </p:cSld>
+  <p:clrMapOvr>
+    <a:masterClrMapping/>
+  </p:clrMapOvr>
+</p:sld>
+</file>
+
+<file path=ppt/slides/slide9.xml><?xml version="1.0" encoding="utf-8"?>
+<p:sld xmlns:a="http://schemas.openxmlformats.org/drawingml/2006/main" xmlns:p="http://schemas.openxmlformats.org/presentationml/2006/main" xmlns:r="http://schemas.openxmlformats.org/officeDocument/2006/relationships">
+  <p:cSld>
+    <p:spTree>
+      <p:nvGrpSpPr>
+        <p:cNvPr id="1" name=""/>
+        <p:cNvGrpSpPr/>
+        <p:nvPr/>
+      </p:nvGrpSpPr>
+      <p:grpSpPr/>
+      <p:sp>
+        <p:nvSpPr>
+          <p:cNvPr id="2" name="Rectangle 1"/>
+          <p:cNvSpPr/>
+          <p:nvPr/>
+        </p:nvSpPr>
+        <p:spPr>
+          <a:xfrm>
+            <a:off x="0" y="0"/>
+            <a:ext cx="12191695" cy="6858000"/>
+          </a:xfrm>
+          <a:prstGeom prst="rect">
+            <a:avLst/>
+          </a:prstGeom>
+          <a:solidFill>
+            <a:srgbClr val="0B1626"/>
+          </a:solidFill>
+          <a:ln>
+            <a:noFill/>
+          </a:ln>
+          <a:effectLst/>
+        </p:spPr>
+        <p:style>
+          <a:lnRef idx="1">
+            <a:schemeClr val="accent1"/>
+          </a:lnRef>
+          <a:fillRef idx="3">
+            <a:schemeClr val="accent1"/>
+          </a:fillRef>
+          <a:effectRef idx="2">
+            <a:schemeClr val="accent1"/>
+          </a:effectRef>
+          <a:fontRef idx="minor">
+            <a:schemeClr val="lt1"/>
+          </a:fontRef>
+        </p:style>
+        <p:txBody>
+          <a:bodyPr rtlCol="0" anchor="ctr"/>
+          <a:lstStyle/>
+          <a:p>
+            <a:pPr algn="ctr"/>
+          </a:p>
+        </p:txBody>
+      </p:sp>
+      <p:sp>
+        <p:nvSpPr>
+          <p:cNvPr id="3" name="Oval 2"/>
+          <p:cNvSpPr/>
+          <p:nvPr/>
+        </p:nvSpPr>
+        <p:spPr>
+          <a:xfrm>
+            <a:off x="-2743200" y="-2743200"/>
+            <a:ext cx="8229600" cy="8229600"/>
+          </a:xfrm>
+          <a:prstGeom prst="ellipse">
+            <a:avLst/>
+          </a:prstGeom>
+          <a:solidFill>
+            <a:srgbClr val="142B42"/>
+          </a:solidFill>
+          <a:ln>
+            <a:noFill/>
+          </a:ln>
+          <a:effectLst/>
+        </p:spPr>
+        <p:style>
+          <a:lnRef idx="1">
+            <a:schemeClr val="accent1"/>
+          </a:lnRef>
+          <a:fillRef idx="3">
+            <a:schemeClr val="accent1"/>
+          </a:fillRef>
+          <a:effectRef idx="2">
+            <a:schemeClr val="accent1"/>
+          </a:effectRef>
+          <a:fontRef idx="minor">
+            <a:schemeClr val="lt1"/>
+          </a:fontRef>
+        </p:style>
+        <p:txBody>
+          <a:bodyPr rtlCol="0" anchor="ctr"/>
+          <a:lstStyle/>
+          <a:p>
+            <a:pPr algn="ctr"/>
+          </a:p>
+        </p:txBody>
+      </p:sp>
+      <p:sp>
+        <p:nvSpPr>
+          <p:cNvPr id="4" name="Oval 3"/>
+          <p:cNvSpPr/>
+          <p:nvPr/>
+        </p:nvSpPr>
+        <p:spPr>
+          <a:xfrm>
+            <a:off x="9601200" y="4114800"/>
+            <a:ext cx="5486400" cy="5486400"/>
+          </a:xfrm>
+          <a:prstGeom prst="ellipse">
+            <a:avLst/>
+          </a:prstGeom>
+          <a:solidFill>
+            <a:srgbClr val="142B42"/>
+          </a:solidFill>
+          <a:ln>
+            <a:noFill/>
+          </a:ln>
+          <a:effectLst/>
+        </p:spPr>
+        <p:style>
+          <a:lnRef idx="1">
+            <a:schemeClr val="accent1"/>
+          </a:lnRef>
+          <a:fillRef idx="3">
+            <a:schemeClr val="accent1"/>
+          </a:fillRef>
+          <a:effectRef idx="2">
+            <a:schemeClr val="accent1"/>
+          </a:effectRef>
+          <a:fontRef idx="minor">
+            <a:schemeClr val="lt1"/>
+          </a:fontRef>
+        </p:style>
+        <p:txBody>
+          <a:bodyPr rtlCol="0" anchor="ctr"/>
+          <a:lstStyle/>
+          <a:p>
+            <a:pPr algn="ctr"/>
+          </a:p>
+        </p:txBody>
+      </p:sp>
+      <p:sp>
+        <p:nvSpPr>
+          <p:cNvPr id="5" name="Rounded Rectangle 4"/>
+          <p:cNvSpPr/>
+          <p:nvPr/>
+        </p:nvSpPr>
+        <p:spPr>
+          <a:xfrm>
+            <a:off x="502920" y="365760"/>
+            <a:ext cx="384048" cy="384048"/>
+          </a:xfrm>
+          <a:prstGeom prst="roundRect">
+            <a:avLst>
+              <a:gd name="adj" fmla="val 28000"/>
+            </a:avLst>
+          </a:prstGeom>
+          <a:solidFill>
+            <a:srgbClr val="FFFFFF"/>
+          </a:solidFill>
+          <a:ln>
+            <a:noFill/>
+          </a:ln>
+          <a:effectLst/>
+        </p:spPr>
+        <p:style>
+          <a:lnRef idx="1">
+            <a:schemeClr val="accent1"/>
+          </a:lnRef>
+          <a:fillRef idx="3">
+            <a:schemeClr val="accent1"/>
+          </a:fillRef>
+          <a:effectRef idx="2">
+            <a:schemeClr val="accent1"/>
+          </a:effectRef>
+          <a:fontRef idx="minor">
+            <a:schemeClr val="lt1"/>
+          </a:fontRef>
+        </p:style>
+        <p:txBody>
+          <a:bodyPr rtlCol="0" anchor="ctr"/>
+          <a:lstStyle/>
+          <a:p>
+            <a:pPr algn="ctr"/>
+          </a:p>
+        </p:txBody>
+      </p:sp>
+      <p:pic>
+        <p:nvPicPr>
+          <p:cNvPr id="6" name="Picture 5" descr="logo-icon.png"/>
+          <p:cNvPicPr>
+            <a:picLocks noChangeAspect="1"/>
+          </p:cNvPicPr>
+          <p:nvPr/>
+        </p:nvPicPr>
+        <p:blipFill>
+          <a:blip r:embed="rId2"/>
+          <a:stretch>
+            <a:fillRect/>
+          </a:stretch>
+        </p:blipFill>
+        <p:spPr>
+          <a:xfrm>
+            <a:off x="557784" y="420624"/>
+            <a:ext cx="383084" cy="274320"/>
+          </a:xfrm>
+          <a:prstGeom prst="rect">
+            <a:avLst/>
+          </a:prstGeom>
+        </p:spPr>
+      </p:pic>
+      <p:sp>
+        <p:nvSpPr>
+          <p:cNvPr id="7" name="TextBox 6"/>
+          <p:cNvSpPr txBox="1"/>
+          <p:nvPr/>
+        </p:nvSpPr>
+        <p:spPr>
+          <a:xfrm>
+            <a:off x="987552" y="384048"/>
+            <a:ext cx="3657600" cy="365760"/>
+          </a:xfrm>
+          <a:prstGeom prst="rect">
+            <a:avLst/>
+          </a:prstGeom>
+          <a:noFill/>
+        </p:spPr>
+        <p:txBody>
+          <a:bodyPr wrap="none">
+            <a:spAutoFit/>
+          </a:bodyPr>
+          <a:lstStyle/>
+          <a:p>
+            <a:r>
+              <a:rPr sz="1100" b="1">
+                <a:solidFill>
+                  <a:srgbClr val="9FB0AE"/>
+                </a:solidFill>
+                <a:latin typeface="Calibri"/>
+              </a:rPr>
+              <a:t>REACTIVA TERRITORIO</a:t>
+            </a:r>
+          </a:p>
+        </p:txBody>
+      </p:sp>
+      <p:sp>
+        <p:nvSpPr>
+          <p:cNvPr id="8" name="TextBox 7"/>
+          <p:cNvSpPr txBox="1"/>
+          <p:nvPr/>
+        </p:nvSpPr>
+        <p:spPr>
+          <a:xfrm>
+            <a:off x="548640" y="1371600"/>
+            <a:ext cx="10515600" cy="914400"/>
+          </a:xfrm>
+          <a:prstGeom prst="rect">
+            <a:avLst/>
+          </a:prstGeom>
+          <a:noFill/>
+        </p:spPr>
+        <p:txBody>
+          <a:bodyPr wrap="square">
+            <a:spAutoFit/>
+          </a:bodyPr>
+          <a:lstStyle/>
+          <a:p>
+            <a:pPr algn="ctr"/>
+            <a:r>
+              <a:rPr sz="4000" b="1" i="0">
+                <a:solidFill>
+                  <a:srgbClr val="FFFFFF"/>
+                </a:solidFill>
+                <a:latin typeface="Calibri"/>
+              </a:rPr>
+              <a:t>Escanéala. Ya existe.</a:t>
+            </a:r>
+          </a:p>
+        </p:txBody>
+      </p:sp>
+      <p:sp>
+        <p:nvSpPr>
+          <p:cNvPr id="9" name="TextBox 8"/>
+          <p:cNvSpPr txBox="1"/>
+          <p:nvPr/>
+        </p:nvSpPr>
+        <p:spPr>
+          <a:xfrm>
+            <a:off x="548640" y="2148840"/>
+            <a:ext cx="10515600" cy="548640"/>
+          </a:xfrm>
+          <a:prstGeom prst="rect">
+            <a:avLst/>
+          </a:prstGeom>
+          <a:noFill/>
+        </p:spPr>
+        <p:txBody>
+          <a:bodyPr wrap="square">
+            <a:spAutoFit/>
+          </a:bodyPr>
+          <a:lstStyle/>
+          <a:p>
+            <a:pPr algn="ctr"/>
+            <a:r>
+              <a:rPr sz="1800" b="0" i="0">
+                <a:solidFill>
+                  <a:srgbClr val="9FB0AE"/>
+                </a:solidFill>
+                <a:latin typeface="Calibri"/>
+              </a:rPr>
+              <a:t>Entra ahora mismo a la plataforma en vivo</a:t>
+            </a:r>
+          </a:p>
+        </p:txBody>
+      </p:sp>
+      <p:sp>
+        <p:nvSpPr>
+          <p:cNvPr id="10" name="Rounded Rectangle 9"/>
+          <p:cNvSpPr/>
+          <p:nvPr/>
+        </p:nvSpPr>
+        <p:spPr>
+          <a:xfrm>
+            <a:off x="4449927" y="2880360"/>
+            <a:ext cx="3291840" cy="3291840"/>
+          </a:xfrm>
+          <a:prstGeom prst="roundRect">
+            <a:avLst>
+              <a:gd name="adj" fmla="val 8000"/>
+            </a:avLst>
+          </a:prstGeom>
+          <a:solidFill>
+            <a:srgbClr val="FFFFFF"/>
+          </a:solidFill>
+          <a:ln w="12700">
+            <a:solidFill>
+              <a:srgbClr val="273C5C"/>
+            </a:solidFill>
+          </a:ln>
+          <a:effectLst/>
+        </p:spPr>
+        <p:style>
+          <a:lnRef idx="1">
+            <a:schemeClr val="accent1"/>
+          </a:lnRef>
+          <a:fillRef idx="3">
+            <a:schemeClr val="accent1"/>
+          </a:fillRef>
+          <a:effectRef idx="2">
+            <a:schemeClr val="accent1"/>
+          </a:effectRef>
+          <a:fontRef idx="minor">
+            <a:schemeClr val="lt1"/>
+          </a:fontRef>
+        </p:style>
+        <p:txBody>
+          <a:bodyPr rtlCol="0" anchor="ctr"/>
+          <a:lstStyle/>
+          <a:p>
+            <a:pPr algn="ctr"/>
+          </a:p>
+        </p:txBody>
+      </p:sp>
+      <p:pic>
+        <p:nvPicPr>
+          <p:cNvPr id="11" name="Picture 10" descr="qr.png"/>
+          <p:cNvPicPr>
+            <a:picLocks noChangeAspect="1"/>
+          </p:cNvPicPr>
+          <p:nvPr/>
+        </p:nvPicPr>
+        <p:blipFill>
+          <a:blip r:embed="rId3"/>
+          <a:stretch>
+            <a:fillRect/>
+          </a:stretch>
+        </p:blipFill>
+        <p:spPr>
+          <a:xfrm>
+            <a:off x="4678527" y="3108960"/>
+            <a:ext cx="2834640" cy="2834640"/>
+          </a:xfrm>
+          <a:prstGeom prst="rect">
+            <a:avLst/>
+          </a:prstGeom>
+        </p:spPr>
+      </p:pic>
+      <p:sp>
+        <p:nvSpPr>
+          <p:cNvPr id="12" name="TextBox 11"/>
+          <p:cNvSpPr txBox="1"/>
+          <p:nvPr/>
+        </p:nvSpPr>
+        <p:spPr>
+          <a:xfrm>
+            <a:off x="548640" y="6172200"/>
+            <a:ext cx="10515600" cy="457200"/>
+          </a:xfrm>
+          <a:prstGeom prst="rect">
+            <a:avLst/>
+          </a:prstGeom>
+          <a:noFill/>
+        </p:spPr>
+        <p:txBody>
+          <a:bodyPr wrap="square">
+            <a:spAutoFit/>
+          </a:bodyPr>
+          <a:lstStyle/>
+          <a:p>
+            <a:pPr algn="ctr"/>
+            <a:r>
+              <a:rPr sz="2000" b="1" i="0">
+                <a:solidFill>
+                  <a:srgbClr val="14B8A8"/>
+                </a:solidFill>
+                <a:latin typeface="Consolas"/>
+              </a:rPr>
+              <a:t>reactivaterritorio.web.app</a:t>
+            </a:r>
+          </a:p>
+        </p:txBody>
+      </p:sp>
+      <p:sp>
+        <p:nvSpPr>
+          <p:cNvPr id="13" name="TextBox 12"/>
+          <p:cNvSpPr txBox="1"/>
+          <p:nvPr/>
+        </p:nvSpPr>
+        <p:spPr>
+          <a:xfrm>
+            <a:off x="11109960" y="6446520"/>
+            <a:ext cx="822960" cy="320040"/>
+          </a:xfrm>
+          <a:prstGeom prst="rect">
+            <a:avLst/>
+          </a:prstGeom>
+          <a:noFill/>
+        </p:spPr>
+        <p:txBody>
+          <a:bodyPr wrap="square">
+            <a:spAutoFit/>
+          </a:bodyPr>
+          <a:lstStyle/>
+          <a:p>
+            <a:pPr algn="r"/>
+            <a:r>
+              <a:rPr sz="1100" b="0" i="0">
+                <a:solidFill>
+                  <a:srgbClr val="9FB0AE"/>
+                </a:solidFill>
+                <a:latin typeface="Calibri"/>
+              </a:rPr>
+              <a:t>9/9</a:t>
             </a:r>
           </a:p>
         </p:txBody>
